--- a/Tierpark_Goldau_Presentation.pptx
+++ b/Tierpark_Goldau_Presentation.pptx
@@ -120,160 +120,6 @@
     </p:ext>
   </p:extLst>
 </p:presentation>
-</file>
-
-<file path=ppt/changesInfos/changesInfo1.xml><?xml version="1.0" encoding="utf-8"?>
-<pc:chgInfo xmlns:a="http://schemas.openxmlformats.org/drawingml/2006/main" xmlns:r="http://schemas.openxmlformats.org/officeDocument/2006/relationships" xmlns:ac="http://schemas.microsoft.com/office/drawing/2013/main/command" xmlns:pc="http://schemas.microsoft.com/office/powerpoint/2013/main/command">
-  <pc:docChgLst>
-    <pc:chgData name="Keethan Nathan (s)" userId="0f5bfc72-6e58-4b9d-b756-1f6026538ee5" providerId="ADAL" clId="{648DECDB-0F43-48AD-800F-5E7A0F5D00A3}"/>
-    <pc:docChg chg="undo custSel modSld">
-      <pc:chgData name="Keethan Nathan (s)" userId="0f5bfc72-6e58-4b9d-b756-1f6026538ee5" providerId="ADAL" clId="{648DECDB-0F43-48AD-800F-5E7A0F5D00A3}" dt="2026-05-22T07:17:21.841" v="21" actId="20577"/>
-      <pc:docMkLst>
-        <pc:docMk/>
-      </pc:docMkLst>
-      <pc:sldChg chg="modSp mod">
-        <pc:chgData name="Keethan Nathan (s)" userId="0f5bfc72-6e58-4b9d-b756-1f6026538ee5" providerId="ADAL" clId="{648DECDB-0F43-48AD-800F-5E7A0F5D00A3}" dt="2026-05-22T07:17:21.841" v="21" actId="20577"/>
-        <pc:sldMkLst>
-          <pc:docMk/>
-          <pc:sldMk cId="0" sldId="256"/>
-        </pc:sldMkLst>
-        <pc:spChg chg="mod">
-          <ac:chgData name="Keethan Nathan (s)" userId="0f5bfc72-6e58-4b9d-b756-1f6026538ee5" providerId="ADAL" clId="{648DECDB-0F43-48AD-800F-5E7A0F5D00A3}" dt="2026-05-22T07:17:21.841" v="21" actId="20577"/>
-          <ac:spMkLst>
-            <pc:docMk/>
-            <pc:sldMk cId="0" sldId="256"/>
-            <ac:spMk id="5" creationId="{00000000-0000-0000-0000-000000000000}"/>
-          </ac:spMkLst>
-        </pc:spChg>
-      </pc:sldChg>
-      <pc:sldChg chg="modSp mod">
-        <pc:chgData name="Keethan Nathan (s)" userId="0f5bfc72-6e58-4b9d-b756-1f6026538ee5" providerId="ADAL" clId="{648DECDB-0F43-48AD-800F-5E7A0F5D00A3}" dt="2026-05-22T07:05:37.962" v="18" actId="1076"/>
-        <pc:sldMkLst>
-          <pc:docMk/>
-          <pc:sldMk cId="0" sldId="257"/>
-        </pc:sldMkLst>
-        <pc:spChg chg="mod">
-          <ac:chgData name="Keethan Nathan (s)" userId="0f5bfc72-6e58-4b9d-b756-1f6026538ee5" providerId="ADAL" clId="{648DECDB-0F43-48AD-800F-5E7A0F5D00A3}" dt="2026-05-22T07:05:37.962" v="18" actId="1076"/>
-          <ac:spMkLst>
-            <pc:docMk/>
-            <pc:sldMk cId="0" sldId="257"/>
-            <ac:spMk id="11" creationId="{00000000-0000-0000-0000-000000000000}"/>
-          </ac:spMkLst>
-        </pc:spChg>
-        <pc:spChg chg="mod">
-          <ac:chgData name="Keethan Nathan (s)" userId="0f5bfc72-6e58-4b9d-b756-1f6026538ee5" providerId="ADAL" clId="{648DECDB-0F43-48AD-800F-5E7A0F5D00A3}" dt="2026-05-22T06:58:38.615" v="11" actId="20577"/>
-          <ac:spMkLst>
-            <pc:docMk/>
-            <pc:sldMk cId="0" sldId="257"/>
-            <ac:spMk id="17" creationId="{00000000-0000-0000-0000-000000000000}"/>
-          </ac:spMkLst>
-        </pc:spChg>
-        <pc:spChg chg="mod">
-          <ac:chgData name="Keethan Nathan (s)" userId="0f5bfc72-6e58-4b9d-b756-1f6026538ee5" providerId="ADAL" clId="{648DECDB-0F43-48AD-800F-5E7A0F5D00A3}" dt="2026-05-22T06:58:47.355" v="16" actId="20577"/>
-          <ac:spMkLst>
-            <pc:docMk/>
-            <pc:sldMk cId="0" sldId="257"/>
-            <ac:spMk id="20" creationId="{00000000-0000-0000-0000-000000000000}"/>
-          </ac:spMkLst>
-        </pc:spChg>
-      </pc:sldChg>
-      <pc:sldChg chg="delSp mod">
-        <pc:chgData name="Keethan Nathan (s)" userId="0f5bfc72-6e58-4b9d-b756-1f6026538ee5" providerId="ADAL" clId="{648DECDB-0F43-48AD-800F-5E7A0F5D00A3}" dt="2026-05-22T07:06:18.722" v="19" actId="478"/>
-        <pc:sldMkLst>
-          <pc:docMk/>
-          <pc:sldMk cId="0" sldId="258"/>
-        </pc:sldMkLst>
-        <pc:spChg chg="del">
-          <ac:chgData name="Keethan Nathan (s)" userId="0f5bfc72-6e58-4b9d-b756-1f6026538ee5" providerId="ADAL" clId="{648DECDB-0F43-48AD-800F-5E7A0F5D00A3}" dt="2026-05-22T07:06:18.722" v="19" actId="478"/>
-          <ac:spMkLst>
-            <pc:docMk/>
-            <pc:sldMk cId="0" sldId="258"/>
-            <ac:spMk id="31" creationId="{00000000-0000-0000-0000-000000000000}"/>
-          </ac:spMkLst>
-        </pc:spChg>
-      </pc:sldChg>
-      <pc:sldChg chg="delSp modSp mod">
-        <pc:chgData name="Keethan Nathan (s)" userId="0f5bfc72-6e58-4b9d-b756-1f6026538ee5" providerId="ADAL" clId="{648DECDB-0F43-48AD-800F-5E7A0F5D00A3}" dt="2026-05-22T06:55:52.933" v="8" actId="478"/>
-        <pc:sldMkLst>
-          <pc:docMk/>
-          <pc:sldMk cId="0" sldId="263"/>
-        </pc:sldMkLst>
-        <pc:spChg chg="mod">
-          <ac:chgData name="Keethan Nathan (s)" userId="0f5bfc72-6e58-4b9d-b756-1f6026538ee5" providerId="ADAL" clId="{648DECDB-0F43-48AD-800F-5E7A0F5D00A3}" dt="2026-05-22T06:54:57.665" v="0" actId="207"/>
-          <ac:spMkLst>
-            <pc:docMk/>
-            <pc:sldMk cId="0" sldId="263"/>
-            <ac:spMk id="10" creationId="{00000000-0000-0000-0000-000000000000}"/>
-          </ac:spMkLst>
-        </pc:spChg>
-        <pc:spChg chg="mod">
-          <ac:chgData name="Keethan Nathan (s)" userId="0f5bfc72-6e58-4b9d-b756-1f6026538ee5" providerId="ADAL" clId="{648DECDB-0F43-48AD-800F-5E7A0F5D00A3}" dt="2026-05-22T06:55:21.159" v="4" actId="207"/>
-          <ac:spMkLst>
-            <pc:docMk/>
-            <pc:sldMk cId="0" sldId="263"/>
-            <ac:spMk id="11" creationId="{00000000-0000-0000-0000-000000000000}"/>
-          </ac:spMkLst>
-        </pc:spChg>
-        <pc:spChg chg="mod">
-          <ac:chgData name="Keethan Nathan (s)" userId="0f5bfc72-6e58-4b9d-b756-1f6026538ee5" providerId="ADAL" clId="{648DECDB-0F43-48AD-800F-5E7A0F5D00A3}" dt="2026-05-22T06:55:02.167" v="1" actId="207"/>
-          <ac:spMkLst>
-            <pc:docMk/>
-            <pc:sldMk cId="0" sldId="263"/>
-            <ac:spMk id="16" creationId="{00000000-0000-0000-0000-000000000000}"/>
-          </ac:spMkLst>
-        </pc:spChg>
-        <pc:spChg chg="mod">
-          <ac:chgData name="Keethan Nathan (s)" userId="0f5bfc72-6e58-4b9d-b756-1f6026538ee5" providerId="ADAL" clId="{648DECDB-0F43-48AD-800F-5E7A0F5D00A3}" dt="2026-05-22T06:55:25.662" v="5" actId="207"/>
-          <ac:spMkLst>
-            <pc:docMk/>
-            <pc:sldMk cId="0" sldId="263"/>
-            <ac:spMk id="17" creationId="{00000000-0000-0000-0000-000000000000}"/>
-          </ac:spMkLst>
-        </pc:spChg>
-        <pc:spChg chg="mod">
-          <ac:chgData name="Keethan Nathan (s)" userId="0f5bfc72-6e58-4b9d-b756-1f6026538ee5" providerId="ADAL" clId="{648DECDB-0F43-48AD-800F-5E7A0F5D00A3}" dt="2026-05-22T06:55:08.206" v="2" actId="207"/>
-          <ac:spMkLst>
-            <pc:docMk/>
-            <pc:sldMk cId="0" sldId="263"/>
-            <ac:spMk id="22" creationId="{00000000-0000-0000-0000-000000000000}"/>
-          </ac:spMkLst>
-        </pc:spChg>
-        <pc:spChg chg="mod">
-          <ac:chgData name="Keethan Nathan (s)" userId="0f5bfc72-6e58-4b9d-b756-1f6026538ee5" providerId="ADAL" clId="{648DECDB-0F43-48AD-800F-5E7A0F5D00A3}" dt="2026-05-22T06:55:30.240" v="6" actId="207"/>
-          <ac:spMkLst>
-            <pc:docMk/>
-            <pc:sldMk cId="0" sldId="263"/>
-            <ac:spMk id="23" creationId="{00000000-0000-0000-0000-000000000000}"/>
-          </ac:spMkLst>
-        </pc:spChg>
-        <pc:spChg chg="mod">
-          <ac:chgData name="Keethan Nathan (s)" userId="0f5bfc72-6e58-4b9d-b756-1f6026538ee5" providerId="ADAL" clId="{648DECDB-0F43-48AD-800F-5E7A0F5D00A3}" dt="2026-05-22T06:55:14.176" v="3" actId="207"/>
-          <ac:spMkLst>
-            <pc:docMk/>
-            <pc:sldMk cId="0" sldId="263"/>
-            <ac:spMk id="28" creationId="{00000000-0000-0000-0000-000000000000}"/>
-          </ac:spMkLst>
-        </pc:spChg>
-        <pc:spChg chg="mod">
-          <ac:chgData name="Keethan Nathan (s)" userId="0f5bfc72-6e58-4b9d-b756-1f6026538ee5" providerId="ADAL" clId="{648DECDB-0F43-48AD-800F-5E7A0F5D00A3}" dt="2026-05-22T06:55:39.128" v="7" actId="207"/>
-          <ac:spMkLst>
-            <pc:docMk/>
-            <pc:sldMk cId="0" sldId="263"/>
-            <ac:spMk id="29" creationId="{00000000-0000-0000-0000-000000000000}"/>
-          </ac:spMkLst>
-        </pc:spChg>
-        <pc:spChg chg="del">
-          <ac:chgData name="Keethan Nathan (s)" userId="0f5bfc72-6e58-4b9d-b756-1f6026538ee5" providerId="ADAL" clId="{648DECDB-0F43-48AD-800F-5E7A0F5D00A3}" dt="2026-05-22T06:55:52.933" v="8" actId="478"/>
-          <ac:spMkLst>
-            <pc:docMk/>
-            <pc:sldMk cId="0" sldId="263"/>
-            <ac:spMk id="30" creationId="{00000000-0000-0000-0000-000000000000}"/>
-          </ac:spMkLst>
-        </pc:spChg>
-      </pc:sldChg>
-    </pc:docChg>
-  </pc:docChgLst>
-</pc:chgInfo>
 </file>
 
 <file path=ppt/notesMasters/notesMaster1.xml><?xml version="1.0" encoding="utf-8"?>
@@ -1566,6 +1412,14 @@
 <file path=ppt/slides/slide1.xml><?xml version="1.0" encoding="utf-8"?>
 <p:sld xmlns:a="http://schemas.openxmlformats.org/drawingml/2006/main" xmlns:r="http://schemas.openxmlformats.org/officeDocument/2006/relationships" xmlns:p="http://schemas.openxmlformats.org/presentationml/2006/main">
   <p:cSld name="Slide 1">
+    <p:bg>
+      <p:bgPr>
+        <a:solidFill>
+          <a:srgbClr val="1A2A42"/>
+        </a:solidFill>
+        <a:effectLst/>
+      </p:bgPr>
+    </p:bg>
     <p:spTree>
       <p:nvGrpSpPr>
         <p:cNvPr id="1" name=""/>
@@ -1595,7 +1449,7 @@
             <a:avLst/>
           </a:prstGeom>
           <a:solidFill>
-            <a:srgbClr val="FFC000"/>
+            <a:srgbClr val="F4F1EC"/>
           </a:solidFill>
           <a:ln w="12700">
             <a:noFill/>
@@ -1637,20 +1491,27 @@
             <a:r>
               <a:rPr lang="en-US" sz="4400" b="1" dirty="0" err="1">
                 <a:solidFill>
-                  <a:srgbClr val="FFFFFF"/>
+                  <a:srgbClr val="C0994B"/>
                 </a:solidFill>
+                <a:latin typeface="BODONI 72 BOOK" pitchFamily="2" charset="0"/>
               </a:rPr>
               <a:t>Alpenblick</a:t>
             </a:r>
             <a:r>
               <a:rPr lang="en-US" sz="4400" b="1" dirty="0">
                 <a:solidFill>
-                  <a:srgbClr val="FFFFFF"/>
+                  <a:srgbClr val="C0994B"/>
                 </a:solidFill>
+                <a:latin typeface="BODONI 72 BOOK" pitchFamily="2" charset="0"/>
               </a:rPr>
               <a:t> Consulting AG</a:t>
             </a:r>
-            <a:endParaRPr lang="en-US" sz="4400" dirty="0"/>
+            <a:endParaRPr lang="en-US" sz="4400" dirty="0">
+              <a:solidFill>
+                <a:srgbClr val="C0994B"/>
+              </a:solidFill>
+              <a:latin typeface="Bodoni 72 Book" pitchFamily="2" charset="0"/>
+            </a:endParaRPr>
           </a:p>
         </p:txBody>
       </p:sp>
@@ -1682,14 +1543,17 @@
               <a:buNone/>
             </a:pPr>
             <a:r>
-              <a:rPr lang="en-US" sz="3000" b="1" dirty="0">
+              <a:rPr lang="en-US" sz="3000" dirty="0">
                 <a:solidFill>
                   <a:srgbClr val="FFFFFF"/>
                 </a:solidFill>
+                <a:latin typeface="Aptos" panose="020B0004020202020204" pitchFamily="34" charset="0"/>
               </a:rPr>
               <a:t>Recruitment Process Automation</a:t>
             </a:r>
-            <a:endParaRPr lang="en-US" sz="3000" dirty="0"/>
+            <a:endParaRPr lang="en-US" sz="3000" dirty="0">
+              <a:latin typeface="Aptos" panose="020B0004020202020204" pitchFamily="34" charset="0"/>
+            </a:endParaRPr>
           </a:p>
         </p:txBody>
       </p:sp>
@@ -1722,6 +1586,7 @@
                 <a:solidFill>
                   <a:srgbClr val="D0F4F4"/>
                 </a:solidFill>
+                <a:latin typeface="Aptos" panose="020B0004020202020204" pitchFamily="34" charset="0"/>
               </a:rPr>
               <a:t>Ece Kaya, Furkan Aydin, Dominic </a:t>
             </a:r>
@@ -1730,6 +1595,7 @@
                 <a:solidFill>
                   <a:srgbClr val="D0F4F4"/>
                 </a:solidFill>
+                <a:latin typeface="Aptos" panose="020B0004020202020204" pitchFamily="34" charset="0"/>
               </a:rPr>
               <a:t>Däster</a:t>
             </a:r>
@@ -1738,10 +1604,13 @@
                 <a:solidFill>
                   <a:srgbClr val="D0F4F4"/>
                 </a:solidFill>
+                <a:latin typeface="Aptos" panose="020B0004020202020204" pitchFamily="34" charset="0"/>
               </a:rPr>
               <a:t>, Keethan Nathan</a:t>
             </a:r>
-            <a:endParaRPr lang="en-US" sz="800" dirty="0"/>
+            <a:endParaRPr lang="en-US" sz="800" dirty="0">
+              <a:latin typeface="Aptos" panose="020B0004020202020204" pitchFamily="34" charset="0"/>
+            </a:endParaRPr>
           </a:p>
         </p:txBody>
       </p:sp>
@@ -1756,6 +1625,14 @@
 <file path=ppt/slides/slide2.xml><?xml version="1.0" encoding="utf-8"?>
 <p:sld xmlns:a="http://schemas.openxmlformats.org/drawingml/2006/main" xmlns:r="http://schemas.openxmlformats.org/officeDocument/2006/relationships" xmlns:p="http://schemas.openxmlformats.org/presentationml/2006/main">
   <p:cSld>
+    <p:bg>
+      <p:bgPr>
+        <a:solidFill>
+          <a:srgbClr val="1A2A42"/>
+        </a:solidFill>
+        <a:effectLst/>
+      </p:bgPr>
+    </p:bg>
     <p:spTree>
       <p:nvGrpSpPr>
         <p:cNvPr id="1" name="">
@@ -1790,7 +1667,7 @@
         </p:nvSpPr>
         <p:spPr>
           <a:xfrm>
-            <a:off x="228600" y="365760"/>
+            <a:off x="228600" y="375091"/>
             <a:ext cx="8686800" cy="594360"/>
           </a:xfrm>
           <a:prstGeom prst="rect">
@@ -1809,23 +1686,26 @@
             <a:r>
               <a:rPr lang="en-US" sz="3000" b="1" dirty="0" err="1">
                 <a:solidFill>
-                  <a:srgbClr val="FFC000"/>
+                  <a:srgbClr val="C0994B"/>
                 </a:solidFill>
+                <a:latin typeface="BODONI 72 BOOK" pitchFamily="2" charset="0"/>
               </a:rPr>
               <a:t>Alpenblick</a:t>
             </a:r>
             <a:r>
               <a:rPr lang="en-US" sz="3000" b="1" dirty="0">
                 <a:solidFill>
-                  <a:srgbClr val="FFC000"/>
+                  <a:srgbClr val="C0994B"/>
                 </a:solidFill>
+                <a:latin typeface="BODONI 72 BOOK" pitchFamily="2" charset="0"/>
               </a:rPr>
               <a:t> Consulting AG</a:t>
             </a:r>
             <a:endParaRPr lang="en-US" sz="3000" dirty="0">
               <a:solidFill>
-                <a:srgbClr val="FFC000"/>
+                <a:srgbClr val="C0994B"/>
               </a:solidFill>
+              <a:latin typeface="Bodoni 72 Book" pitchFamily="2" charset="0"/>
             </a:endParaRPr>
           </a:p>
         </p:txBody>
@@ -1851,9 +1731,7 @@
             <a:avLst/>
           </a:prstGeom>
           <a:solidFill>
-            <a:schemeClr val="accent1">
-              <a:lumMod val="75000"/>
-            </a:schemeClr>
+            <a:srgbClr val="F4F1EC"/>
           </a:solidFill>
           <a:ln w="12700">
             <a:noFill/>
@@ -1912,9 +1790,9 @@
             <a:r>
               <a:rPr lang="en-US" sz="850" b="1" dirty="0">
                 <a:solidFill>
-                  <a:schemeClr val="bg1"/>
+                  <a:srgbClr val="1A2A42"/>
                 </a:solidFill>
-                <a:latin typeface="Calibri" pitchFamily="34" charset="0"/>
+                <a:latin typeface="BODONI 72 BOOK" pitchFamily="2" charset="0"/>
                 <a:ea typeface="Calibri" pitchFamily="34" charset="-122"/>
                 <a:cs typeface="Calibri" pitchFamily="34" charset="-120"/>
               </a:rPr>
@@ -1922,8 +1800,9 @@
             </a:r>
             <a:endParaRPr lang="en-US" sz="850" dirty="0">
               <a:solidFill>
-                <a:schemeClr val="bg1"/>
+                <a:srgbClr val="1A2A42"/>
               </a:solidFill>
+              <a:latin typeface="Bodoni 72 Book" pitchFamily="2" charset="0"/>
             </a:endParaRPr>
           </a:p>
         </p:txBody>
@@ -1961,9 +1840,9 @@
             <a:r>
               <a:rPr lang="en-US" sz="1300" dirty="0">
                 <a:solidFill>
-                  <a:schemeClr val="bg1"/>
+                  <a:srgbClr val="1A2A42"/>
                 </a:solidFill>
-                <a:latin typeface="Calibri" pitchFamily="34" charset="0"/>
+                <a:latin typeface="Aptos" panose="020B0004020202020204" pitchFamily="34" charset="0"/>
                 <a:ea typeface="Calibri" pitchFamily="34" charset="-122"/>
                 <a:cs typeface="Calibri" pitchFamily="34" charset="-120"/>
               </a:rPr>
@@ -1971,8 +1850,9 @@
             </a:r>
             <a:endParaRPr lang="en-US" sz="1300" dirty="0">
               <a:solidFill>
-                <a:schemeClr val="bg1"/>
+                <a:srgbClr val="1A2A42"/>
               </a:solidFill>
+              <a:latin typeface="Aptos" panose="020B0004020202020204" pitchFamily="34" charset="0"/>
             </a:endParaRPr>
           </a:p>
         </p:txBody>
@@ -1998,9 +1878,7 @@
             <a:avLst/>
           </a:prstGeom>
           <a:solidFill>
-            <a:schemeClr val="accent1">
-              <a:lumMod val="75000"/>
-            </a:schemeClr>
+            <a:srgbClr val="F4F1EC"/>
           </a:solidFill>
           <a:ln w="12700">
             <a:noFill/>
@@ -2035,6 +1913,1908 @@
               </a:ext>
             </a:extLst>
           </p:cNvPr>
+          <p:cNvPicPr>
+            <a:picLocks noChangeAspect="1"/>
+          </p:cNvPicPr>
+          <p:nvPr/>
+        </p:nvPicPr>
+        <p:blipFill>
+          <a:blip r:embed="rId3">
+            <a:duotone>
+              <a:prstClr val="black"/>
+              <a:srgbClr val="1A2A42">
+                <a:tint val="45000"/>
+                <a:satMod val="400000"/>
+              </a:srgbClr>
+            </a:duotone>
+            <a:alphaModFix amt="20000"/>
+            <a:extLst>
+              <a:ext uri="{BEBA8EAE-BF5A-486C-A8C5-ECC9F3942E4B}">
+                <a14:imgProps xmlns:a14="http://schemas.microsoft.com/office/drawing/2010/main">
+                  <a14:imgLayer r:embed="rId4">
+                    <a14:imgEffect>
+                      <a14:brightnessContrast bright="-40000" contrast="40000"/>
+                    </a14:imgEffect>
+                  </a14:imgLayer>
+                </a14:imgProps>
+              </a:ext>
+            </a:extLst>
+          </a:blip>
+          <a:stretch>
+            <a:fillRect/>
+          </a:stretch>
+        </p:blipFill>
+        <p:spPr>
+          <a:xfrm>
+            <a:off x="502920" y="2139696"/>
+            <a:ext cx="384048" cy="384048"/>
+          </a:xfrm>
+          <a:prstGeom prst="rect">
+            <a:avLst/>
+          </a:prstGeom>
+        </p:spPr>
+      </p:pic>
+      <p:sp>
+        <p:nvSpPr>
+          <p:cNvPr id="27" name="Text 6">
+            <a:extLst>
+              <a:ext uri="{FF2B5EF4-FFF2-40B4-BE49-F238E27FC236}">
+                <a16:creationId xmlns:a16="http://schemas.microsoft.com/office/drawing/2014/main" id="{61723533-95A1-E062-0A80-760087D093F5}"/>
+              </a:ext>
+            </a:extLst>
+          </p:cNvPr>
+          <p:cNvSpPr/>
+          <p:nvPr/>
+        </p:nvSpPr>
+        <p:spPr>
+          <a:xfrm>
+            <a:off x="1005840" y="2084832"/>
+            <a:ext cx="4480560" cy="256032"/>
+          </a:xfrm>
+          <a:prstGeom prst="rect">
+            <a:avLst/>
+          </a:prstGeom>
+          <a:noFill/>
+          <a:ln/>
+        </p:spPr>
+        <p:txBody>
+          <a:bodyPr wrap="square" lIns="0" tIns="0" rIns="0" bIns="0" rtlCol="0" anchor="ctr"/>
+          <a:lstStyle/>
+          <a:p>
+            <a:pPr marL="0" indent="0">
+              <a:buNone/>
+            </a:pPr>
+            <a:r>
+              <a:rPr lang="en-US" sz="850" b="1" dirty="0">
+                <a:solidFill>
+                  <a:srgbClr val="1A2A42"/>
+                </a:solidFill>
+                <a:latin typeface="BODONI 72 BOOK" pitchFamily="2" charset="0"/>
+                <a:ea typeface="Calibri" pitchFamily="34" charset="-122"/>
+                <a:cs typeface="Calibri" pitchFamily="34" charset="-120"/>
+              </a:rPr>
+              <a:t>SIZE</a:t>
+            </a:r>
+            <a:endParaRPr lang="en-US" sz="850" dirty="0">
+              <a:solidFill>
+                <a:srgbClr val="1A2A42"/>
+              </a:solidFill>
+              <a:latin typeface="Bodoni 72 Book" pitchFamily="2" charset="0"/>
+            </a:endParaRPr>
+          </a:p>
+        </p:txBody>
+      </p:sp>
+      <p:sp>
+        <p:nvSpPr>
+          <p:cNvPr id="28" name="Text 7">
+            <a:extLst>
+              <a:ext uri="{FF2B5EF4-FFF2-40B4-BE49-F238E27FC236}">
+                <a16:creationId xmlns:a16="http://schemas.microsoft.com/office/drawing/2014/main" id="{7F645E7B-5332-EBC0-619C-EF8BFC4D7EAF}"/>
+              </a:ext>
+            </a:extLst>
+          </p:cNvPr>
+          <p:cNvSpPr/>
+          <p:nvPr/>
+        </p:nvSpPr>
+        <p:spPr>
+          <a:xfrm>
+            <a:off x="1005840" y="2340864"/>
+            <a:ext cx="4480560" cy="292608"/>
+          </a:xfrm>
+          <a:prstGeom prst="rect">
+            <a:avLst/>
+          </a:prstGeom>
+          <a:noFill/>
+          <a:ln/>
+        </p:spPr>
+        <p:txBody>
+          <a:bodyPr wrap="square" lIns="0" tIns="0" rIns="0" bIns="0" rtlCol="0" anchor="ctr"/>
+          <a:lstStyle/>
+          <a:p>
+            <a:pPr marL="0" indent="0">
+              <a:buNone/>
+            </a:pPr>
+            <a:r>
+              <a:rPr lang="en-US" sz="1300" dirty="0">
+                <a:solidFill>
+                  <a:srgbClr val="1A2A42"/>
+                </a:solidFill>
+                <a:latin typeface="Aptos" panose="020B0004020202020204" pitchFamily="34" charset="0"/>
+                <a:ea typeface="Calibri" pitchFamily="34" charset="-122"/>
+                <a:cs typeface="Calibri" pitchFamily="34" charset="-120"/>
+              </a:rPr>
+              <a:t>10 Employees</a:t>
+            </a:r>
+            <a:endParaRPr lang="en-US" sz="1300" dirty="0">
+              <a:solidFill>
+                <a:srgbClr val="1A2A42"/>
+              </a:solidFill>
+              <a:latin typeface="Aptos" panose="020B0004020202020204" pitchFamily="34" charset="0"/>
+            </a:endParaRPr>
+          </a:p>
+        </p:txBody>
+      </p:sp>
+      <p:sp>
+        <p:nvSpPr>
+          <p:cNvPr id="29" name="Shape 8">
+            <a:extLst>
+              <a:ext uri="{FF2B5EF4-FFF2-40B4-BE49-F238E27FC236}">
+                <a16:creationId xmlns:a16="http://schemas.microsoft.com/office/drawing/2014/main" id="{433FAC95-901A-BFED-835D-2BF2E9D502CC}"/>
+              </a:ext>
+            </a:extLst>
+          </p:cNvPr>
+          <p:cNvSpPr/>
+          <p:nvPr/>
+        </p:nvSpPr>
+        <p:spPr>
+          <a:xfrm>
+            <a:off x="365760" y="2889504"/>
+            <a:ext cx="5303520" cy="749808"/>
+          </a:xfrm>
+          <a:prstGeom prst="rect">
+            <a:avLst/>
+          </a:prstGeom>
+          <a:solidFill>
+            <a:srgbClr val="F4F1EC"/>
+          </a:solidFill>
+          <a:ln w="12700">
+            <a:noFill/>
+            <a:prstDash val="solid"/>
+          </a:ln>
+          <a:effectLst>
+            <a:outerShdw blurRad="50800" dist="12700" dir="8100000" algn="bl" rotWithShape="0">
+              <a:srgbClr val="000000">
+                <a:alpha val="7000"/>
+              </a:srgbClr>
+            </a:outerShdw>
+          </a:effectLst>
+        </p:spPr>
+        <p:txBody>
+          <a:bodyPr/>
+          <a:lstStyle/>
+          <a:p>
+            <a:endParaRPr lang="en-GB" dirty="0">
+              <a:solidFill>
+                <a:schemeClr val="bg1"/>
+              </a:solidFill>
+            </a:endParaRPr>
+          </a:p>
+        </p:txBody>
+      </p:sp>
+      <p:pic>
+        <p:nvPicPr>
+          <p:cNvPr id="30" name="Image 2" descr="preencoded.png">
+            <a:extLst>
+              <a:ext uri="{FF2B5EF4-FFF2-40B4-BE49-F238E27FC236}">
+                <a16:creationId xmlns:a16="http://schemas.microsoft.com/office/drawing/2014/main" id="{554A7C15-ACB8-3BFE-D97E-D6234D2C90DD}"/>
+              </a:ext>
+            </a:extLst>
+          </p:cNvPr>
+          <p:cNvPicPr>
+            <a:picLocks noChangeAspect="1"/>
+          </p:cNvPicPr>
+          <p:nvPr/>
+        </p:nvPicPr>
+        <p:blipFill>
+          <a:blip r:embed="rId5">
+            <a:duotone>
+              <a:prstClr val="black"/>
+              <a:srgbClr val="1A2A42">
+                <a:tint val="45000"/>
+                <a:satMod val="400000"/>
+              </a:srgbClr>
+            </a:duotone>
+            <a:alphaModFix amt="20000"/>
+            <a:extLst>
+              <a:ext uri="{BEBA8EAE-BF5A-486C-A8C5-ECC9F3942E4B}">
+                <a14:imgProps xmlns:a14="http://schemas.microsoft.com/office/drawing/2010/main">
+                  <a14:imgLayer r:embed="rId6">
+                    <a14:imgEffect>
+                      <a14:brightnessContrast bright="-40000" contrast="40000"/>
+                    </a14:imgEffect>
+                  </a14:imgLayer>
+                </a14:imgProps>
+              </a:ext>
+            </a:extLst>
+          </a:blip>
+          <a:stretch>
+            <a:fillRect/>
+          </a:stretch>
+        </p:blipFill>
+        <p:spPr>
+          <a:xfrm>
+            <a:off x="502920" y="3035808"/>
+            <a:ext cx="384048" cy="384048"/>
+          </a:xfrm>
+          <a:prstGeom prst="rect">
+            <a:avLst/>
+          </a:prstGeom>
+        </p:spPr>
+      </p:pic>
+      <p:sp>
+        <p:nvSpPr>
+          <p:cNvPr id="31" name="Text 9">
+            <a:extLst>
+              <a:ext uri="{FF2B5EF4-FFF2-40B4-BE49-F238E27FC236}">
+                <a16:creationId xmlns:a16="http://schemas.microsoft.com/office/drawing/2014/main" id="{85625B0F-7E8F-9367-EF6D-567AC91117B9}"/>
+              </a:ext>
+            </a:extLst>
+          </p:cNvPr>
+          <p:cNvSpPr/>
+          <p:nvPr/>
+        </p:nvSpPr>
+        <p:spPr>
+          <a:xfrm>
+            <a:off x="1005840" y="2980944"/>
+            <a:ext cx="4480560" cy="256032"/>
+          </a:xfrm>
+          <a:prstGeom prst="rect">
+            <a:avLst/>
+          </a:prstGeom>
+          <a:noFill/>
+          <a:ln/>
+        </p:spPr>
+        <p:txBody>
+          <a:bodyPr wrap="square" lIns="0" tIns="0" rIns="0" bIns="0" rtlCol="0" anchor="ctr"/>
+          <a:lstStyle/>
+          <a:p>
+            <a:pPr marL="0" indent="0">
+              <a:buNone/>
+            </a:pPr>
+            <a:r>
+              <a:rPr lang="en-US" sz="850" b="1" dirty="0">
+                <a:solidFill>
+                  <a:srgbClr val="1A2A42"/>
+                </a:solidFill>
+                <a:latin typeface="BODONI 72 BOOK" pitchFamily="2" charset="0"/>
+                <a:ea typeface="Calibri" pitchFamily="34" charset="-122"/>
+                <a:cs typeface="Calibri" pitchFamily="34" charset="-120"/>
+              </a:rPr>
+              <a:t>FOCUS</a:t>
+            </a:r>
+            <a:endParaRPr lang="en-US" sz="850" dirty="0">
+              <a:solidFill>
+                <a:srgbClr val="1A2A42"/>
+              </a:solidFill>
+              <a:latin typeface="Bodoni 72 Book" pitchFamily="2" charset="0"/>
+            </a:endParaRPr>
+          </a:p>
+        </p:txBody>
+      </p:sp>
+      <p:sp>
+        <p:nvSpPr>
+          <p:cNvPr id="32" name="Text 10">
+            <a:extLst>
+              <a:ext uri="{FF2B5EF4-FFF2-40B4-BE49-F238E27FC236}">
+                <a16:creationId xmlns:a16="http://schemas.microsoft.com/office/drawing/2014/main" id="{6EFC7767-9C5F-34AB-73FA-3FB13516DFA9}"/>
+              </a:ext>
+            </a:extLst>
+          </p:cNvPr>
+          <p:cNvSpPr/>
+          <p:nvPr/>
+        </p:nvSpPr>
+        <p:spPr>
+          <a:xfrm>
+            <a:off x="1005840" y="3236976"/>
+            <a:ext cx="4480560" cy="292608"/>
+          </a:xfrm>
+          <a:prstGeom prst="rect">
+            <a:avLst/>
+          </a:prstGeom>
+          <a:noFill/>
+          <a:ln/>
+        </p:spPr>
+        <p:txBody>
+          <a:bodyPr wrap="square" lIns="0" tIns="0" rIns="0" bIns="0" rtlCol="0" anchor="ctr"/>
+          <a:lstStyle/>
+          <a:p>
+            <a:pPr marL="0" indent="0">
+              <a:buNone/>
+            </a:pPr>
+            <a:r>
+              <a:rPr lang="en-US" sz="1300" dirty="0">
+                <a:solidFill>
+                  <a:srgbClr val="1A2A42"/>
+                </a:solidFill>
+                <a:latin typeface="Aptos" panose="020B0004020202020204" pitchFamily="34" charset="0"/>
+                <a:ea typeface="Calibri" pitchFamily="34" charset="-122"/>
+                <a:cs typeface="Calibri" pitchFamily="34" charset="-120"/>
+              </a:rPr>
+              <a:t>Strategy · Process · Digital Transformation</a:t>
+            </a:r>
+            <a:endParaRPr lang="en-US" sz="1300" dirty="0">
+              <a:solidFill>
+                <a:srgbClr val="1A2A42"/>
+              </a:solidFill>
+              <a:latin typeface="Aptos" panose="020B0004020202020204" pitchFamily="34" charset="0"/>
+            </a:endParaRPr>
+          </a:p>
+        </p:txBody>
+      </p:sp>
+      <p:sp>
+        <p:nvSpPr>
+          <p:cNvPr id="33" name="Shape 11">
+            <a:extLst>
+              <a:ext uri="{FF2B5EF4-FFF2-40B4-BE49-F238E27FC236}">
+                <a16:creationId xmlns:a16="http://schemas.microsoft.com/office/drawing/2014/main" id="{265166A4-87A6-DA84-BE99-35E0E358E3C3}"/>
+              </a:ext>
+            </a:extLst>
+          </p:cNvPr>
+          <p:cNvSpPr/>
+          <p:nvPr/>
+        </p:nvSpPr>
+        <p:spPr>
+          <a:xfrm>
+            <a:off x="365760" y="3785616"/>
+            <a:ext cx="5303520" cy="749808"/>
+          </a:xfrm>
+          <a:prstGeom prst="rect">
+            <a:avLst/>
+          </a:prstGeom>
+          <a:solidFill>
+            <a:srgbClr val="F4F1EC"/>
+          </a:solidFill>
+          <a:ln w="12700">
+            <a:noFill/>
+            <a:prstDash val="solid"/>
+          </a:ln>
+          <a:effectLst>
+            <a:outerShdw blurRad="50800" dist="12700" dir="8100000" algn="bl" rotWithShape="0">
+              <a:srgbClr val="000000">
+                <a:alpha val="7000"/>
+              </a:srgbClr>
+            </a:outerShdw>
+          </a:effectLst>
+        </p:spPr>
+        <p:txBody>
+          <a:bodyPr/>
+          <a:lstStyle/>
+          <a:p>
+            <a:endParaRPr lang="en-GB" dirty="0">
+              <a:solidFill>
+                <a:schemeClr val="bg1"/>
+              </a:solidFill>
+            </a:endParaRPr>
+          </a:p>
+        </p:txBody>
+      </p:sp>
+      <p:pic>
+        <p:nvPicPr>
+          <p:cNvPr id="34" name="Image 3" descr="preencoded.png">
+            <a:extLst>
+              <a:ext uri="{FF2B5EF4-FFF2-40B4-BE49-F238E27FC236}">
+                <a16:creationId xmlns:a16="http://schemas.microsoft.com/office/drawing/2014/main" id="{566EA9E5-7071-4574-3DBB-F8EA23D6E7A3}"/>
+              </a:ext>
+            </a:extLst>
+          </p:cNvPr>
+          <p:cNvPicPr>
+            <a:picLocks noChangeAspect="1"/>
+          </p:cNvPicPr>
+          <p:nvPr/>
+        </p:nvPicPr>
+        <p:blipFill>
+          <a:blip r:embed="rId7">
+            <a:biLevel thresh="75000"/>
+            <a:alphaModFix amt="20000"/>
+          </a:blip>
+          <a:stretch>
+            <a:fillRect/>
+          </a:stretch>
+        </p:blipFill>
+        <p:spPr>
+          <a:xfrm>
+            <a:off x="502920" y="3931920"/>
+            <a:ext cx="384048" cy="384048"/>
+          </a:xfrm>
+          <a:prstGeom prst="rect">
+            <a:avLst/>
+          </a:prstGeom>
+          <a:noFill/>
+          <a:ln>
+            <a:solidFill>
+              <a:srgbClr val="F4F1EC"/>
+            </a:solidFill>
+          </a:ln>
+        </p:spPr>
+      </p:pic>
+      <p:sp>
+        <p:nvSpPr>
+          <p:cNvPr id="35" name="Text 12">
+            <a:extLst>
+              <a:ext uri="{FF2B5EF4-FFF2-40B4-BE49-F238E27FC236}">
+                <a16:creationId xmlns:a16="http://schemas.microsoft.com/office/drawing/2014/main" id="{4534E4C9-CC46-09B5-4464-64E6253EC26B}"/>
+              </a:ext>
+            </a:extLst>
+          </p:cNvPr>
+          <p:cNvSpPr/>
+          <p:nvPr/>
+        </p:nvSpPr>
+        <p:spPr>
+          <a:xfrm>
+            <a:off x="1005840" y="3877056"/>
+            <a:ext cx="4480560" cy="256032"/>
+          </a:xfrm>
+          <a:prstGeom prst="rect">
+            <a:avLst/>
+          </a:prstGeom>
+          <a:noFill/>
+          <a:ln/>
+        </p:spPr>
+        <p:txBody>
+          <a:bodyPr wrap="square" lIns="0" tIns="0" rIns="0" bIns="0" rtlCol="0" anchor="ctr"/>
+          <a:lstStyle/>
+          <a:p>
+            <a:pPr marL="0" indent="0">
+              <a:buNone/>
+            </a:pPr>
+            <a:r>
+              <a:rPr lang="en-US" sz="850" b="1" dirty="0">
+                <a:solidFill>
+                  <a:srgbClr val="1A2A42"/>
+                </a:solidFill>
+                <a:latin typeface="BODONI 72 BOOK" pitchFamily="2" charset="0"/>
+                <a:ea typeface="Calibri" pitchFamily="34" charset="-122"/>
+                <a:cs typeface="Calibri" pitchFamily="34" charset="-120"/>
+              </a:rPr>
+              <a:t>CHALLENGE</a:t>
+            </a:r>
+            <a:endParaRPr lang="en-US" sz="850" dirty="0">
+              <a:solidFill>
+                <a:srgbClr val="1A2A42"/>
+              </a:solidFill>
+              <a:latin typeface="Bodoni 72 Book" pitchFamily="2" charset="0"/>
+            </a:endParaRPr>
+          </a:p>
+        </p:txBody>
+      </p:sp>
+      <p:sp>
+        <p:nvSpPr>
+          <p:cNvPr id="36" name="Text 13">
+            <a:extLst>
+              <a:ext uri="{FF2B5EF4-FFF2-40B4-BE49-F238E27FC236}">
+                <a16:creationId xmlns:a16="http://schemas.microsoft.com/office/drawing/2014/main" id="{9B7FDFA8-F821-7078-E6FC-2F377F12ECB5}"/>
+              </a:ext>
+            </a:extLst>
+          </p:cNvPr>
+          <p:cNvSpPr/>
+          <p:nvPr/>
+        </p:nvSpPr>
+        <p:spPr>
+          <a:xfrm>
+            <a:off x="1005840" y="4133088"/>
+            <a:ext cx="4480560" cy="292608"/>
+          </a:xfrm>
+          <a:prstGeom prst="rect">
+            <a:avLst/>
+          </a:prstGeom>
+          <a:noFill/>
+          <a:ln/>
+        </p:spPr>
+        <p:txBody>
+          <a:bodyPr wrap="square" lIns="0" tIns="0" rIns="0" bIns="0" rtlCol="0" anchor="ctr"/>
+          <a:lstStyle/>
+          <a:p>
+            <a:pPr marL="0" indent="0">
+              <a:buNone/>
+            </a:pPr>
+            <a:r>
+              <a:rPr lang="en-US" sz="1300" dirty="0">
+                <a:solidFill>
+                  <a:srgbClr val="1A2A42"/>
+                </a:solidFill>
+                <a:latin typeface="Aptos" panose="020B0004020202020204" pitchFamily="34" charset="0"/>
+                <a:ea typeface="Calibri" pitchFamily="34" charset="-122"/>
+                <a:cs typeface="Calibri" pitchFamily="34" charset="-120"/>
+              </a:rPr>
+              <a:t>Rapid growth → need for efficient talent acquisition</a:t>
+            </a:r>
+            <a:endParaRPr lang="en-US" sz="1300" dirty="0">
+              <a:solidFill>
+                <a:srgbClr val="1A2A42"/>
+              </a:solidFill>
+              <a:latin typeface="Aptos" panose="020B0004020202020204" pitchFamily="34" charset="0"/>
+            </a:endParaRPr>
+          </a:p>
+        </p:txBody>
+      </p:sp>
+      <p:sp>
+        <p:nvSpPr>
+          <p:cNvPr id="37" name="Shape 14">
+            <a:extLst>
+              <a:ext uri="{FF2B5EF4-FFF2-40B4-BE49-F238E27FC236}">
+                <a16:creationId xmlns:a16="http://schemas.microsoft.com/office/drawing/2014/main" id="{03AB48C5-777B-0E69-E907-5DF03040BA66}"/>
+              </a:ext>
+            </a:extLst>
+          </p:cNvPr>
+          <p:cNvSpPr/>
+          <p:nvPr/>
+        </p:nvSpPr>
+        <p:spPr>
+          <a:xfrm>
+            <a:off x="5943600" y="1097280"/>
+            <a:ext cx="2834640" cy="3566160"/>
+          </a:xfrm>
+          <a:prstGeom prst="rect">
+            <a:avLst/>
+          </a:prstGeom>
+          <a:solidFill>
+            <a:srgbClr val="1B2A4A"/>
+          </a:solidFill>
+          <a:ln w="12700">
+            <a:solidFill>
+              <a:srgbClr val="1B2A4A"/>
+            </a:solidFill>
+            <a:prstDash val="solid"/>
+          </a:ln>
+          <a:effectLst>
+            <a:outerShdw blurRad="101600" dist="25400" dir="8100000" algn="bl" rotWithShape="0">
+              <a:srgbClr val="000000">
+                <a:alpha val="15000"/>
+              </a:srgbClr>
+            </a:outerShdw>
+          </a:effectLst>
+        </p:spPr>
+        <p:txBody>
+          <a:bodyPr/>
+          <a:lstStyle/>
+          <a:p>
+            <a:endParaRPr lang="en-GB" dirty="0">
+              <a:solidFill>
+                <a:srgbClr val="1A2A4A"/>
+              </a:solidFill>
+            </a:endParaRPr>
+          </a:p>
+        </p:txBody>
+      </p:sp>
+      <p:sp>
+        <p:nvSpPr>
+          <p:cNvPr id="38" name="Text 15">
+            <a:extLst>
+              <a:ext uri="{FF2B5EF4-FFF2-40B4-BE49-F238E27FC236}">
+                <a16:creationId xmlns:a16="http://schemas.microsoft.com/office/drawing/2014/main" id="{9DD3B00E-14A5-7FE9-3D95-C5744B26B674}"/>
+              </a:ext>
+            </a:extLst>
+          </p:cNvPr>
+          <p:cNvSpPr/>
+          <p:nvPr/>
+        </p:nvSpPr>
+        <p:spPr>
+          <a:xfrm>
+            <a:off x="5943600" y="1143000"/>
+            <a:ext cx="2834640" cy="457200"/>
+          </a:xfrm>
+          <a:prstGeom prst="rect">
+            <a:avLst/>
+          </a:prstGeom>
+          <a:noFill/>
+          <a:ln/>
+        </p:spPr>
+        <p:txBody>
+          <a:bodyPr wrap="square" lIns="0" tIns="0" rIns="0" bIns="0" rtlCol="0" anchor="ctr"/>
+          <a:lstStyle/>
+          <a:p>
+            <a:pPr marL="0" indent="0" algn="ctr">
+              <a:buNone/>
+            </a:pPr>
+            <a:r>
+              <a:rPr lang="en-US" sz="1100" b="1" dirty="0">
+                <a:solidFill>
+                  <a:srgbClr val="C0994B"/>
+                </a:solidFill>
+                <a:latin typeface="BODONI 72 BOOK" pitchFamily="2" charset="0"/>
+                <a:ea typeface="Calibri" pitchFamily="34" charset="-122"/>
+                <a:cs typeface="Calibri" pitchFamily="34" charset="-120"/>
+              </a:rPr>
+              <a:t>OPEN POSITIONS</a:t>
+            </a:r>
+            <a:endParaRPr lang="en-US" sz="1100" dirty="0">
+              <a:solidFill>
+                <a:srgbClr val="C0994B"/>
+              </a:solidFill>
+              <a:latin typeface="Bodoni 72 Book" pitchFamily="2" charset="0"/>
+            </a:endParaRPr>
+          </a:p>
+        </p:txBody>
+      </p:sp>
+      <p:sp>
+        <p:nvSpPr>
+          <p:cNvPr id="39" name="Shape 16">
+            <a:extLst>
+              <a:ext uri="{FF2B5EF4-FFF2-40B4-BE49-F238E27FC236}">
+                <a16:creationId xmlns:a16="http://schemas.microsoft.com/office/drawing/2014/main" id="{1B3B1302-4C19-A62D-40A3-2F80A6A18FE6}"/>
+              </a:ext>
+            </a:extLst>
+          </p:cNvPr>
+          <p:cNvSpPr/>
+          <p:nvPr/>
+        </p:nvSpPr>
+        <p:spPr>
+          <a:xfrm>
+            <a:off x="6080760" y="1737360"/>
+            <a:ext cx="2560320" cy="804672"/>
+          </a:xfrm>
+          <a:prstGeom prst="rect">
+            <a:avLst/>
+          </a:prstGeom>
+          <a:solidFill>
+            <a:srgbClr val="243654"/>
+          </a:solidFill>
+          <a:ln w="12700">
+            <a:solidFill>
+              <a:srgbClr val="243654"/>
+            </a:solidFill>
+            <a:prstDash val="solid"/>
+          </a:ln>
+        </p:spPr>
+        <p:txBody>
+          <a:bodyPr/>
+          <a:lstStyle/>
+          <a:p>
+            <a:endParaRPr lang="en-GB" dirty="0"/>
+          </a:p>
+        </p:txBody>
+      </p:sp>
+      <p:sp>
+        <p:nvSpPr>
+          <p:cNvPr id="40" name="Text 17">
+            <a:extLst>
+              <a:ext uri="{FF2B5EF4-FFF2-40B4-BE49-F238E27FC236}">
+                <a16:creationId xmlns:a16="http://schemas.microsoft.com/office/drawing/2014/main" id="{BF8C539C-5E89-09C4-D56E-CC4ACB6B5DDF}"/>
+              </a:ext>
+            </a:extLst>
+          </p:cNvPr>
+          <p:cNvSpPr/>
+          <p:nvPr/>
+        </p:nvSpPr>
+        <p:spPr>
+          <a:xfrm>
+            <a:off x="6080760" y="1792224"/>
+            <a:ext cx="2560320" cy="347472"/>
+          </a:xfrm>
+          <a:prstGeom prst="rect">
+            <a:avLst/>
+          </a:prstGeom>
+          <a:noFill/>
+          <a:ln/>
+        </p:spPr>
+        <p:txBody>
+          <a:bodyPr wrap="square" lIns="0" tIns="0" rIns="0" bIns="0" rtlCol="0" anchor="ctr"/>
+          <a:lstStyle/>
+          <a:p>
+            <a:pPr marL="0" indent="0" algn="ctr">
+              <a:buNone/>
+            </a:pPr>
+            <a:r>
+              <a:rPr lang="en-US" sz="1300" b="1" dirty="0">
+                <a:solidFill>
+                  <a:srgbClr val="FFFFFF"/>
+                </a:solidFill>
+                <a:latin typeface="Aptos" panose="020B0004020202020204" pitchFamily="34" charset="0"/>
+                <a:ea typeface="Calibri" pitchFamily="34" charset="-122"/>
+                <a:cs typeface="Calibri" pitchFamily="34" charset="-120"/>
+              </a:rPr>
+              <a:t>Software Engineer</a:t>
+            </a:r>
+            <a:endParaRPr lang="en-US" sz="1300" dirty="0">
+              <a:latin typeface="Aptos" panose="020B0004020202020204" pitchFamily="34" charset="0"/>
+            </a:endParaRPr>
+          </a:p>
+        </p:txBody>
+      </p:sp>
+      <p:sp>
+        <p:nvSpPr>
+          <p:cNvPr id="41" name="Text 18">
+            <a:extLst>
+              <a:ext uri="{FF2B5EF4-FFF2-40B4-BE49-F238E27FC236}">
+                <a16:creationId xmlns:a16="http://schemas.microsoft.com/office/drawing/2014/main" id="{C7F88B8E-346A-97D4-6A7E-1E6E10EF9802}"/>
+              </a:ext>
+            </a:extLst>
+          </p:cNvPr>
+          <p:cNvSpPr/>
+          <p:nvPr/>
+        </p:nvSpPr>
+        <p:spPr>
+          <a:xfrm>
+            <a:off x="6080760" y="2157984"/>
+            <a:ext cx="2560320" cy="256032"/>
+          </a:xfrm>
+          <a:prstGeom prst="rect">
+            <a:avLst/>
+          </a:prstGeom>
+          <a:noFill/>
+          <a:ln/>
+        </p:spPr>
+        <p:txBody>
+          <a:bodyPr wrap="square" lIns="0" tIns="0" rIns="0" bIns="0" rtlCol="0" anchor="ctr"/>
+          <a:lstStyle/>
+          <a:p>
+            <a:pPr marL="0" indent="0" algn="ctr">
+              <a:buNone/>
+            </a:pPr>
+            <a:r>
+              <a:rPr lang="en-US" sz="1000" dirty="0">
+                <a:solidFill>
+                  <a:srgbClr val="C0994B"/>
+                </a:solidFill>
+                <a:latin typeface="Bodoni 72 Book" pitchFamily="2" charset="0"/>
+                <a:ea typeface="Calibri" pitchFamily="34" charset="-122"/>
+                <a:cs typeface="Calibri" pitchFamily="34" charset="-120"/>
+              </a:rPr>
+              <a:t>Technology</a:t>
+            </a:r>
+            <a:endParaRPr lang="en-US" sz="1000" dirty="0">
+              <a:solidFill>
+                <a:srgbClr val="C0994B"/>
+              </a:solidFill>
+              <a:latin typeface="Bodoni 72 Book" pitchFamily="2" charset="0"/>
+            </a:endParaRPr>
+          </a:p>
+        </p:txBody>
+      </p:sp>
+      <p:sp>
+        <p:nvSpPr>
+          <p:cNvPr id="42" name="Shape 19">
+            <a:extLst>
+              <a:ext uri="{FF2B5EF4-FFF2-40B4-BE49-F238E27FC236}">
+                <a16:creationId xmlns:a16="http://schemas.microsoft.com/office/drawing/2014/main" id="{9B9A726C-329D-BBC7-B755-3074A217B46B}"/>
+              </a:ext>
+            </a:extLst>
+          </p:cNvPr>
+          <p:cNvSpPr/>
+          <p:nvPr/>
+        </p:nvSpPr>
+        <p:spPr>
+          <a:xfrm>
+            <a:off x="6080760" y="2743200"/>
+            <a:ext cx="2560320" cy="804672"/>
+          </a:xfrm>
+          <a:prstGeom prst="rect">
+            <a:avLst/>
+          </a:prstGeom>
+          <a:solidFill>
+            <a:srgbClr val="243654"/>
+          </a:solidFill>
+          <a:ln w="12700">
+            <a:solidFill>
+              <a:srgbClr val="243654"/>
+            </a:solidFill>
+            <a:prstDash val="solid"/>
+          </a:ln>
+        </p:spPr>
+        <p:txBody>
+          <a:bodyPr/>
+          <a:lstStyle/>
+          <a:p>
+            <a:endParaRPr lang="en-GB"/>
+          </a:p>
+        </p:txBody>
+      </p:sp>
+      <p:sp>
+        <p:nvSpPr>
+          <p:cNvPr id="43" name="Text 20">
+            <a:extLst>
+              <a:ext uri="{FF2B5EF4-FFF2-40B4-BE49-F238E27FC236}">
+                <a16:creationId xmlns:a16="http://schemas.microsoft.com/office/drawing/2014/main" id="{B1897DCC-175A-FCD5-74CD-2C24A2C30BCE}"/>
+              </a:ext>
+            </a:extLst>
+          </p:cNvPr>
+          <p:cNvSpPr/>
+          <p:nvPr/>
+        </p:nvSpPr>
+        <p:spPr>
+          <a:xfrm>
+            <a:off x="6080760" y="2798064"/>
+            <a:ext cx="2560320" cy="347472"/>
+          </a:xfrm>
+          <a:prstGeom prst="rect">
+            <a:avLst/>
+          </a:prstGeom>
+          <a:noFill/>
+          <a:ln/>
+        </p:spPr>
+        <p:txBody>
+          <a:bodyPr wrap="square" lIns="0" tIns="0" rIns="0" bIns="0" rtlCol="0" anchor="ctr"/>
+          <a:lstStyle/>
+          <a:p>
+            <a:pPr marL="0" indent="0" algn="ctr">
+              <a:buNone/>
+            </a:pPr>
+            <a:r>
+              <a:rPr lang="en-US" sz="1300" b="1" dirty="0">
+                <a:solidFill>
+                  <a:srgbClr val="FFFFFF"/>
+                </a:solidFill>
+                <a:latin typeface="Aptos" panose="020B0004020202020204" pitchFamily="34" charset="0"/>
+                <a:ea typeface="Calibri" pitchFamily="34" charset="-122"/>
+                <a:cs typeface="Calibri" pitchFamily="34" charset="-120"/>
+              </a:rPr>
+              <a:t>Business Analyst</a:t>
+            </a:r>
+            <a:endParaRPr lang="en-US" sz="1300" dirty="0">
+              <a:latin typeface="Aptos" panose="020B0004020202020204" pitchFamily="34" charset="0"/>
+            </a:endParaRPr>
+          </a:p>
+        </p:txBody>
+      </p:sp>
+      <p:sp>
+        <p:nvSpPr>
+          <p:cNvPr id="44" name="Text 21">
+            <a:extLst>
+              <a:ext uri="{FF2B5EF4-FFF2-40B4-BE49-F238E27FC236}">
+                <a16:creationId xmlns:a16="http://schemas.microsoft.com/office/drawing/2014/main" id="{73428222-A278-82A1-AC4D-3FF07E13B178}"/>
+              </a:ext>
+            </a:extLst>
+          </p:cNvPr>
+          <p:cNvSpPr/>
+          <p:nvPr/>
+        </p:nvSpPr>
+        <p:spPr>
+          <a:xfrm>
+            <a:off x="6080760" y="3163824"/>
+            <a:ext cx="2560320" cy="256032"/>
+          </a:xfrm>
+          <a:prstGeom prst="rect">
+            <a:avLst/>
+          </a:prstGeom>
+          <a:noFill/>
+          <a:ln/>
+        </p:spPr>
+        <p:txBody>
+          <a:bodyPr wrap="square" lIns="0" tIns="0" rIns="0" bIns="0" rtlCol="0" anchor="ctr"/>
+          <a:lstStyle/>
+          <a:p>
+            <a:pPr marL="0" indent="0" algn="ctr">
+              <a:buNone/>
+            </a:pPr>
+            <a:r>
+              <a:rPr lang="en-US" sz="1000" dirty="0">
+                <a:solidFill>
+                  <a:srgbClr val="C0994B"/>
+                </a:solidFill>
+                <a:latin typeface="Bodoni 72 Book" pitchFamily="2" charset="0"/>
+                <a:ea typeface="Calibri" pitchFamily="34" charset="-122"/>
+                <a:cs typeface="Calibri" pitchFamily="34" charset="-120"/>
+              </a:rPr>
+              <a:t>Consulting</a:t>
+            </a:r>
+            <a:endParaRPr lang="en-US" sz="1000" dirty="0">
+              <a:solidFill>
+                <a:srgbClr val="C0994B"/>
+              </a:solidFill>
+              <a:latin typeface="Bodoni 72 Book" pitchFamily="2" charset="0"/>
+            </a:endParaRPr>
+          </a:p>
+        </p:txBody>
+      </p:sp>
+      <p:sp>
+        <p:nvSpPr>
+          <p:cNvPr id="45" name="Shape 22">
+            <a:extLst>
+              <a:ext uri="{FF2B5EF4-FFF2-40B4-BE49-F238E27FC236}">
+                <a16:creationId xmlns:a16="http://schemas.microsoft.com/office/drawing/2014/main" id="{CBB695BD-343B-3F7C-5C21-342242F78DC7}"/>
+              </a:ext>
+            </a:extLst>
+          </p:cNvPr>
+          <p:cNvSpPr/>
+          <p:nvPr/>
+        </p:nvSpPr>
+        <p:spPr>
+          <a:xfrm>
+            <a:off x="6080760" y="3749040"/>
+            <a:ext cx="2560320" cy="804672"/>
+          </a:xfrm>
+          <a:prstGeom prst="rect">
+            <a:avLst/>
+          </a:prstGeom>
+          <a:solidFill>
+            <a:srgbClr val="243654"/>
+          </a:solidFill>
+          <a:ln w="12700">
+            <a:solidFill>
+              <a:srgbClr val="243654"/>
+            </a:solidFill>
+            <a:prstDash val="solid"/>
+          </a:ln>
+        </p:spPr>
+        <p:txBody>
+          <a:bodyPr/>
+          <a:lstStyle/>
+          <a:p>
+            <a:endParaRPr lang="en-GB" dirty="0"/>
+          </a:p>
+        </p:txBody>
+      </p:sp>
+      <p:sp>
+        <p:nvSpPr>
+          <p:cNvPr id="46" name="Text 23">
+            <a:extLst>
+              <a:ext uri="{FF2B5EF4-FFF2-40B4-BE49-F238E27FC236}">
+                <a16:creationId xmlns:a16="http://schemas.microsoft.com/office/drawing/2014/main" id="{5D4DF470-E653-819B-700C-F953270A5B52}"/>
+              </a:ext>
+            </a:extLst>
+          </p:cNvPr>
+          <p:cNvSpPr/>
+          <p:nvPr/>
+        </p:nvSpPr>
+        <p:spPr>
+          <a:xfrm>
+            <a:off x="6080760" y="3803904"/>
+            <a:ext cx="2560320" cy="347472"/>
+          </a:xfrm>
+          <a:prstGeom prst="rect">
+            <a:avLst/>
+          </a:prstGeom>
+          <a:noFill/>
+          <a:ln/>
+        </p:spPr>
+        <p:txBody>
+          <a:bodyPr wrap="square" lIns="0" tIns="0" rIns="0" bIns="0" rtlCol="0" anchor="ctr"/>
+          <a:lstStyle/>
+          <a:p>
+            <a:pPr marL="0" indent="0" algn="ctr">
+              <a:buNone/>
+            </a:pPr>
+            <a:r>
+              <a:rPr lang="en-US" sz="1300" b="1" dirty="0">
+                <a:solidFill>
+                  <a:srgbClr val="FFFFFF"/>
+                </a:solidFill>
+                <a:latin typeface="Aptos" panose="020B0004020202020204" pitchFamily="34" charset="0"/>
+                <a:ea typeface="Calibri" pitchFamily="34" charset="-122"/>
+                <a:cs typeface="Calibri" pitchFamily="34" charset="-120"/>
+              </a:rPr>
+              <a:t>ERP Consultant</a:t>
+            </a:r>
+            <a:endParaRPr lang="en-US" sz="1300" dirty="0">
+              <a:latin typeface="Aptos" panose="020B0004020202020204" pitchFamily="34" charset="0"/>
+            </a:endParaRPr>
+          </a:p>
+        </p:txBody>
+      </p:sp>
+      <p:sp>
+        <p:nvSpPr>
+          <p:cNvPr id="47" name="Text 24">
+            <a:extLst>
+              <a:ext uri="{FF2B5EF4-FFF2-40B4-BE49-F238E27FC236}">
+                <a16:creationId xmlns:a16="http://schemas.microsoft.com/office/drawing/2014/main" id="{69B5874E-F305-F19D-2835-F2605BC23569}"/>
+              </a:ext>
+            </a:extLst>
+          </p:cNvPr>
+          <p:cNvSpPr/>
+          <p:nvPr/>
+        </p:nvSpPr>
+        <p:spPr>
+          <a:xfrm>
+            <a:off x="6080760" y="4169664"/>
+            <a:ext cx="2560320" cy="256032"/>
+          </a:xfrm>
+          <a:prstGeom prst="rect">
+            <a:avLst/>
+          </a:prstGeom>
+          <a:noFill/>
+          <a:ln/>
+        </p:spPr>
+        <p:txBody>
+          <a:bodyPr wrap="square" lIns="0" tIns="0" rIns="0" bIns="0" rtlCol="0" anchor="ctr"/>
+          <a:lstStyle/>
+          <a:p>
+            <a:pPr marL="0" indent="0" algn="ctr">
+              <a:buNone/>
+            </a:pPr>
+            <a:r>
+              <a:rPr lang="en-US" sz="1000" dirty="0">
+                <a:solidFill>
+                  <a:srgbClr val="C0994B"/>
+                </a:solidFill>
+                <a:latin typeface="Bodoni 72 Book" pitchFamily="2" charset="0"/>
+                <a:ea typeface="Calibri" pitchFamily="34" charset="-122"/>
+                <a:cs typeface="Calibri" pitchFamily="34" charset="-120"/>
+              </a:rPr>
+              <a:t>Enterprise Solutions</a:t>
+            </a:r>
+            <a:endParaRPr lang="en-US" sz="1000" dirty="0">
+              <a:solidFill>
+                <a:srgbClr val="C0994B"/>
+              </a:solidFill>
+              <a:latin typeface="Bodoni 72 Book" pitchFamily="2" charset="0"/>
+            </a:endParaRPr>
+          </a:p>
+        </p:txBody>
+      </p:sp>
+      <p:pic>
+        <p:nvPicPr>
+          <p:cNvPr id="48" name="Image 0" descr="preencoded.png">
+            <a:extLst>
+              <a:ext uri="{FF2B5EF4-FFF2-40B4-BE49-F238E27FC236}">
+                <a16:creationId xmlns:a16="http://schemas.microsoft.com/office/drawing/2014/main" id="{87251321-E673-74CF-EA29-9E7DE77F8381}"/>
+              </a:ext>
+            </a:extLst>
+          </p:cNvPr>
+          <p:cNvPicPr>
+            <a:picLocks noChangeAspect="1"/>
+          </p:cNvPicPr>
+          <p:nvPr/>
+        </p:nvPicPr>
+        <p:blipFill>
+          <a:blip r:embed="rId8">
+            <a:duotone>
+              <a:prstClr val="black"/>
+              <a:srgbClr val="1A2A42">
+                <a:tint val="45000"/>
+                <a:satMod val="400000"/>
+              </a:srgbClr>
+            </a:duotone>
+            <a:alphaModFix amt="20000"/>
+            <a:extLst>
+              <a:ext uri="{BEBA8EAE-BF5A-486C-A8C5-ECC9F3942E4B}">
+                <a14:imgProps xmlns:a14="http://schemas.microsoft.com/office/drawing/2010/main">
+                  <a14:imgLayer r:embed="rId9">
+                    <a14:imgEffect>
+                      <a14:brightnessContrast bright="-40000" contrast="40000"/>
+                    </a14:imgEffect>
+                  </a14:imgLayer>
+                </a14:imgProps>
+              </a:ext>
+            </a:extLst>
+          </a:blip>
+          <a:stretch>
+            <a:fillRect/>
+          </a:stretch>
+        </p:blipFill>
+        <p:spPr>
+          <a:xfrm>
+            <a:off x="502920" y="1243584"/>
+            <a:ext cx="384048" cy="384048"/>
+          </a:xfrm>
+          <a:prstGeom prst="rect">
+            <a:avLst/>
+          </a:prstGeom>
+          <a:ln>
+            <a:solidFill>
+              <a:srgbClr val="F4F1EC"/>
+            </a:solidFill>
+          </a:ln>
+        </p:spPr>
+      </p:pic>
+    </p:spTree>
+    <p:extLst>
+      <p:ext uri="{BB962C8B-B14F-4D97-AF65-F5344CB8AC3E}">
+        <p14:creationId xmlns:p14="http://schemas.microsoft.com/office/powerpoint/2010/main" val="847918614"/>
+      </p:ext>
+    </p:extLst>
+  </p:cSld>
+  <p:clrMapOvr>
+    <a:masterClrMapping/>
+  </p:clrMapOvr>
+</p:sld>
+</file>
+
+<file path=ppt/slides/slide3.xml><?xml version="1.0" encoding="utf-8"?>
+<p:sld xmlns:a="http://schemas.openxmlformats.org/drawingml/2006/main" xmlns:r="http://schemas.openxmlformats.org/officeDocument/2006/relationships" xmlns:p="http://schemas.openxmlformats.org/presentationml/2006/main">
+  <p:cSld name="Slide 2">
+    <p:bg>
+      <p:bgPr>
+        <a:solidFill>
+          <a:srgbClr val="1A2A42"/>
+        </a:solidFill>
+        <a:effectLst/>
+      </p:bgPr>
+    </p:bg>
+    <p:spTree>
+      <p:nvGrpSpPr>
+        <p:cNvPr id="1" name=""/>
+        <p:cNvGrpSpPr/>
+        <p:nvPr/>
+      </p:nvGrpSpPr>
+      <p:grpSpPr>
+        <a:xfrm>
+          <a:off x="0" y="0"/>
+          <a:ext cx="0" cy="0"/>
+          <a:chOff x="0" y="0"/>
+          <a:chExt cx="0" cy="0"/>
+        </a:xfrm>
+      </p:grpSpPr>
+      <p:sp>
+        <p:nvSpPr>
+          <p:cNvPr id="5" name="Text 3"/>
+          <p:cNvSpPr/>
+          <p:nvPr/>
+        </p:nvSpPr>
+        <p:spPr>
+          <a:xfrm>
+            <a:off x="228600" y="365760"/>
+            <a:ext cx="8686800" cy="594360"/>
+          </a:xfrm>
+          <a:prstGeom prst="rect">
+            <a:avLst/>
+          </a:prstGeom>
+          <a:noFill/>
+          <a:ln/>
+        </p:spPr>
+        <p:txBody>
+          <a:bodyPr wrap="square" lIns="0" tIns="0" rIns="0" bIns="0" rtlCol="0" anchor="ctr"/>
+          <a:lstStyle/>
+          <a:p>
+            <a:pPr marL="0" indent="0" algn="l">
+              <a:buNone/>
+            </a:pPr>
+            <a:r>
+              <a:rPr lang="en-US" sz="3000" b="1" dirty="0">
+                <a:solidFill>
+                  <a:srgbClr val="C0994B"/>
+                </a:solidFill>
+                <a:latin typeface="BODONI 72 BOOK" pitchFamily="2" charset="0"/>
+              </a:rPr>
+              <a:t>AS-IS Challenges</a:t>
+            </a:r>
+            <a:endParaRPr lang="en-US" sz="3000" dirty="0">
+              <a:solidFill>
+                <a:srgbClr val="C0994B"/>
+              </a:solidFill>
+              <a:latin typeface="Bodoni 72 Book" pitchFamily="2" charset="0"/>
+            </a:endParaRPr>
+          </a:p>
+        </p:txBody>
+      </p:sp>
+      <p:sp>
+        <p:nvSpPr>
+          <p:cNvPr id="6" name="Shape 4"/>
+          <p:cNvSpPr/>
+          <p:nvPr/>
+        </p:nvSpPr>
+        <p:spPr>
+          <a:xfrm>
+            <a:off x="228600" y="1417320"/>
+            <a:ext cx="4206240" cy="914400"/>
+          </a:xfrm>
+          <a:prstGeom prst="rect">
+            <a:avLst/>
+          </a:prstGeom>
+          <a:solidFill>
+            <a:srgbClr val="F4F1EC"/>
+          </a:solidFill>
+          <a:ln w="12700">
+            <a:noFill/>
+            <a:prstDash val="solid"/>
+          </a:ln>
+          <a:effectLst>
+            <a:outerShdw blurRad="50800" dist="12700" dir="8100000" algn="bl" rotWithShape="0">
+              <a:srgbClr val="000000">
+                <a:alpha val="8000"/>
+              </a:srgbClr>
+            </a:outerShdw>
+          </a:effectLst>
+        </p:spPr>
+        <p:txBody>
+          <a:bodyPr/>
+          <a:lstStyle/>
+          <a:p>
+            <a:endParaRPr lang="en-GB"/>
+          </a:p>
+        </p:txBody>
+      </p:sp>
+      <p:sp>
+        <p:nvSpPr>
+          <p:cNvPr id="7" name="Text 5"/>
+          <p:cNvSpPr/>
+          <p:nvPr/>
+        </p:nvSpPr>
+        <p:spPr>
+          <a:xfrm>
+            <a:off x="365760" y="1481328"/>
+            <a:ext cx="3931920" cy="320040"/>
+          </a:xfrm>
+          <a:prstGeom prst="rect">
+            <a:avLst/>
+          </a:prstGeom>
+          <a:noFill/>
+          <a:ln/>
+        </p:spPr>
+        <p:txBody>
+          <a:bodyPr wrap="square" lIns="0" tIns="0" rIns="0" bIns="0" rtlCol="0" anchor="ctr"/>
+          <a:lstStyle/>
+          <a:p>
+            <a:pPr marL="0" indent="0" algn="l">
+              <a:buNone/>
+            </a:pPr>
+            <a:r>
+              <a:rPr lang="en-US" sz="1300" b="1" dirty="0">
+                <a:solidFill>
+                  <a:srgbClr val="C0994B"/>
+                </a:solidFill>
+                <a:latin typeface="BODONI 72 BOOK" pitchFamily="2" charset="0"/>
+              </a:rPr>
+              <a:t>Manual Application Handling</a:t>
+            </a:r>
+          </a:p>
+        </p:txBody>
+      </p:sp>
+      <p:sp>
+        <p:nvSpPr>
+          <p:cNvPr id="8" name="Text 6"/>
+          <p:cNvSpPr/>
+          <p:nvPr/>
+        </p:nvSpPr>
+        <p:spPr>
+          <a:xfrm>
+            <a:off x="365760" y="1801368"/>
+            <a:ext cx="3931920" cy="411480"/>
+          </a:xfrm>
+          <a:prstGeom prst="rect">
+            <a:avLst/>
+          </a:prstGeom>
+          <a:noFill/>
+          <a:ln/>
+        </p:spPr>
+        <p:txBody>
+          <a:bodyPr wrap="square" lIns="0" tIns="0" rIns="0" bIns="0" rtlCol="0" anchor="ctr"/>
+          <a:lstStyle/>
+          <a:p>
+            <a:pPr marL="0" indent="0" algn="l">
+              <a:buNone/>
+            </a:pPr>
+            <a:r>
+              <a:rPr lang="en-US" sz="1100" dirty="0">
+                <a:solidFill>
+                  <a:srgbClr val="1A2A42"/>
+                </a:solidFill>
+                <a:latin typeface="Aptos" panose="020B0004020202020204" pitchFamily="34" charset="0"/>
+                <a:cs typeface="Aparajita" panose="02020603050405020304" pitchFamily="18" charset="0"/>
+              </a:rPr>
+              <a:t>HR manually monitors web portal &amp; transfers data by hand, slow, and error-prone at scale</a:t>
+            </a:r>
+          </a:p>
+        </p:txBody>
+      </p:sp>
+      <p:sp>
+        <p:nvSpPr>
+          <p:cNvPr id="9" name="Shape 7"/>
+          <p:cNvSpPr/>
+          <p:nvPr/>
+        </p:nvSpPr>
+        <p:spPr>
+          <a:xfrm>
+            <a:off x="4663440" y="1417320"/>
+            <a:ext cx="4206240" cy="914400"/>
+          </a:xfrm>
+          <a:prstGeom prst="rect">
+            <a:avLst/>
+          </a:prstGeom>
+          <a:solidFill>
+            <a:srgbClr val="F4F1EC"/>
+          </a:solidFill>
+          <a:ln w="12700">
+            <a:noFill/>
+            <a:prstDash val="solid"/>
+          </a:ln>
+          <a:effectLst>
+            <a:outerShdw blurRad="50800" dist="12700" dir="8100000" algn="bl" rotWithShape="0">
+              <a:srgbClr val="000000">
+                <a:alpha val="8000"/>
+              </a:srgbClr>
+            </a:outerShdw>
+          </a:effectLst>
+        </p:spPr>
+        <p:txBody>
+          <a:bodyPr/>
+          <a:lstStyle/>
+          <a:p>
+            <a:endParaRPr lang="en-GB"/>
+          </a:p>
+        </p:txBody>
+      </p:sp>
+      <p:sp>
+        <p:nvSpPr>
+          <p:cNvPr id="10" name="Text 8"/>
+          <p:cNvSpPr/>
+          <p:nvPr/>
+        </p:nvSpPr>
+        <p:spPr>
+          <a:xfrm>
+            <a:off x="4800600" y="1481328"/>
+            <a:ext cx="3931920" cy="320040"/>
+          </a:xfrm>
+          <a:prstGeom prst="rect">
+            <a:avLst/>
+          </a:prstGeom>
+          <a:solidFill>
+            <a:srgbClr val="F4F1EC"/>
+          </a:solidFill>
+          <a:ln>
+            <a:noFill/>
+          </a:ln>
+        </p:spPr>
+        <p:txBody>
+          <a:bodyPr wrap="square" lIns="0" tIns="0" rIns="0" bIns="0" rtlCol="0" anchor="ctr"/>
+          <a:lstStyle/>
+          <a:p>
+            <a:pPr marL="0" indent="0" algn="l">
+              <a:buNone/>
+            </a:pPr>
+            <a:r>
+              <a:rPr lang="en-US" sz="1300" b="1" dirty="0">
+                <a:solidFill>
+                  <a:srgbClr val="C0994B"/>
+                </a:solidFill>
+                <a:latin typeface="BODONI 72 BOOK" pitchFamily="2" charset="0"/>
+              </a:rPr>
+              <a:t>Subjective CV Screening</a:t>
+            </a:r>
+          </a:p>
+        </p:txBody>
+      </p:sp>
+      <p:sp>
+        <p:nvSpPr>
+          <p:cNvPr id="11" name="Text 9"/>
+          <p:cNvSpPr/>
+          <p:nvPr/>
+        </p:nvSpPr>
+        <p:spPr>
+          <a:xfrm>
+            <a:off x="4800600" y="1801368"/>
+            <a:ext cx="3931920" cy="411480"/>
+          </a:xfrm>
+          <a:prstGeom prst="rect">
+            <a:avLst/>
+          </a:prstGeom>
+          <a:solidFill>
+            <a:srgbClr val="F4F1EC"/>
+          </a:solidFill>
+          <a:ln>
+            <a:noFill/>
+          </a:ln>
+        </p:spPr>
+        <p:txBody>
+          <a:bodyPr wrap="square" lIns="0" tIns="0" rIns="0" bIns="0" rtlCol="0" anchor="ctr"/>
+          <a:lstStyle/>
+          <a:p>
+            <a:pPr marL="0" indent="0" algn="l">
+              <a:buNone/>
+            </a:pPr>
+            <a:r>
+              <a:rPr lang="en-US" sz="1100" dirty="0">
+                <a:solidFill>
+                  <a:srgbClr val="1A2A42"/>
+                </a:solidFill>
+                <a:latin typeface="Aptos" panose="020B0004020202020204" pitchFamily="34" charset="0"/>
+                <a:cs typeface="Aparajita" panose="02020603050405020304" pitchFamily="18" charset="0"/>
+              </a:rPr>
+              <a:t>Invitations, cancellations, contracts. All written individually</a:t>
+            </a:r>
+          </a:p>
+        </p:txBody>
+      </p:sp>
+      <p:sp>
+        <p:nvSpPr>
+          <p:cNvPr id="12" name="Shape 10"/>
+          <p:cNvSpPr/>
+          <p:nvPr/>
+        </p:nvSpPr>
+        <p:spPr>
+          <a:xfrm>
+            <a:off x="228600" y="2514600"/>
+            <a:ext cx="4206240" cy="914400"/>
+          </a:xfrm>
+          <a:prstGeom prst="rect">
+            <a:avLst/>
+          </a:prstGeom>
+          <a:solidFill>
+            <a:srgbClr val="F4F1EC"/>
+          </a:solidFill>
+          <a:ln w="12700">
+            <a:noFill/>
+            <a:prstDash val="solid"/>
+          </a:ln>
+          <a:effectLst>
+            <a:outerShdw blurRad="50800" dist="12700" dir="8100000" algn="bl" rotWithShape="0">
+              <a:srgbClr val="000000">
+                <a:alpha val="8000"/>
+              </a:srgbClr>
+            </a:outerShdw>
+          </a:effectLst>
+        </p:spPr>
+        <p:txBody>
+          <a:bodyPr/>
+          <a:lstStyle/>
+          <a:p>
+            <a:endParaRPr lang="en-GB">
+              <a:latin typeface="Aptos" panose="020B0004020202020204" pitchFamily="34" charset="0"/>
+              <a:cs typeface="Aparajita" panose="02020603050405020304" pitchFamily="18" charset="0"/>
+            </a:endParaRPr>
+          </a:p>
+        </p:txBody>
+      </p:sp>
+      <p:sp>
+        <p:nvSpPr>
+          <p:cNvPr id="13" name="Text 11"/>
+          <p:cNvSpPr/>
+          <p:nvPr/>
+        </p:nvSpPr>
+        <p:spPr>
+          <a:xfrm>
+            <a:off x="365760" y="2578608"/>
+            <a:ext cx="3931920" cy="320040"/>
+          </a:xfrm>
+          <a:prstGeom prst="rect">
+            <a:avLst/>
+          </a:prstGeom>
+          <a:solidFill>
+            <a:srgbClr val="F4F1EC"/>
+          </a:solidFill>
+          <a:ln>
+            <a:noFill/>
+          </a:ln>
+        </p:spPr>
+        <p:txBody>
+          <a:bodyPr wrap="square" lIns="0" tIns="0" rIns="0" bIns="0" rtlCol="0" anchor="ctr"/>
+          <a:lstStyle/>
+          <a:p>
+            <a:pPr marL="0" indent="0" algn="l">
+              <a:buNone/>
+            </a:pPr>
+            <a:r>
+              <a:rPr lang="en-US" sz="1300" b="1" dirty="0">
+                <a:solidFill>
+                  <a:srgbClr val="C0994B"/>
+                </a:solidFill>
+                <a:latin typeface="BODONI 72 BOOK" pitchFamily="2" charset="0"/>
+              </a:rPr>
+              <a:t>Manual Scheduling &amp; Communication</a:t>
+            </a:r>
+          </a:p>
+        </p:txBody>
+      </p:sp>
+      <p:sp>
+        <p:nvSpPr>
+          <p:cNvPr id="14" name="Text 12"/>
+          <p:cNvSpPr/>
+          <p:nvPr/>
+        </p:nvSpPr>
+        <p:spPr>
+          <a:xfrm>
+            <a:off x="365760" y="2898648"/>
+            <a:ext cx="3931920" cy="411480"/>
+          </a:xfrm>
+          <a:prstGeom prst="rect">
+            <a:avLst/>
+          </a:prstGeom>
+          <a:solidFill>
+            <a:srgbClr val="F4F1EC"/>
+          </a:solidFill>
+          <a:ln>
+            <a:noFill/>
+          </a:ln>
+        </p:spPr>
+        <p:txBody>
+          <a:bodyPr wrap="square" lIns="0" tIns="0" rIns="0" bIns="0" rtlCol="0" anchor="ctr"/>
+          <a:lstStyle/>
+          <a:p>
+            <a:pPr marL="0" indent="0" algn="l">
+              <a:buNone/>
+            </a:pPr>
+            <a:r>
+              <a:rPr lang="en-US" sz="1100" dirty="0">
+                <a:solidFill>
+                  <a:srgbClr val="1A2A42"/>
+                </a:solidFill>
+                <a:latin typeface="Aptos" panose="020B0004020202020204" pitchFamily="34" charset="0"/>
+                <a:cs typeface="Aparajita" panose="02020603050405020304" pitchFamily="18" charset="0"/>
+              </a:rPr>
+              <a:t>Interviews and assessments lack standardised evaluation criteria</a:t>
+            </a:r>
+          </a:p>
+        </p:txBody>
+      </p:sp>
+      <p:sp>
+        <p:nvSpPr>
+          <p:cNvPr id="15" name="Shape 13"/>
+          <p:cNvSpPr/>
+          <p:nvPr/>
+        </p:nvSpPr>
+        <p:spPr>
+          <a:xfrm>
+            <a:off x="4663440" y="2514600"/>
+            <a:ext cx="4206240" cy="914400"/>
+          </a:xfrm>
+          <a:prstGeom prst="rect">
+            <a:avLst/>
+          </a:prstGeom>
+          <a:solidFill>
+            <a:srgbClr val="F4F1EC"/>
+          </a:solidFill>
+          <a:ln w="12700">
+            <a:noFill/>
+            <a:prstDash val="solid"/>
+          </a:ln>
+          <a:effectLst>
+            <a:outerShdw blurRad="50800" dist="12700" dir="8100000" algn="bl" rotWithShape="0">
+              <a:srgbClr val="000000">
+                <a:alpha val="8000"/>
+              </a:srgbClr>
+            </a:outerShdw>
+          </a:effectLst>
+        </p:spPr>
+        <p:txBody>
+          <a:bodyPr/>
+          <a:lstStyle/>
+          <a:p>
+            <a:endParaRPr lang="en-GB"/>
+          </a:p>
+        </p:txBody>
+      </p:sp>
+      <p:sp>
+        <p:nvSpPr>
+          <p:cNvPr id="16" name="Text 14"/>
+          <p:cNvSpPr/>
+          <p:nvPr/>
+        </p:nvSpPr>
+        <p:spPr>
+          <a:xfrm>
+            <a:off x="4800600" y="2578608"/>
+            <a:ext cx="3931920" cy="320040"/>
+          </a:xfrm>
+          <a:prstGeom prst="rect">
+            <a:avLst/>
+          </a:prstGeom>
+          <a:solidFill>
+            <a:srgbClr val="F4F1EC"/>
+          </a:solidFill>
+          <a:ln>
+            <a:noFill/>
+          </a:ln>
+        </p:spPr>
+        <p:txBody>
+          <a:bodyPr wrap="square" lIns="0" tIns="0" rIns="0" bIns="0" rtlCol="0" anchor="ctr"/>
+          <a:lstStyle/>
+          <a:p>
+            <a:pPr marL="0" indent="0" algn="l">
+              <a:buNone/>
+            </a:pPr>
+            <a:r>
+              <a:rPr lang="en-US" sz="1300" b="1" dirty="0">
+                <a:solidFill>
+                  <a:srgbClr val="C0994B"/>
+                </a:solidFill>
+                <a:latin typeface="BODONI 72 BOOK" pitchFamily="2" charset="0"/>
+              </a:rPr>
+              <a:t>No Structured Evaluation</a:t>
+            </a:r>
+          </a:p>
+        </p:txBody>
+      </p:sp>
+      <p:sp>
+        <p:nvSpPr>
+          <p:cNvPr id="17" name="Text 15"/>
+          <p:cNvSpPr/>
+          <p:nvPr/>
+        </p:nvSpPr>
+        <p:spPr>
+          <a:xfrm>
+            <a:off x="4800600" y="2898648"/>
+            <a:ext cx="3931920" cy="411480"/>
+          </a:xfrm>
+          <a:prstGeom prst="rect">
+            <a:avLst/>
+          </a:prstGeom>
+          <a:solidFill>
+            <a:srgbClr val="F4F1EC"/>
+          </a:solidFill>
+          <a:ln>
+            <a:noFill/>
+          </a:ln>
+        </p:spPr>
+        <p:txBody>
+          <a:bodyPr wrap="square" lIns="0" tIns="0" rIns="0" bIns="0" rtlCol="0" anchor="ctr"/>
+          <a:lstStyle/>
+          <a:p>
+            <a:pPr marL="0" indent="0" algn="l">
+              <a:buNone/>
+            </a:pPr>
+            <a:r>
+              <a:rPr lang="en-US" sz="1100" dirty="0">
+                <a:solidFill>
+                  <a:srgbClr val="1A2A42"/>
+                </a:solidFill>
+                <a:latin typeface="Aptos" panose="020B0004020202020204" pitchFamily="34" charset="0"/>
+                <a:cs typeface="Aparajita" panose="02020603050405020304" pitchFamily="18" charset="0"/>
+              </a:rPr>
+              <a:t>IT access, Slack, tasks, coordinated manually every single time</a:t>
+            </a:r>
+          </a:p>
+        </p:txBody>
+      </p:sp>
+      <p:sp>
+        <p:nvSpPr>
+          <p:cNvPr id="18" name="Shape 16"/>
+          <p:cNvSpPr/>
+          <p:nvPr/>
+        </p:nvSpPr>
+        <p:spPr>
+          <a:xfrm>
+            <a:off x="228600" y="3611880"/>
+            <a:ext cx="4206240" cy="914400"/>
+          </a:xfrm>
+          <a:prstGeom prst="rect">
+            <a:avLst/>
+          </a:prstGeom>
+          <a:solidFill>
+            <a:srgbClr val="F4F1EC"/>
+          </a:solidFill>
+          <a:ln w="12700">
+            <a:noFill/>
+            <a:prstDash val="solid"/>
+          </a:ln>
+          <a:effectLst>
+            <a:outerShdw blurRad="50800" dist="12700" dir="8100000" algn="bl" rotWithShape="0">
+              <a:srgbClr val="000000">
+                <a:alpha val="8000"/>
+              </a:srgbClr>
+            </a:outerShdw>
+          </a:effectLst>
+        </p:spPr>
+        <p:txBody>
+          <a:bodyPr/>
+          <a:lstStyle/>
+          <a:p>
+            <a:endParaRPr lang="en-GB"/>
+          </a:p>
+        </p:txBody>
+      </p:sp>
+      <p:sp>
+        <p:nvSpPr>
+          <p:cNvPr id="19" name="Text 17"/>
+          <p:cNvSpPr/>
+          <p:nvPr/>
+        </p:nvSpPr>
+        <p:spPr>
+          <a:xfrm>
+            <a:off x="365760" y="3675888"/>
+            <a:ext cx="3931920" cy="320040"/>
+          </a:xfrm>
+          <a:prstGeom prst="rect">
+            <a:avLst/>
+          </a:prstGeom>
+          <a:solidFill>
+            <a:srgbClr val="F4F1EC"/>
+          </a:solidFill>
+          <a:ln>
+            <a:noFill/>
+          </a:ln>
+        </p:spPr>
+        <p:txBody>
+          <a:bodyPr wrap="square" lIns="0" tIns="0" rIns="0" bIns="0" rtlCol="0" anchor="ctr"/>
+          <a:lstStyle/>
+          <a:p>
+            <a:pPr marL="0" indent="0" algn="l">
+              <a:buNone/>
+            </a:pPr>
+            <a:r>
+              <a:rPr lang="en-US" sz="1300" b="1" dirty="0">
+                <a:solidFill>
+                  <a:srgbClr val="C0994B"/>
+                </a:solidFill>
+                <a:latin typeface="BODONI 72 BOOK" pitchFamily="2" charset="0"/>
+              </a:rPr>
+              <a:t>Manual Contract Creation</a:t>
+            </a:r>
+          </a:p>
+        </p:txBody>
+      </p:sp>
+      <p:sp>
+        <p:nvSpPr>
+          <p:cNvPr id="20" name="Text 18"/>
+          <p:cNvSpPr/>
+          <p:nvPr/>
+        </p:nvSpPr>
+        <p:spPr>
+          <a:xfrm>
+            <a:off x="365760" y="3995928"/>
+            <a:ext cx="3931920" cy="411480"/>
+          </a:xfrm>
+          <a:prstGeom prst="rect">
+            <a:avLst/>
+          </a:prstGeom>
+          <a:solidFill>
+            <a:srgbClr val="F4F1EC"/>
+          </a:solidFill>
+          <a:ln>
+            <a:noFill/>
+          </a:ln>
+        </p:spPr>
+        <p:txBody>
+          <a:bodyPr wrap="square" lIns="0" tIns="0" rIns="0" bIns="0" rtlCol="0" anchor="ctr"/>
+          <a:lstStyle/>
+          <a:p>
+            <a:pPr marL="0" indent="0" algn="l">
+              <a:buNone/>
+            </a:pPr>
+            <a:r>
+              <a:rPr lang="en-US" sz="1100" dirty="0">
+                <a:solidFill>
+                  <a:srgbClr val="1A2A42"/>
+                </a:solidFill>
+                <a:latin typeface="Aptos" panose="020B0004020202020204" pitchFamily="34" charset="0"/>
+                <a:cs typeface="Aparajita" panose="02020603050405020304" pitchFamily="18" charset="0"/>
+              </a:rPr>
+              <a:t>Two recruiters, two outcomes.  Bias creeps in at every stage</a:t>
+            </a:r>
+          </a:p>
+        </p:txBody>
+      </p:sp>
+      <p:sp>
+        <p:nvSpPr>
+          <p:cNvPr id="21" name="Shape 19"/>
+          <p:cNvSpPr/>
+          <p:nvPr/>
+        </p:nvSpPr>
+        <p:spPr>
+          <a:xfrm>
+            <a:off x="4663440" y="3630168"/>
+            <a:ext cx="4206240" cy="914400"/>
+          </a:xfrm>
+          <a:prstGeom prst="rect">
+            <a:avLst/>
+          </a:prstGeom>
+          <a:solidFill>
+            <a:srgbClr val="F4F1EC"/>
+          </a:solidFill>
+          <a:ln w="12700">
+            <a:noFill/>
+            <a:prstDash val="solid"/>
+          </a:ln>
+          <a:effectLst>
+            <a:outerShdw blurRad="50800" dist="12700" dir="8100000" algn="bl" rotWithShape="0">
+              <a:srgbClr val="000000">
+                <a:alpha val="8000"/>
+              </a:srgbClr>
+            </a:outerShdw>
+          </a:effectLst>
+        </p:spPr>
+        <p:txBody>
+          <a:bodyPr/>
+          <a:lstStyle/>
+          <a:p>
+            <a:endParaRPr lang="en-GB"/>
+          </a:p>
+        </p:txBody>
+      </p:sp>
+      <p:sp>
+        <p:nvSpPr>
+          <p:cNvPr id="22" name="Text 20"/>
+          <p:cNvSpPr/>
+          <p:nvPr/>
+        </p:nvSpPr>
+        <p:spPr>
+          <a:xfrm>
+            <a:off x="4800600" y="3675888"/>
+            <a:ext cx="3931920" cy="320040"/>
+          </a:xfrm>
+          <a:prstGeom prst="rect">
+            <a:avLst/>
+          </a:prstGeom>
+          <a:solidFill>
+            <a:srgbClr val="F4F1EC"/>
+          </a:solidFill>
+          <a:ln>
+            <a:noFill/>
+          </a:ln>
+        </p:spPr>
+        <p:txBody>
+          <a:bodyPr wrap="square" lIns="0" tIns="0" rIns="0" bIns="0" rtlCol="0" anchor="ctr"/>
+          <a:lstStyle/>
+          <a:p>
+            <a:pPr marL="0" indent="0" algn="l">
+              <a:buNone/>
+            </a:pPr>
+            <a:r>
+              <a:rPr lang="en-US" sz="1300" b="1" dirty="0">
+                <a:solidFill>
+                  <a:srgbClr val="C0994B"/>
+                </a:solidFill>
+                <a:latin typeface="BODONI 72 BOOK" pitchFamily="2" charset="0"/>
+              </a:rPr>
+              <a:t>Unstructured Onboarding</a:t>
+            </a:r>
+          </a:p>
+        </p:txBody>
+      </p:sp>
+      <p:sp>
+        <p:nvSpPr>
+          <p:cNvPr id="23" name="Text 21"/>
+          <p:cNvSpPr/>
+          <p:nvPr/>
+        </p:nvSpPr>
+        <p:spPr>
+          <a:xfrm>
+            <a:off x="4800600" y="3995928"/>
+            <a:ext cx="3931920" cy="411480"/>
+          </a:xfrm>
+          <a:prstGeom prst="rect">
+            <a:avLst/>
+          </a:prstGeom>
+          <a:solidFill>
+            <a:srgbClr val="F4F1EC"/>
+          </a:solidFill>
+          <a:ln>
+            <a:noFill/>
+          </a:ln>
+        </p:spPr>
+        <p:txBody>
+          <a:bodyPr wrap="square" lIns="0" tIns="0" rIns="0" bIns="0" rtlCol="0" anchor="ctr"/>
+          <a:lstStyle/>
+          <a:p>
+            <a:pPr marL="0" indent="0" algn="l">
+              <a:buNone/>
+            </a:pPr>
+            <a:r>
+              <a:rPr lang="en-US" sz="1100" dirty="0">
+                <a:solidFill>
+                  <a:srgbClr val="1A2A42"/>
+                </a:solidFill>
+                <a:latin typeface="Aptos" panose="020B0004020202020204" pitchFamily="34" charset="0"/>
+                <a:cs typeface="Aparajita" panose="02020603050405020304" pitchFamily="18" charset="0"/>
+              </a:rPr>
+              <a:t>IT access, workspace &amp; introductions coordinated by hand. Steps are forgotten or delayed</a:t>
+            </a:r>
+          </a:p>
+        </p:txBody>
+      </p:sp>
+    </p:spTree>
+  </p:cSld>
+  <p:clrMapOvr>
+    <a:masterClrMapping/>
+  </p:clrMapOvr>
+</p:sld>
+</file>
+
+<file path=ppt/slides/slide4.xml><?xml version="1.0" encoding="utf-8"?>
+<p:sld xmlns:a="http://schemas.openxmlformats.org/drawingml/2006/main" xmlns:r="http://schemas.openxmlformats.org/officeDocument/2006/relationships" xmlns:p="http://schemas.openxmlformats.org/presentationml/2006/main">
+  <p:cSld>
+    <p:bg>
+      <p:bgPr>
+        <a:solidFill>
+          <a:srgbClr val="1A2A42"/>
+        </a:solidFill>
+        <a:effectLst/>
+      </p:bgPr>
+    </p:bg>
+    <p:spTree>
+      <p:nvGrpSpPr>
+        <p:cNvPr id="1" name=""/>
+        <p:cNvGrpSpPr/>
+        <p:nvPr/>
+      </p:nvGrpSpPr>
+      <p:grpSpPr>
+        <a:xfrm>
+          <a:off x="0" y="0"/>
+          <a:ext cx="0" cy="0"/>
+          <a:chOff x="0" y="0"/>
+          <a:chExt cx="0" cy="0"/>
+        </a:xfrm>
+      </p:grpSpPr>
+      <p:pic>
+        <p:nvPicPr>
+          <p:cNvPr id="2" name="Image 0" descr="preencoded.png"/>
           <p:cNvPicPr>
             <a:picLocks noChangeAspect="1"/>
           </p:cNvPicPr>
@@ -2067,30 +3847,28 @@
         </p:blipFill>
         <p:spPr>
           <a:xfrm>
-            <a:off x="502920" y="2139696"/>
-            <a:ext cx="384048" cy="384048"/>
-          </a:xfrm>
-          <a:prstGeom prst="rect">
-            <a:avLst/>
-          </a:prstGeom>
+            <a:off x="4023360" y="640080"/>
+            <a:ext cx="1097280" cy="1097280"/>
+          </a:xfrm>
+          <a:prstGeom prst="rect">
+            <a:avLst/>
+          </a:prstGeom>
+          <a:noFill/>
+          <a:ln>
+            <a:noFill/>
+          </a:ln>
         </p:spPr>
       </p:pic>
       <p:sp>
         <p:nvSpPr>
-          <p:cNvPr id="27" name="Text 6">
-            <a:extLst>
-              <a:ext uri="{FF2B5EF4-FFF2-40B4-BE49-F238E27FC236}">
-                <a16:creationId xmlns:a16="http://schemas.microsoft.com/office/drawing/2014/main" id="{61723533-95A1-E062-0A80-760087D093F5}"/>
-              </a:ext>
-            </a:extLst>
-          </p:cNvPr>
-          <p:cNvSpPr/>
-          <p:nvPr/>
-        </p:nvSpPr>
-        <p:spPr>
-          <a:xfrm>
-            <a:off x="1005840" y="2084832"/>
-            <a:ext cx="4480560" cy="256032"/>
+          <p:cNvPr id="3" name="Text 0"/>
+          <p:cNvSpPr/>
+          <p:nvPr/>
+        </p:nvSpPr>
+        <p:spPr>
+          <a:xfrm>
+            <a:off x="457200" y="1920240"/>
+            <a:ext cx="8229600" cy="822960"/>
           </a:xfrm>
           <a:prstGeom prst="rect">
             <a:avLst/>
@@ -2102,23 +3880,146 @@
           <a:bodyPr wrap="square" lIns="0" tIns="0" rIns="0" bIns="0" rtlCol="0" anchor="ctr"/>
           <a:lstStyle/>
           <a:p>
-            <a:pPr marL="0" indent="0">
+            <a:pPr marL="0" indent="0" algn="ctr">
               <a:buNone/>
             </a:pPr>
             <a:r>
-              <a:rPr lang="en-US" sz="850" b="1" dirty="0">
+              <a:rPr lang="en-US" sz="3800" b="1" dirty="0">
                 <a:solidFill>
-                  <a:schemeClr val="bg1"/>
+                  <a:srgbClr val="FFFFFF"/>
+                </a:solidFill>
+                <a:latin typeface="BODONI 72 BOOK" pitchFamily="2" charset="0"/>
+                <a:ea typeface="Calibri" pitchFamily="34" charset="-122"/>
+                <a:cs typeface="Calibri" pitchFamily="34" charset="-120"/>
+              </a:rPr>
+              <a:t>Demo Recording</a:t>
+            </a:r>
+            <a:endParaRPr lang="en-US" sz="3800" dirty="0">
+              <a:latin typeface="Bodoni 72 Book" pitchFamily="2" charset="0"/>
+            </a:endParaRPr>
+          </a:p>
+        </p:txBody>
+      </p:sp>
+      <p:sp>
+        <p:nvSpPr>
+          <p:cNvPr id="4" name="Text 1"/>
+          <p:cNvSpPr/>
+          <p:nvPr/>
+        </p:nvSpPr>
+        <p:spPr>
+          <a:xfrm>
+            <a:off x="457200" y="2834640"/>
+            <a:ext cx="8229600" cy="502920"/>
+          </a:xfrm>
+          <a:prstGeom prst="rect">
+            <a:avLst/>
+          </a:prstGeom>
+          <a:noFill/>
+          <a:ln/>
+        </p:spPr>
+        <p:txBody>
+          <a:bodyPr wrap="square" lIns="0" tIns="0" rIns="0" bIns="0" rtlCol="0" anchor="ctr"/>
+          <a:lstStyle/>
+          <a:p>
+            <a:pPr marL="0" indent="0" algn="ctr">
+              <a:buNone/>
+            </a:pPr>
+            <a:r>
+              <a:rPr lang="en-US" sz="1800" dirty="0">
+                <a:solidFill>
+                  <a:srgbClr val="CBE0F0"/>
+                </a:solidFill>
+                <a:latin typeface="Aptos" panose="020B0004020202020204" pitchFamily="34" charset="0"/>
+                <a:ea typeface="Calibri" pitchFamily="34" charset="-122"/>
+                <a:cs typeface="Calibri" pitchFamily="34" charset="-120"/>
+              </a:rPr>
+              <a:t>Live walkthrough of the TO-BE process</a:t>
+            </a:r>
+            <a:endParaRPr lang="en-US" sz="1800" dirty="0">
+              <a:latin typeface="Aptos" panose="020B0004020202020204" pitchFamily="34" charset="0"/>
+            </a:endParaRPr>
+          </a:p>
+        </p:txBody>
+      </p:sp>
+      <p:sp>
+        <p:nvSpPr>
+          <p:cNvPr id="5" name="Shape 2"/>
+          <p:cNvSpPr/>
+          <p:nvPr/>
+        </p:nvSpPr>
+        <p:spPr>
+          <a:xfrm>
+            <a:off x="914400" y="3566160"/>
+            <a:ext cx="2286000" cy="457200"/>
+          </a:xfrm>
+          <a:prstGeom prst="rect">
+            <a:avLst/>
+          </a:prstGeom>
+          <a:solidFill>
+            <a:srgbClr val="243654"/>
+          </a:solidFill>
+          <a:ln w="12700">
+            <a:solidFill>
+              <a:srgbClr val="FFCC00"/>
+            </a:solidFill>
+            <a:prstDash val="solid"/>
+          </a:ln>
+        </p:spPr>
+        <p:txBody>
+          <a:bodyPr/>
+          <a:lstStyle/>
+          <a:p>
+            <a:endParaRPr lang="en-GB" dirty="0">
+              <a:solidFill>
+                <a:srgbClr val="C0994B"/>
+              </a:solidFill>
+              <a:latin typeface="Aptos" panose="020B0004020202020204" pitchFamily="34" charset="0"/>
+            </a:endParaRPr>
+          </a:p>
+        </p:txBody>
+      </p:sp>
+      <p:sp>
+        <p:nvSpPr>
+          <p:cNvPr id="6" name="Text 3"/>
+          <p:cNvSpPr/>
+          <p:nvPr/>
+        </p:nvSpPr>
+        <p:spPr>
+          <a:xfrm>
+            <a:off x="914400" y="3566160"/>
+            <a:ext cx="2286000" cy="457200"/>
+          </a:xfrm>
+          <a:prstGeom prst="rect">
+            <a:avLst/>
+          </a:prstGeom>
+          <a:noFill/>
+          <a:ln>
+            <a:solidFill>
+              <a:srgbClr val="FFCC00"/>
+            </a:solidFill>
+          </a:ln>
+        </p:spPr>
+        <p:txBody>
+          <a:bodyPr wrap="square" rtlCol="0" anchor="ctr"/>
+          <a:lstStyle/>
+          <a:p>
+            <a:pPr marL="0" indent="0" algn="ctr">
+              <a:buNone/>
+            </a:pPr>
+            <a:r>
+              <a:rPr lang="en-US" sz="1100" b="1" dirty="0">
+                <a:solidFill>
+                  <a:srgbClr val="C0994B"/>
                 </a:solidFill>
                 <a:latin typeface="Calibri" pitchFamily="34" charset="0"/>
                 <a:ea typeface="Calibri" pitchFamily="34" charset="-122"/>
                 <a:cs typeface="Calibri" pitchFamily="34" charset="-120"/>
               </a:rPr>
-              <a:t>SIZE</a:t>
-            </a:r>
-            <a:endParaRPr lang="en-US" sz="850" dirty="0">
+              <a:t>Job Posting</a:t>
+            </a:r>
+            <a:endParaRPr lang="en-US" sz="1100" dirty="0">
               <a:solidFill>
-                <a:schemeClr val="bg1"/>
+                <a:srgbClr val="C0994B"/>
               </a:solidFill>
             </a:endParaRPr>
           </a:p>
@@ -2126,971 +4027,173 @@
       </p:sp>
       <p:sp>
         <p:nvSpPr>
-          <p:cNvPr id="28" name="Text 7">
-            <a:extLst>
-              <a:ext uri="{FF2B5EF4-FFF2-40B4-BE49-F238E27FC236}">
-                <a16:creationId xmlns:a16="http://schemas.microsoft.com/office/drawing/2014/main" id="{7F645E7B-5332-EBC0-619C-EF8BFC4D7EAF}"/>
-              </a:ext>
-            </a:extLst>
-          </p:cNvPr>
-          <p:cNvSpPr/>
-          <p:nvPr/>
-        </p:nvSpPr>
-        <p:spPr>
-          <a:xfrm>
-            <a:off x="1005840" y="2340864"/>
-            <a:ext cx="4480560" cy="292608"/>
+          <p:cNvPr id="7" name="Shape 4"/>
+          <p:cNvSpPr/>
+          <p:nvPr/>
+        </p:nvSpPr>
+        <p:spPr>
+          <a:xfrm>
+            <a:off x="3474720" y="3566160"/>
+            <a:ext cx="2286000" cy="457200"/>
+          </a:xfrm>
+          <a:prstGeom prst="rect">
+            <a:avLst/>
+          </a:prstGeom>
+          <a:solidFill>
+            <a:srgbClr val="243654"/>
+          </a:solidFill>
+          <a:ln w="12700">
+            <a:solidFill>
+              <a:srgbClr val="FFCC00"/>
+            </a:solidFill>
+            <a:prstDash val="solid"/>
+          </a:ln>
+        </p:spPr>
+        <p:txBody>
+          <a:bodyPr/>
+          <a:lstStyle/>
+          <a:p>
+            <a:endParaRPr lang="en-GB" dirty="0">
+              <a:solidFill>
+                <a:srgbClr val="FFC000"/>
+              </a:solidFill>
+            </a:endParaRPr>
+          </a:p>
+        </p:txBody>
+      </p:sp>
+      <p:sp>
+        <p:nvSpPr>
+          <p:cNvPr id="8" name="Text 5"/>
+          <p:cNvSpPr/>
+          <p:nvPr/>
+        </p:nvSpPr>
+        <p:spPr>
+          <a:xfrm>
+            <a:off x="3474720" y="3566160"/>
+            <a:ext cx="2286000" cy="457200"/>
           </a:xfrm>
           <a:prstGeom prst="rect">
             <a:avLst/>
           </a:prstGeom>
           <a:noFill/>
-          <a:ln/>
-        </p:spPr>
-        <p:txBody>
-          <a:bodyPr wrap="square" lIns="0" tIns="0" rIns="0" bIns="0" rtlCol="0" anchor="ctr"/>
-          <a:lstStyle/>
-          <a:p>
-            <a:pPr marL="0" indent="0">
+          <a:ln>
+            <a:solidFill>
+              <a:srgbClr val="FFCC00"/>
+            </a:solidFill>
+          </a:ln>
+        </p:spPr>
+        <p:txBody>
+          <a:bodyPr wrap="square" rtlCol="0" anchor="ctr"/>
+          <a:lstStyle/>
+          <a:p>
+            <a:pPr marL="0" indent="0" algn="ctr">
               <a:buNone/>
             </a:pPr>
             <a:r>
-              <a:rPr lang="en-US" sz="1300" dirty="0">
+              <a:rPr lang="en-US" sz="1100" b="1" dirty="0">
                 <a:solidFill>
-                  <a:schemeClr val="bg1"/>
+                  <a:srgbClr val="C0994B"/>
                 </a:solidFill>
-                <a:latin typeface="Calibri" pitchFamily="34" charset="0"/>
+                <a:latin typeface="Aptos" panose="020B0004020202020204" pitchFamily="34" charset="0"/>
                 <a:ea typeface="Calibri" pitchFamily="34" charset="-122"/>
                 <a:cs typeface="Calibri" pitchFamily="34" charset="-120"/>
               </a:rPr>
-              <a:t>10 Employees</a:t>
-            </a:r>
-            <a:endParaRPr lang="en-US" sz="1300" dirty="0">
+              <a:t>CV Scoring via Claude API</a:t>
+            </a:r>
+            <a:endParaRPr lang="en-US" sz="1100" dirty="0">
               <a:solidFill>
-                <a:schemeClr val="bg1"/>
+                <a:srgbClr val="C0994B"/>
               </a:solidFill>
-            </a:endParaRPr>
-          </a:p>
-        </p:txBody>
-      </p:sp>
-      <p:sp>
-        <p:nvSpPr>
-          <p:cNvPr id="29" name="Shape 8">
-            <a:extLst>
-              <a:ext uri="{FF2B5EF4-FFF2-40B4-BE49-F238E27FC236}">
-                <a16:creationId xmlns:a16="http://schemas.microsoft.com/office/drawing/2014/main" id="{433FAC95-901A-BFED-835D-2BF2E9D502CC}"/>
-              </a:ext>
-            </a:extLst>
-          </p:cNvPr>
-          <p:cNvSpPr/>
-          <p:nvPr/>
-        </p:nvSpPr>
-        <p:spPr>
-          <a:xfrm>
-            <a:off x="365760" y="2889504"/>
-            <a:ext cx="5303520" cy="749808"/>
-          </a:xfrm>
-          <a:prstGeom prst="rect">
-            <a:avLst/>
-          </a:prstGeom>
-          <a:solidFill>
-            <a:schemeClr val="accent1">
-              <a:lumMod val="75000"/>
-            </a:schemeClr>
+              <a:latin typeface="Aptos" panose="020B0004020202020204" pitchFamily="34" charset="0"/>
+            </a:endParaRPr>
+          </a:p>
+        </p:txBody>
+      </p:sp>
+      <p:sp>
+        <p:nvSpPr>
+          <p:cNvPr id="9" name="Shape 6"/>
+          <p:cNvSpPr/>
+          <p:nvPr/>
+        </p:nvSpPr>
+        <p:spPr>
+          <a:xfrm>
+            <a:off x="6035040" y="3566160"/>
+            <a:ext cx="2286000" cy="457200"/>
+          </a:xfrm>
+          <a:prstGeom prst="rect">
+            <a:avLst/>
+          </a:prstGeom>
+          <a:solidFill>
+            <a:srgbClr val="243654"/>
           </a:solidFill>
           <a:ln w="12700">
-            <a:noFill/>
+            <a:solidFill>
+              <a:srgbClr val="FFCC00"/>
+            </a:solidFill>
             <a:prstDash val="solid"/>
           </a:ln>
-          <a:effectLst>
-            <a:outerShdw blurRad="50800" dist="12700" dir="8100000" algn="bl" rotWithShape="0">
-              <a:srgbClr val="000000">
-                <a:alpha val="7000"/>
-              </a:srgbClr>
-            </a:outerShdw>
-          </a:effectLst>
         </p:spPr>
         <p:txBody>
           <a:bodyPr/>
           <a:lstStyle/>
           <a:p>
-            <a:endParaRPr lang="en-GB">
+            <a:endParaRPr lang="en-GB" dirty="0">
               <a:solidFill>
-                <a:schemeClr val="bg1"/>
+                <a:srgbClr val="FFC000"/>
               </a:solidFill>
             </a:endParaRPr>
           </a:p>
         </p:txBody>
       </p:sp>
-      <p:pic>
-        <p:nvPicPr>
-          <p:cNvPr id="30" name="Image 2" descr="preencoded.png">
-            <a:extLst>
-              <a:ext uri="{FF2B5EF4-FFF2-40B4-BE49-F238E27FC236}">
-                <a16:creationId xmlns:a16="http://schemas.microsoft.com/office/drawing/2014/main" id="{554A7C15-ACB8-3BFE-D97E-D6234D2C90DD}"/>
-              </a:ext>
-            </a:extLst>
-          </p:cNvPr>
-          <p:cNvPicPr>
-            <a:picLocks noChangeAspect="1"/>
-          </p:cNvPicPr>
-          <p:nvPr/>
-        </p:nvPicPr>
-        <p:blipFill>
-          <a:blip r:embed="rId5">
-            <a:duotone>
-              <a:schemeClr val="accent4">
-                <a:shade val="45000"/>
-                <a:satMod val="135000"/>
-              </a:schemeClr>
-              <a:prstClr val="white"/>
-            </a:duotone>
-            <a:extLst>
-              <a:ext uri="{BEBA8EAE-BF5A-486C-A8C5-ECC9F3942E4B}">
-                <a14:imgProps xmlns:a14="http://schemas.microsoft.com/office/drawing/2010/main">
-                  <a14:imgLayer r:embed="rId6">
-                    <a14:imgEffect>
-                      <a14:brightnessContrast bright="-40000" contrast="40000"/>
-                    </a14:imgEffect>
-                  </a14:imgLayer>
-                </a14:imgProps>
-              </a:ext>
-            </a:extLst>
-          </a:blip>
-          <a:stretch>
-            <a:fillRect/>
-          </a:stretch>
-        </p:blipFill>
-        <p:spPr>
-          <a:xfrm>
-            <a:off x="502920" y="3035808"/>
-            <a:ext cx="384048" cy="384048"/>
-          </a:xfrm>
-          <a:prstGeom prst="rect">
-            <a:avLst/>
-          </a:prstGeom>
-        </p:spPr>
-      </p:pic>
-      <p:sp>
-        <p:nvSpPr>
-          <p:cNvPr id="31" name="Text 9">
-            <a:extLst>
-              <a:ext uri="{FF2B5EF4-FFF2-40B4-BE49-F238E27FC236}">
-                <a16:creationId xmlns:a16="http://schemas.microsoft.com/office/drawing/2014/main" id="{85625B0F-7E8F-9367-EF6D-567AC91117B9}"/>
-              </a:ext>
-            </a:extLst>
-          </p:cNvPr>
-          <p:cNvSpPr/>
-          <p:nvPr/>
-        </p:nvSpPr>
-        <p:spPr>
-          <a:xfrm>
-            <a:off x="1005840" y="2980944"/>
-            <a:ext cx="4480560" cy="256032"/>
+      <p:sp>
+        <p:nvSpPr>
+          <p:cNvPr id="10" name="Text 7"/>
+          <p:cNvSpPr/>
+          <p:nvPr/>
+        </p:nvSpPr>
+        <p:spPr>
+          <a:xfrm>
+            <a:off x="6035040" y="3566160"/>
+            <a:ext cx="2286000" cy="457200"/>
           </a:xfrm>
           <a:prstGeom prst="rect">
             <a:avLst/>
           </a:prstGeom>
           <a:noFill/>
-          <a:ln/>
-        </p:spPr>
-        <p:txBody>
-          <a:bodyPr wrap="square" lIns="0" tIns="0" rIns="0" bIns="0" rtlCol="0" anchor="ctr"/>
-          <a:lstStyle/>
-          <a:p>
-            <a:pPr marL="0" indent="0">
+          <a:ln>
+            <a:solidFill>
+              <a:srgbClr val="FFCC00"/>
+            </a:solidFill>
+          </a:ln>
+        </p:spPr>
+        <p:txBody>
+          <a:bodyPr wrap="square" rtlCol="0" anchor="ctr"/>
+          <a:lstStyle/>
+          <a:p>
+            <a:pPr marL="0" indent="0" algn="ctr">
               <a:buNone/>
             </a:pPr>
             <a:r>
-              <a:rPr lang="en-US" sz="850" b="1" dirty="0">
+              <a:rPr lang="en-US" sz="1100" b="1" dirty="0">
                 <a:solidFill>
-                  <a:schemeClr val="bg1"/>
+                  <a:srgbClr val="C0994B"/>
                 </a:solidFill>
-                <a:latin typeface="Calibri" pitchFamily="34" charset="0"/>
+                <a:latin typeface="Aptos" panose="020B0004020202020204" pitchFamily="34" charset="0"/>
                 <a:ea typeface="Calibri" pitchFamily="34" charset="-122"/>
                 <a:cs typeface="Calibri" pitchFamily="34" charset="-120"/>
               </a:rPr>
-              <a:t>FOCUS</a:t>
-            </a:r>
-            <a:endParaRPr lang="en-US" sz="850" dirty="0">
-              <a:solidFill>
-                <a:schemeClr val="bg1"/>
-              </a:solidFill>
-            </a:endParaRPr>
-          </a:p>
-        </p:txBody>
-      </p:sp>
-      <p:sp>
-        <p:nvSpPr>
-          <p:cNvPr id="32" name="Text 10">
-            <a:extLst>
-              <a:ext uri="{FF2B5EF4-FFF2-40B4-BE49-F238E27FC236}">
-                <a16:creationId xmlns:a16="http://schemas.microsoft.com/office/drawing/2014/main" id="{6EFC7767-9C5F-34AB-73FA-3FB13516DFA9}"/>
-              </a:ext>
-            </a:extLst>
-          </p:cNvPr>
-          <p:cNvSpPr/>
-          <p:nvPr/>
-        </p:nvSpPr>
-        <p:spPr>
-          <a:xfrm>
-            <a:off x="1005840" y="3236976"/>
-            <a:ext cx="4480560" cy="292608"/>
-          </a:xfrm>
-          <a:prstGeom prst="rect">
-            <a:avLst/>
-          </a:prstGeom>
-          <a:noFill/>
-          <a:ln/>
-        </p:spPr>
-        <p:txBody>
-          <a:bodyPr wrap="square" lIns="0" tIns="0" rIns="0" bIns="0" rtlCol="0" anchor="ctr"/>
-          <a:lstStyle/>
-          <a:p>
-            <a:pPr marL="0" indent="0">
-              <a:buNone/>
-            </a:pPr>
-            <a:r>
-              <a:rPr lang="en-US" sz="1300" dirty="0">
-                <a:solidFill>
-                  <a:schemeClr val="bg1"/>
-                </a:solidFill>
-                <a:latin typeface="Calibri" pitchFamily="34" charset="0"/>
-                <a:ea typeface="Calibri" pitchFamily="34" charset="-122"/>
-                <a:cs typeface="Calibri" pitchFamily="34" charset="-120"/>
-              </a:rPr>
-              <a:t>Strategy · Process · Digital Transformation</a:t>
-            </a:r>
-            <a:endParaRPr lang="en-US" sz="1300" dirty="0">
-              <a:solidFill>
-                <a:schemeClr val="bg1"/>
-              </a:solidFill>
-            </a:endParaRPr>
-          </a:p>
-        </p:txBody>
-      </p:sp>
-      <p:sp>
-        <p:nvSpPr>
-          <p:cNvPr id="33" name="Shape 11">
-            <a:extLst>
-              <a:ext uri="{FF2B5EF4-FFF2-40B4-BE49-F238E27FC236}">
-                <a16:creationId xmlns:a16="http://schemas.microsoft.com/office/drawing/2014/main" id="{265166A4-87A6-DA84-BE99-35E0E358E3C3}"/>
-              </a:ext>
-            </a:extLst>
-          </p:cNvPr>
-          <p:cNvSpPr/>
-          <p:nvPr/>
-        </p:nvSpPr>
-        <p:spPr>
-          <a:xfrm>
-            <a:off x="365760" y="3785616"/>
-            <a:ext cx="5303520" cy="749808"/>
-          </a:xfrm>
-          <a:prstGeom prst="rect">
-            <a:avLst/>
-          </a:prstGeom>
-          <a:solidFill>
-            <a:schemeClr val="accent1">
-              <a:lumMod val="75000"/>
-            </a:schemeClr>
-          </a:solidFill>
-          <a:ln w="12700">
-            <a:noFill/>
-            <a:prstDash val="solid"/>
-          </a:ln>
-          <a:effectLst>
-            <a:outerShdw blurRad="50800" dist="12700" dir="8100000" algn="bl" rotWithShape="0">
-              <a:srgbClr val="000000">
-                <a:alpha val="7000"/>
-              </a:srgbClr>
-            </a:outerShdw>
-          </a:effectLst>
-        </p:spPr>
-        <p:txBody>
-          <a:bodyPr/>
-          <a:lstStyle/>
-          <a:p>
-            <a:endParaRPr lang="en-GB">
-              <a:solidFill>
-                <a:schemeClr val="bg1"/>
-              </a:solidFill>
-            </a:endParaRPr>
-          </a:p>
-        </p:txBody>
-      </p:sp>
-      <p:pic>
-        <p:nvPicPr>
-          <p:cNvPr id="34" name="Image 3" descr="preencoded.png">
-            <a:extLst>
-              <a:ext uri="{FF2B5EF4-FFF2-40B4-BE49-F238E27FC236}">
-                <a16:creationId xmlns:a16="http://schemas.microsoft.com/office/drawing/2014/main" id="{566EA9E5-7071-4574-3DBB-F8EA23D6E7A3}"/>
-              </a:ext>
-            </a:extLst>
-          </p:cNvPr>
-          <p:cNvPicPr>
-            <a:picLocks noChangeAspect="1"/>
-          </p:cNvPicPr>
-          <p:nvPr/>
-        </p:nvPicPr>
-        <p:blipFill>
-          <a:blip r:embed="rId7"/>
-          <a:stretch>
-            <a:fillRect/>
-          </a:stretch>
-        </p:blipFill>
-        <p:spPr>
-          <a:xfrm>
-            <a:off x="502920" y="3931920"/>
-            <a:ext cx="384048" cy="384048"/>
-          </a:xfrm>
-          <a:prstGeom prst="rect">
-            <a:avLst/>
-          </a:prstGeom>
-        </p:spPr>
-      </p:pic>
-      <p:sp>
-        <p:nvSpPr>
-          <p:cNvPr id="35" name="Text 12">
-            <a:extLst>
-              <a:ext uri="{FF2B5EF4-FFF2-40B4-BE49-F238E27FC236}">
-                <a16:creationId xmlns:a16="http://schemas.microsoft.com/office/drawing/2014/main" id="{4534E4C9-CC46-09B5-4464-64E6253EC26B}"/>
-              </a:ext>
-            </a:extLst>
-          </p:cNvPr>
-          <p:cNvSpPr/>
-          <p:nvPr/>
-        </p:nvSpPr>
-        <p:spPr>
-          <a:xfrm>
-            <a:off x="1005840" y="3877056"/>
-            <a:ext cx="4480560" cy="256032"/>
-          </a:xfrm>
-          <a:prstGeom prst="rect">
-            <a:avLst/>
-          </a:prstGeom>
-          <a:noFill/>
-          <a:ln/>
-        </p:spPr>
-        <p:txBody>
-          <a:bodyPr wrap="square" lIns="0" tIns="0" rIns="0" bIns="0" rtlCol="0" anchor="ctr"/>
-          <a:lstStyle/>
-          <a:p>
-            <a:pPr marL="0" indent="0">
-              <a:buNone/>
-            </a:pPr>
-            <a:r>
-              <a:rPr lang="en-US" sz="850" b="1" dirty="0">
-                <a:solidFill>
-                  <a:schemeClr val="bg1"/>
-                </a:solidFill>
-                <a:latin typeface="Calibri" pitchFamily="34" charset="0"/>
-                <a:ea typeface="Calibri" pitchFamily="34" charset="-122"/>
-                <a:cs typeface="Calibri" pitchFamily="34" charset="-120"/>
-              </a:rPr>
-              <a:t>CHALLENGE</a:t>
-            </a:r>
-            <a:endParaRPr lang="en-US" sz="850" dirty="0">
-              <a:solidFill>
-                <a:schemeClr val="bg1"/>
-              </a:solidFill>
-            </a:endParaRPr>
-          </a:p>
-        </p:txBody>
-      </p:sp>
-      <p:sp>
-        <p:nvSpPr>
-          <p:cNvPr id="36" name="Text 13">
-            <a:extLst>
-              <a:ext uri="{FF2B5EF4-FFF2-40B4-BE49-F238E27FC236}">
-                <a16:creationId xmlns:a16="http://schemas.microsoft.com/office/drawing/2014/main" id="{9B7FDFA8-F821-7078-E6FC-2F377F12ECB5}"/>
-              </a:ext>
-            </a:extLst>
-          </p:cNvPr>
-          <p:cNvSpPr/>
-          <p:nvPr/>
-        </p:nvSpPr>
-        <p:spPr>
-          <a:xfrm>
-            <a:off x="1005840" y="4133088"/>
-            <a:ext cx="4480560" cy="292608"/>
-          </a:xfrm>
-          <a:prstGeom prst="rect">
-            <a:avLst/>
-          </a:prstGeom>
-          <a:noFill/>
-          <a:ln/>
-        </p:spPr>
-        <p:txBody>
-          <a:bodyPr wrap="square" lIns="0" tIns="0" rIns="0" bIns="0" rtlCol="0" anchor="ctr"/>
-          <a:lstStyle/>
-          <a:p>
-            <a:pPr marL="0" indent="0">
-              <a:buNone/>
-            </a:pPr>
-            <a:r>
-              <a:rPr lang="en-US" sz="1300" dirty="0">
-                <a:solidFill>
-                  <a:schemeClr val="bg1"/>
-                </a:solidFill>
-                <a:latin typeface="Calibri" pitchFamily="34" charset="0"/>
-                <a:ea typeface="Calibri" pitchFamily="34" charset="-122"/>
-                <a:cs typeface="Calibri" pitchFamily="34" charset="-120"/>
-              </a:rPr>
-              <a:t>Rapid growth → need for efficient talent acquisition</a:t>
-            </a:r>
-            <a:endParaRPr lang="en-US" sz="1300" dirty="0">
-              <a:solidFill>
-                <a:schemeClr val="bg1"/>
-              </a:solidFill>
-            </a:endParaRPr>
-          </a:p>
-        </p:txBody>
-      </p:sp>
-      <p:sp>
-        <p:nvSpPr>
-          <p:cNvPr id="37" name="Shape 14">
-            <a:extLst>
-              <a:ext uri="{FF2B5EF4-FFF2-40B4-BE49-F238E27FC236}">
-                <a16:creationId xmlns:a16="http://schemas.microsoft.com/office/drawing/2014/main" id="{03AB48C5-777B-0E69-E907-5DF03040BA66}"/>
-              </a:ext>
-            </a:extLst>
-          </p:cNvPr>
-          <p:cNvSpPr/>
-          <p:nvPr/>
-        </p:nvSpPr>
-        <p:spPr>
-          <a:xfrm>
-            <a:off x="5943600" y="1097280"/>
-            <a:ext cx="2834640" cy="3566160"/>
-          </a:xfrm>
-          <a:prstGeom prst="rect">
-            <a:avLst/>
-          </a:prstGeom>
-          <a:solidFill>
-            <a:srgbClr val="1B2A4A"/>
-          </a:solidFill>
-          <a:ln w="12700">
-            <a:solidFill>
-              <a:srgbClr val="1B2A4A"/>
-            </a:solidFill>
-            <a:prstDash val="solid"/>
-          </a:ln>
-          <a:effectLst>
-            <a:outerShdw blurRad="101600" dist="25400" dir="8100000" algn="bl" rotWithShape="0">
-              <a:srgbClr val="000000">
-                <a:alpha val="15000"/>
-              </a:srgbClr>
-            </a:outerShdw>
-          </a:effectLst>
-        </p:spPr>
-        <p:txBody>
-          <a:bodyPr/>
-          <a:lstStyle/>
-          <a:p>
-            <a:endParaRPr lang="en-GB"/>
-          </a:p>
-        </p:txBody>
-      </p:sp>
-      <p:sp>
-        <p:nvSpPr>
-          <p:cNvPr id="38" name="Text 15">
-            <a:extLst>
-              <a:ext uri="{FF2B5EF4-FFF2-40B4-BE49-F238E27FC236}">
-                <a16:creationId xmlns:a16="http://schemas.microsoft.com/office/drawing/2014/main" id="{9DD3B00E-14A5-7FE9-3D95-C5744B26B674}"/>
-              </a:ext>
-            </a:extLst>
-          </p:cNvPr>
-          <p:cNvSpPr/>
-          <p:nvPr/>
-        </p:nvSpPr>
-        <p:spPr>
-          <a:xfrm>
-            <a:off x="5943600" y="1143000"/>
-            <a:ext cx="2834640" cy="457200"/>
-          </a:xfrm>
-          <a:prstGeom prst="rect">
-            <a:avLst/>
-          </a:prstGeom>
-          <a:noFill/>
-          <a:ln/>
-        </p:spPr>
-        <p:txBody>
-          <a:bodyPr wrap="square" lIns="0" tIns="0" rIns="0" bIns="0" rtlCol="0" anchor="ctr"/>
-          <a:lstStyle/>
-          <a:p>
-            <a:pPr marL="0" indent="0" algn="ctr">
-              <a:buNone/>
-            </a:pPr>
-            <a:r>
-              <a:rPr lang="en-US" sz="1100" b="1" dirty="0">
-                <a:solidFill>
-                  <a:srgbClr val="FFC000"/>
-                </a:solidFill>
-                <a:latin typeface="Calibri" pitchFamily="34" charset="0"/>
-                <a:ea typeface="Calibri" pitchFamily="34" charset="-122"/>
-                <a:cs typeface="Calibri" pitchFamily="34" charset="-120"/>
-              </a:rPr>
-              <a:t>OPEN POSITIONS</a:t>
+              <a:t>Contract &amp; Onboarding</a:t>
             </a:r>
             <a:endParaRPr lang="en-US" sz="1100" dirty="0">
               <a:solidFill>
-                <a:srgbClr val="FFC000"/>
+                <a:srgbClr val="C0994B"/>
               </a:solidFill>
-            </a:endParaRPr>
-          </a:p>
-        </p:txBody>
-      </p:sp>
-      <p:sp>
-        <p:nvSpPr>
-          <p:cNvPr id="39" name="Shape 16">
-            <a:extLst>
-              <a:ext uri="{FF2B5EF4-FFF2-40B4-BE49-F238E27FC236}">
-                <a16:creationId xmlns:a16="http://schemas.microsoft.com/office/drawing/2014/main" id="{1B3B1302-4C19-A62D-40A3-2F80A6A18FE6}"/>
-              </a:ext>
-            </a:extLst>
-          </p:cNvPr>
-          <p:cNvSpPr/>
-          <p:nvPr/>
-        </p:nvSpPr>
-        <p:spPr>
-          <a:xfrm>
-            <a:off x="6080760" y="1737360"/>
-            <a:ext cx="2560320" cy="804672"/>
-          </a:xfrm>
-          <a:prstGeom prst="rect">
-            <a:avLst/>
-          </a:prstGeom>
-          <a:solidFill>
-            <a:srgbClr val="243654"/>
-          </a:solidFill>
-          <a:ln w="12700">
-            <a:solidFill>
-              <a:srgbClr val="243654"/>
-            </a:solidFill>
-            <a:prstDash val="solid"/>
-          </a:ln>
-        </p:spPr>
-        <p:txBody>
-          <a:bodyPr/>
-          <a:lstStyle/>
-          <a:p>
-            <a:endParaRPr lang="en-GB"/>
-          </a:p>
-        </p:txBody>
-      </p:sp>
-      <p:sp>
-        <p:nvSpPr>
-          <p:cNvPr id="40" name="Text 17">
-            <a:extLst>
-              <a:ext uri="{FF2B5EF4-FFF2-40B4-BE49-F238E27FC236}">
-                <a16:creationId xmlns:a16="http://schemas.microsoft.com/office/drawing/2014/main" id="{BF8C539C-5E89-09C4-D56E-CC4ACB6B5DDF}"/>
-              </a:ext>
-            </a:extLst>
-          </p:cNvPr>
-          <p:cNvSpPr/>
-          <p:nvPr/>
-        </p:nvSpPr>
-        <p:spPr>
-          <a:xfrm>
-            <a:off x="6080760" y="1792224"/>
-            <a:ext cx="2560320" cy="347472"/>
-          </a:xfrm>
-          <a:prstGeom prst="rect">
-            <a:avLst/>
-          </a:prstGeom>
-          <a:noFill/>
-          <a:ln/>
-        </p:spPr>
-        <p:txBody>
-          <a:bodyPr wrap="square" lIns="0" tIns="0" rIns="0" bIns="0" rtlCol="0" anchor="ctr"/>
-          <a:lstStyle/>
-          <a:p>
-            <a:pPr marL="0" indent="0" algn="ctr">
-              <a:buNone/>
-            </a:pPr>
-            <a:r>
-              <a:rPr lang="en-US" sz="1300" b="1" dirty="0">
-                <a:solidFill>
-                  <a:srgbClr val="FFFFFF"/>
-                </a:solidFill>
-                <a:latin typeface="Calibri" pitchFamily="34" charset="0"/>
-                <a:ea typeface="Calibri" pitchFamily="34" charset="-122"/>
-                <a:cs typeface="Calibri" pitchFamily="34" charset="-120"/>
-              </a:rPr>
-              <a:t>Software Engineer</a:t>
-            </a:r>
-            <a:endParaRPr lang="en-US" sz="1300" dirty="0"/>
-          </a:p>
-        </p:txBody>
-      </p:sp>
-      <p:sp>
-        <p:nvSpPr>
-          <p:cNvPr id="41" name="Text 18">
-            <a:extLst>
-              <a:ext uri="{FF2B5EF4-FFF2-40B4-BE49-F238E27FC236}">
-                <a16:creationId xmlns:a16="http://schemas.microsoft.com/office/drawing/2014/main" id="{C7F88B8E-346A-97D4-6A7E-1E6E10EF9802}"/>
-              </a:ext>
-            </a:extLst>
-          </p:cNvPr>
-          <p:cNvSpPr/>
-          <p:nvPr/>
-        </p:nvSpPr>
-        <p:spPr>
-          <a:xfrm>
-            <a:off x="6080760" y="2157984"/>
-            <a:ext cx="2560320" cy="256032"/>
-          </a:xfrm>
-          <a:prstGeom prst="rect">
-            <a:avLst/>
-          </a:prstGeom>
-          <a:noFill/>
-          <a:ln/>
-        </p:spPr>
-        <p:txBody>
-          <a:bodyPr wrap="square" lIns="0" tIns="0" rIns="0" bIns="0" rtlCol="0" anchor="ctr"/>
-          <a:lstStyle/>
-          <a:p>
-            <a:pPr marL="0" indent="0" algn="ctr">
-              <a:buNone/>
-            </a:pPr>
-            <a:r>
-              <a:rPr lang="en-US" sz="1000" dirty="0">
-                <a:solidFill>
-                  <a:srgbClr val="FFC000"/>
-                </a:solidFill>
-                <a:latin typeface="Calibri" pitchFamily="34" charset="0"/>
-                <a:ea typeface="Calibri" pitchFamily="34" charset="-122"/>
-                <a:cs typeface="Calibri" pitchFamily="34" charset="-120"/>
-              </a:rPr>
-              <a:t>Technology</a:t>
-            </a:r>
-            <a:endParaRPr lang="en-US" sz="1000" dirty="0">
-              <a:solidFill>
-                <a:srgbClr val="FFC000"/>
-              </a:solidFill>
-            </a:endParaRPr>
-          </a:p>
-        </p:txBody>
-      </p:sp>
-      <p:sp>
-        <p:nvSpPr>
-          <p:cNvPr id="42" name="Shape 19">
-            <a:extLst>
-              <a:ext uri="{FF2B5EF4-FFF2-40B4-BE49-F238E27FC236}">
-                <a16:creationId xmlns:a16="http://schemas.microsoft.com/office/drawing/2014/main" id="{9B9A726C-329D-BBC7-B755-3074A217B46B}"/>
-              </a:ext>
-            </a:extLst>
-          </p:cNvPr>
-          <p:cNvSpPr/>
-          <p:nvPr/>
-        </p:nvSpPr>
-        <p:spPr>
-          <a:xfrm>
-            <a:off x="6080760" y="2743200"/>
-            <a:ext cx="2560320" cy="804672"/>
-          </a:xfrm>
-          <a:prstGeom prst="rect">
-            <a:avLst/>
-          </a:prstGeom>
-          <a:solidFill>
-            <a:srgbClr val="243654"/>
-          </a:solidFill>
-          <a:ln w="12700">
-            <a:solidFill>
-              <a:srgbClr val="243654"/>
-            </a:solidFill>
-            <a:prstDash val="solid"/>
-          </a:ln>
-        </p:spPr>
-        <p:txBody>
-          <a:bodyPr/>
-          <a:lstStyle/>
-          <a:p>
-            <a:endParaRPr lang="en-GB"/>
-          </a:p>
-        </p:txBody>
-      </p:sp>
-      <p:sp>
-        <p:nvSpPr>
-          <p:cNvPr id="43" name="Text 20">
-            <a:extLst>
-              <a:ext uri="{FF2B5EF4-FFF2-40B4-BE49-F238E27FC236}">
-                <a16:creationId xmlns:a16="http://schemas.microsoft.com/office/drawing/2014/main" id="{B1897DCC-175A-FCD5-74CD-2C24A2C30BCE}"/>
-              </a:ext>
-            </a:extLst>
-          </p:cNvPr>
-          <p:cNvSpPr/>
-          <p:nvPr/>
-        </p:nvSpPr>
-        <p:spPr>
-          <a:xfrm>
-            <a:off x="6080760" y="2798064"/>
-            <a:ext cx="2560320" cy="347472"/>
-          </a:xfrm>
-          <a:prstGeom prst="rect">
-            <a:avLst/>
-          </a:prstGeom>
-          <a:noFill/>
-          <a:ln/>
-        </p:spPr>
-        <p:txBody>
-          <a:bodyPr wrap="square" lIns="0" tIns="0" rIns="0" bIns="0" rtlCol="0" anchor="ctr"/>
-          <a:lstStyle/>
-          <a:p>
-            <a:pPr marL="0" indent="0" algn="ctr">
-              <a:buNone/>
-            </a:pPr>
-            <a:r>
-              <a:rPr lang="en-US" sz="1300" b="1" dirty="0">
-                <a:solidFill>
-                  <a:srgbClr val="FFFFFF"/>
-                </a:solidFill>
-                <a:latin typeface="Calibri" pitchFamily="34" charset="0"/>
-                <a:ea typeface="Calibri" pitchFamily="34" charset="-122"/>
-                <a:cs typeface="Calibri" pitchFamily="34" charset="-120"/>
-              </a:rPr>
-              <a:t>Business Analyst</a:t>
-            </a:r>
-            <a:endParaRPr lang="en-US" sz="1300" dirty="0"/>
-          </a:p>
-        </p:txBody>
-      </p:sp>
-      <p:sp>
-        <p:nvSpPr>
-          <p:cNvPr id="44" name="Text 21">
-            <a:extLst>
-              <a:ext uri="{FF2B5EF4-FFF2-40B4-BE49-F238E27FC236}">
-                <a16:creationId xmlns:a16="http://schemas.microsoft.com/office/drawing/2014/main" id="{73428222-A278-82A1-AC4D-3FF07E13B178}"/>
-              </a:ext>
-            </a:extLst>
-          </p:cNvPr>
-          <p:cNvSpPr/>
-          <p:nvPr/>
-        </p:nvSpPr>
-        <p:spPr>
-          <a:xfrm>
-            <a:off x="6080760" y="3163824"/>
-            <a:ext cx="2560320" cy="256032"/>
-          </a:xfrm>
-          <a:prstGeom prst="rect">
-            <a:avLst/>
-          </a:prstGeom>
-          <a:noFill/>
-          <a:ln/>
-        </p:spPr>
-        <p:txBody>
-          <a:bodyPr wrap="square" lIns="0" tIns="0" rIns="0" bIns="0" rtlCol="0" anchor="ctr"/>
-          <a:lstStyle/>
-          <a:p>
-            <a:pPr marL="0" indent="0" algn="ctr">
-              <a:buNone/>
-            </a:pPr>
-            <a:r>
-              <a:rPr lang="en-US" sz="1000" dirty="0">
-                <a:solidFill>
-                  <a:srgbClr val="FFC000"/>
-                </a:solidFill>
-                <a:latin typeface="Calibri" pitchFamily="34" charset="0"/>
-                <a:ea typeface="Calibri" pitchFamily="34" charset="-122"/>
-                <a:cs typeface="Calibri" pitchFamily="34" charset="-120"/>
-              </a:rPr>
-              <a:t>Consulting</a:t>
-            </a:r>
-            <a:endParaRPr lang="en-US" sz="1000" dirty="0">
-              <a:solidFill>
-                <a:srgbClr val="FFC000"/>
-              </a:solidFill>
-            </a:endParaRPr>
-          </a:p>
-        </p:txBody>
-      </p:sp>
-      <p:sp>
-        <p:nvSpPr>
-          <p:cNvPr id="45" name="Shape 22">
-            <a:extLst>
-              <a:ext uri="{FF2B5EF4-FFF2-40B4-BE49-F238E27FC236}">
-                <a16:creationId xmlns:a16="http://schemas.microsoft.com/office/drawing/2014/main" id="{CBB695BD-343B-3F7C-5C21-342242F78DC7}"/>
-              </a:ext>
-            </a:extLst>
-          </p:cNvPr>
-          <p:cNvSpPr/>
-          <p:nvPr/>
-        </p:nvSpPr>
-        <p:spPr>
-          <a:xfrm>
-            <a:off x="6080760" y="3749040"/>
-            <a:ext cx="2560320" cy="804672"/>
-          </a:xfrm>
-          <a:prstGeom prst="rect">
-            <a:avLst/>
-          </a:prstGeom>
-          <a:solidFill>
-            <a:srgbClr val="243654"/>
-          </a:solidFill>
-          <a:ln w="12700">
-            <a:solidFill>
-              <a:srgbClr val="243654"/>
-            </a:solidFill>
-            <a:prstDash val="solid"/>
-          </a:ln>
-        </p:spPr>
-        <p:txBody>
-          <a:bodyPr/>
-          <a:lstStyle/>
-          <a:p>
-            <a:endParaRPr lang="en-GB"/>
-          </a:p>
-        </p:txBody>
-      </p:sp>
-      <p:sp>
-        <p:nvSpPr>
-          <p:cNvPr id="46" name="Text 23">
-            <a:extLst>
-              <a:ext uri="{FF2B5EF4-FFF2-40B4-BE49-F238E27FC236}">
-                <a16:creationId xmlns:a16="http://schemas.microsoft.com/office/drawing/2014/main" id="{5D4DF470-E653-819B-700C-F953270A5B52}"/>
-              </a:ext>
-            </a:extLst>
-          </p:cNvPr>
-          <p:cNvSpPr/>
-          <p:nvPr/>
-        </p:nvSpPr>
-        <p:spPr>
-          <a:xfrm>
-            <a:off x="6080760" y="3803904"/>
-            <a:ext cx="2560320" cy="347472"/>
-          </a:xfrm>
-          <a:prstGeom prst="rect">
-            <a:avLst/>
-          </a:prstGeom>
-          <a:noFill/>
-          <a:ln/>
-        </p:spPr>
-        <p:txBody>
-          <a:bodyPr wrap="square" lIns="0" tIns="0" rIns="0" bIns="0" rtlCol="0" anchor="ctr"/>
-          <a:lstStyle/>
-          <a:p>
-            <a:pPr marL="0" indent="0" algn="ctr">
-              <a:buNone/>
-            </a:pPr>
-            <a:r>
-              <a:rPr lang="en-US" sz="1300" b="1" dirty="0">
-                <a:solidFill>
-                  <a:srgbClr val="FFFFFF"/>
-                </a:solidFill>
-                <a:latin typeface="Calibri" pitchFamily="34" charset="0"/>
-                <a:ea typeface="Calibri" pitchFamily="34" charset="-122"/>
-                <a:cs typeface="Calibri" pitchFamily="34" charset="-120"/>
-              </a:rPr>
-              <a:t>ERP Consultant</a:t>
-            </a:r>
-            <a:endParaRPr lang="en-US" sz="1300" dirty="0"/>
-          </a:p>
-        </p:txBody>
-      </p:sp>
-      <p:sp>
-        <p:nvSpPr>
-          <p:cNvPr id="47" name="Text 24">
-            <a:extLst>
-              <a:ext uri="{FF2B5EF4-FFF2-40B4-BE49-F238E27FC236}">
-                <a16:creationId xmlns:a16="http://schemas.microsoft.com/office/drawing/2014/main" id="{69B5874E-F305-F19D-2835-F2605BC23569}"/>
-              </a:ext>
-            </a:extLst>
-          </p:cNvPr>
-          <p:cNvSpPr/>
-          <p:nvPr/>
-        </p:nvSpPr>
-        <p:spPr>
-          <a:xfrm>
-            <a:off x="6080760" y="4169664"/>
-            <a:ext cx="2560320" cy="256032"/>
-          </a:xfrm>
-          <a:prstGeom prst="rect">
-            <a:avLst/>
-          </a:prstGeom>
-          <a:noFill/>
-          <a:ln/>
-        </p:spPr>
-        <p:txBody>
-          <a:bodyPr wrap="square" lIns="0" tIns="0" rIns="0" bIns="0" rtlCol="0" anchor="ctr"/>
-          <a:lstStyle/>
-          <a:p>
-            <a:pPr marL="0" indent="0" algn="ctr">
-              <a:buNone/>
-            </a:pPr>
-            <a:r>
-              <a:rPr lang="en-US" sz="1000" dirty="0">
-                <a:solidFill>
-                  <a:srgbClr val="FFC000"/>
-                </a:solidFill>
-                <a:latin typeface="Calibri" pitchFamily="34" charset="0"/>
-                <a:ea typeface="Calibri" pitchFamily="34" charset="-122"/>
-                <a:cs typeface="Calibri" pitchFamily="34" charset="-120"/>
-              </a:rPr>
-              <a:t>Enterprise Solutions</a:t>
-            </a:r>
-            <a:endParaRPr lang="en-US" sz="1000" dirty="0">
-              <a:solidFill>
-                <a:srgbClr val="FFC000"/>
-              </a:solidFill>
-            </a:endParaRPr>
-          </a:p>
-        </p:txBody>
-      </p:sp>
-      <p:pic>
-        <p:nvPicPr>
-          <p:cNvPr id="48" name="Image 0" descr="preencoded.png">
-            <a:extLst>
-              <a:ext uri="{FF2B5EF4-FFF2-40B4-BE49-F238E27FC236}">
-                <a16:creationId xmlns:a16="http://schemas.microsoft.com/office/drawing/2014/main" id="{87251321-E673-74CF-EA29-9E7DE77F8381}"/>
-              </a:ext>
-            </a:extLst>
-          </p:cNvPr>
-          <p:cNvPicPr>
-            <a:picLocks noChangeAspect="1"/>
-          </p:cNvPicPr>
-          <p:nvPr/>
-        </p:nvPicPr>
-        <p:blipFill>
-          <a:blip r:embed="rId8">
-            <a:duotone>
-              <a:schemeClr val="accent4">
-                <a:shade val="45000"/>
-                <a:satMod val="135000"/>
-              </a:schemeClr>
-              <a:prstClr val="white"/>
-            </a:duotone>
-            <a:extLst>
-              <a:ext uri="{BEBA8EAE-BF5A-486C-A8C5-ECC9F3942E4B}">
-                <a14:imgProps xmlns:a14="http://schemas.microsoft.com/office/drawing/2010/main">
-                  <a14:imgLayer r:embed="rId9">
-                    <a14:imgEffect>
-                      <a14:brightnessContrast bright="-40000" contrast="40000"/>
-                    </a14:imgEffect>
-                  </a14:imgLayer>
-                </a14:imgProps>
-              </a:ext>
-            </a:extLst>
-          </a:blip>
-          <a:stretch>
-            <a:fillRect/>
-          </a:stretch>
-        </p:blipFill>
-        <p:spPr>
-          <a:xfrm>
-            <a:off x="502920" y="1243584"/>
-            <a:ext cx="384048" cy="384048"/>
-          </a:xfrm>
-          <a:prstGeom prst="rect">
-            <a:avLst/>
-          </a:prstGeom>
-        </p:spPr>
-      </p:pic>
+              <a:latin typeface="Aptos" panose="020B0004020202020204" pitchFamily="34" charset="0"/>
+            </a:endParaRPr>
+          </a:p>
+        </p:txBody>
+      </p:sp>
     </p:spTree>
-    <p:extLst>
-      <p:ext uri="{BB962C8B-B14F-4D97-AF65-F5344CB8AC3E}">
-        <p14:creationId xmlns:p14="http://schemas.microsoft.com/office/powerpoint/2010/main" val="847918614"/>
-      </p:ext>
-    </p:extLst>
   </p:cSld>
   <p:clrMapOvr>
     <a:masterClrMapping/>
@@ -3098,9 +4201,17 @@
 </p:sld>
 </file>
 
-<file path=ppt/slides/slide3.xml><?xml version="1.0" encoding="utf-8"?>
+<file path=ppt/slides/slide5.xml><?xml version="1.0" encoding="utf-8"?>
 <p:sld xmlns:a="http://schemas.openxmlformats.org/drawingml/2006/main" xmlns:r="http://schemas.openxmlformats.org/officeDocument/2006/relationships" xmlns:p="http://schemas.openxmlformats.org/presentationml/2006/main">
-  <p:cSld name="Slide 2">
+  <p:cSld>
+    <p:bg>
+      <p:bgPr>
+        <a:solidFill>
+          <a:srgbClr val="1A2A42"/>
+        </a:solidFill>
+        <a:effectLst/>
+      </p:bgPr>
+    </p:bg>
     <p:spTree>
       <p:nvGrpSpPr>
         <p:cNvPr id="1" name=""/>
@@ -3117,14 +4228,14 @@
       </p:grpSpPr>
       <p:sp>
         <p:nvSpPr>
-          <p:cNvPr id="5" name="Text 3"/>
-          <p:cNvSpPr/>
-          <p:nvPr/>
-        </p:nvSpPr>
-        <p:spPr>
-          <a:xfrm>
-            <a:off x="228600" y="365760"/>
-            <a:ext cx="8686800" cy="594360"/>
+          <p:cNvPr id="3" name="Text 1"/>
+          <p:cNvSpPr/>
+          <p:nvPr/>
+        </p:nvSpPr>
+        <p:spPr>
+          <a:xfrm>
+            <a:off x="365760" y="0"/>
+            <a:ext cx="8412480" cy="914400"/>
           </a:xfrm>
           <a:prstGeom prst="rect">
             <a:avLst/>
@@ -3140,1185 +4251,11 @@
               <a:buNone/>
             </a:pPr>
             <a:r>
-              <a:rPr lang="en-US" sz="3000" b="1" dirty="0">
-                <a:solidFill>
-                  <a:srgbClr val="FFC000"/>
-                </a:solidFill>
-              </a:rPr>
-              <a:t>AS-IS Challenges</a:t>
-            </a:r>
-            <a:endParaRPr lang="en-US" sz="3000" dirty="0">
-              <a:solidFill>
-                <a:srgbClr val="FFC000"/>
-              </a:solidFill>
-            </a:endParaRPr>
-          </a:p>
-        </p:txBody>
-      </p:sp>
-      <p:sp>
-        <p:nvSpPr>
-          <p:cNvPr id="6" name="Shape 4"/>
-          <p:cNvSpPr/>
-          <p:nvPr/>
-        </p:nvSpPr>
-        <p:spPr>
-          <a:xfrm>
-            <a:off x="228600" y="1417320"/>
-            <a:ext cx="4206240" cy="914400"/>
-          </a:xfrm>
-          <a:prstGeom prst="rect">
-            <a:avLst/>
-          </a:prstGeom>
-          <a:solidFill>
-            <a:schemeClr val="accent1">
-              <a:lumMod val="75000"/>
-            </a:schemeClr>
-          </a:solidFill>
-          <a:ln w="12700">
-            <a:noFill/>
-            <a:prstDash val="solid"/>
-          </a:ln>
-          <a:effectLst>
-            <a:outerShdw blurRad="50800" dist="12700" dir="8100000" algn="bl" rotWithShape="0">
-              <a:srgbClr val="000000">
-                <a:alpha val="8000"/>
-              </a:srgbClr>
-            </a:outerShdw>
-          </a:effectLst>
-        </p:spPr>
-        <p:txBody>
-          <a:bodyPr/>
-          <a:lstStyle/>
-          <a:p>
-            <a:endParaRPr lang="en-GB"/>
-          </a:p>
-        </p:txBody>
-      </p:sp>
-      <p:sp>
-        <p:nvSpPr>
-          <p:cNvPr id="7" name="Text 5"/>
-          <p:cNvSpPr/>
-          <p:nvPr/>
-        </p:nvSpPr>
-        <p:spPr>
-          <a:xfrm>
-            <a:off x="365760" y="1481328"/>
-            <a:ext cx="3931920" cy="320040"/>
-          </a:xfrm>
-          <a:prstGeom prst="rect">
-            <a:avLst/>
-          </a:prstGeom>
-          <a:noFill/>
-          <a:ln/>
-        </p:spPr>
-        <p:txBody>
-          <a:bodyPr wrap="square" lIns="0" tIns="0" rIns="0" bIns="0" rtlCol="0" anchor="ctr"/>
-          <a:lstStyle/>
-          <a:p>
-            <a:pPr marL="0" indent="0" algn="l">
-              <a:buNone/>
-            </a:pPr>
-            <a:r>
-              <a:rPr lang="en-US" sz="1300" b="1" dirty="0">
-                <a:solidFill>
-                  <a:srgbClr val="FFC000"/>
-                </a:solidFill>
-              </a:rPr>
-              <a:t>Manual Application Handling</a:t>
-            </a:r>
-          </a:p>
-        </p:txBody>
-      </p:sp>
-      <p:sp>
-        <p:nvSpPr>
-          <p:cNvPr id="8" name="Text 6"/>
-          <p:cNvSpPr/>
-          <p:nvPr/>
-        </p:nvSpPr>
-        <p:spPr>
-          <a:xfrm>
-            <a:off x="365760" y="1801368"/>
-            <a:ext cx="3931920" cy="411480"/>
-          </a:xfrm>
-          <a:prstGeom prst="rect">
-            <a:avLst/>
-          </a:prstGeom>
-          <a:noFill/>
-          <a:ln/>
-        </p:spPr>
-        <p:txBody>
-          <a:bodyPr wrap="square" lIns="0" tIns="0" rIns="0" bIns="0" rtlCol="0" anchor="ctr"/>
-          <a:lstStyle/>
-          <a:p>
-            <a:pPr marL="0" indent="0" algn="l">
-              <a:buNone/>
-            </a:pPr>
-            <a:r>
-              <a:rPr lang="en-US" sz="1100" dirty="0">
-                <a:solidFill>
-                  <a:schemeClr val="bg1"/>
-                </a:solidFill>
-              </a:rPr>
-              <a:t>HR manually monitors web portal &amp; transfers data by hand, slow, and error-prone at scale</a:t>
-            </a:r>
-          </a:p>
-        </p:txBody>
-      </p:sp>
-      <p:sp>
-        <p:nvSpPr>
-          <p:cNvPr id="9" name="Shape 7"/>
-          <p:cNvSpPr/>
-          <p:nvPr/>
-        </p:nvSpPr>
-        <p:spPr>
-          <a:xfrm>
-            <a:off x="4663440" y="1417320"/>
-            <a:ext cx="4206240" cy="914400"/>
-          </a:xfrm>
-          <a:prstGeom prst="rect">
-            <a:avLst/>
-          </a:prstGeom>
-          <a:solidFill>
-            <a:schemeClr val="accent1">
-              <a:lumMod val="75000"/>
-            </a:schemeClr>
-          </a:solidFill>
-          <a:ln w="12700">
-            <a:noFill/>
-            <a:prstDash val="solid"/>
-          </a:ln>
-          <a:effectLst>
-            <a:outerShdw blurRad="50800" dist="12700" dir="8100000" algn="bl" rotWithShape="0">
-              <a:srgbClr val="000000">
-                <a:alpha val="8000"/>
-              </a:srgbClr>
-            </a:outerShdw>
-          </a:effectLst>
-        </p:spPr>
-        <p:txBody>
-          <a:bodyPr/>
-          <a:lstStyle/>
-          <a:p>
-            <a:endParaRPr lang="en-GB"/>
-          </a:p>
-        </p:txBody>
-      </p:sp>
-      <p:sp>
-        <p:nvSpPr>
-          <p:cNvPr id="10" name="Text 8"/>
-          <p:cNvSpPr/>
-          <p:nvPr/>
-        </p:nvSpPr>
-        <p:spPr>
-          <a:xfrm>
-            <a:off x="4800600" y="1481328"/>
-            <a:ext cx="3931920" cy="320040"/>
-          </a:xfrm>
-          <a:prstGeom prst="rect">
-            <a:avLst/>
-          </a:prstGeom>
-          <a:solidFill>
-            <a:schemeClr val="accent1">
-              <a:lumMod val="75000"/>
-            </a:schemeClr>
-          </a:solidFill>
-          <a:ln>
-            <a:noFill/>
-          </a:ln>
-        </p:spPr>
-        <p:txBody>
-          <a:bodyPr wrap="square" lIns="0" tIns="0" rIns="0" bIns="0" rtlCol="0" anchor="ctr"/>
-          <a:lstStyle/>
-          <a:p>
-            <a:pPr marL="0" indent="0" algn="l">
-              <a:buNone/>
-            </a:pPr>
-            <a:r>
-              <a:rPr lang="en-US" sz="1300" b="1" dirty="0">
-                <a:solidFill>
-                  <a:srgbClr val="FFC000"/>
-                </a:solidFill>
-              </a:rPr>
-              <a:t>Subjective CV Screening</a:t>
-            </a:r>
-          </a:p>
-        </p:txBody>
-      </p:sp>
-      <p:sp>
-        <p:nvSpPr>
-          <p:cNvPr id="11" name="Text 9"/>
-          <p:cNvSpPr/>
-          <p:nvPr/>
-        </p:nvSpPr>
-        <p:spPr>
-          <a:xfrm>
-            <a:off x="4800600" y="1801368"/>
-            <a:ext cx="3931920" cy="411480"/>
-          </a:xfrm>
-          <a:prstGeom prst="rect">
-            <a:avLst/>
-          </a:prstGeom>
-          <a:solidFill>
-            <a:schemeClr val="accent1">
-              <a:lumMod val="75000"/>
-            </a:schemeClr>
-          </a:solidFill>
-          <a:ln>
-            <a:noFill/>
-          </a:ln>
-        </p:spPr>
-        <p:txBody>
-          <a:bodyPr wrap="square" lIns="0" tIns="0" rIns="0" bIns="0" rtlCol="0" anchor="ctr"/>
-          <a:lstStyle/>
-          <a:p>
-            <a:pPr marL="0" indent="0" algn="l">
-              <a:buNone/>
-            </a:pPr>
-            <a:r>
-              <a:rPr lang="en-US" sz="1100" dirty="0">
-                <a:solidFill>
-                  <a:schemeClr val="bg1"/>
-                </a:solidFill>
-              </a:rPr>
-              <a:t>Invitations, cancellations, contracts. All written individually</a:t>
-            </a:r>
-          </a:p>
-        </p:txBody>
-      </p:sp>
-      <p:sp>
-        <p:nvSpPr>
-          <p:cNvPr id="12" name="Shape 10"/>
-          <p:cNvSpPr/>
-          <p:nvPr/>
-        </p:nvSpPr>
-        <p:spPr>
-          <a:xfrm>
-            <a:off x="228600" y="2514600"/>
-            <a:ext cx="4206240" cy="914400"/>
-          </a:xfrm>
-          <a:prstGeom prst="rect">
-            <a:avLst/>
-          </a:prstGeom>
-          <a:solidFill>
-            <a:schemeClr val="accent1">
-              <a:lumMod val="75000"/>
-            </a:schemeClr>
-          </a:solidFill>
-          <a:ln w="12700">
-            <a:noFill/>
-            <a:prstDash val="solid"/>
-          </a:ln>
-          <a:effectLst>
-            <a:outerShdw blurRad="50800" dist="12700" dir="8100000" algn="bl" rotWithShape="0">
-              <a:srgbClr val="000000">
-                <a:alpha val="8000"/>
-              </a:srgbClr>
-            </a:outerShdw>
-          </a:effectLst>
-        </p:spPr>
-        <p:txBody>
-          <a:bodyPr/>
-          <a:lstStyle/>
-          <a:p>
-            <a:endParaRPr lang="en-GB"/>
-          </a:p>
-        </p:txBody>
-      </p:sp>
-      <p:sp>
-        <p:nvSpPr>
-          <p:cNvPr id="13" name="Text 11"/>
-          <p:cNvSpPr/>
-          <p:nvPr/>
-        </p:nvSpPr>
-        <p:spPr>
-          <a:xfrm>
-            <a:off x="365760" y="2578608"/>
-            <a:ext cx="3931920" cy="320040"/>
-          </a:xfrm>
-          <a:prstGeom prst="rect">
-            <a:avLst/>
-          </a:prstGeom>
-          <a:solidFill>
-            <a:schemeClr val="accent1">
-              <a:lumMod val="75000"/>
-            </a:schemeClr>
-          </a:solidFill>
-          <a:ln>
-            <a:noFill/>
-          </a:ln>
-        </p:spPr>
-        <p:txBody>
-          <a:bodyPr wrap="square" lIns="0" tIns="0" rIns="0" bIns="0" rtlCol="0" anchor="ctr"/>
-          <a:lstStyle/>
-          <a:p>
-            <a:pPr marL="0" indent="0" algn="l">
-              <a:buNone/>
-            </a:pPr>
-            <a:r>
-              <a:rPr lang="en-US" sz="1300" b="1" dirty="0">
-                <a:solidFill>
-                  <a:srgbClr val="FFC000"/>
-                </a:solidFill>
-              </a:rPr>
-              <a:t>Manual Scheduling &amp; Communication</a:t>
-            </a:r>
-          </a:p>
-        </p:txBody>
-      </p:sp>
-      <p:sp>
-        <p:nvSpPr>
-          <p:cNvPr id="14" name="Text 12"/>
-          <p:cNvSpPr/>
-          <p:nvPr/>
-        </p:nvSpPr>
-        <p:spPr>
-          <a:xfrm>
-            <a:off x="365760" y="2898648"/>
-            <a:ext cx="3931920" cy="411480"/>
-          </a:xfrm>
-          <a:prstGeom prst="rect">
-            <a:avLst/>
-          </a:prstGeom>
-          <a:solidFill>
-            <a:schemeClr val="accent1">
-              <a:lumMod val="75000"/>
-            </a:schemeClr>
-          </a:solidFill>
-          <a:ln>
-            <a:noFill/>
-          </a:ln>
-        </p:spPr>
-        <p:txBody>
-          <a:bodyPr wrap="square" lIns="0" tIns="0" rIns="0" bIns="0" rtlCol="0" anchor="ctr"/>
-          <a:lstStyle/>
-          <a:p>
-            <a:pPr marL="0" indent="0" algn="l">
-              <a:buNone/>
-            </a:pPr>
-            <a:r>
-              <a:rPr lang="en-US" sz="1100" dirty="0">
-                <a:solidFill>
-                  <a:schemeClr val="bg1"/>
-                </a:solidFill>
-              </a:rPr>
-              <a:t>Interviews and assessments lack standardised evaluation criteria</a:t>
-            </a:r>
-          </a:p>
-        </p:txBody>
-      </p:sp>
-      <p:sp>
-        <p:nvSpPr>
-          <p:cNvPr id="15" name="Shape 13"/>
-          <p:cNvSpPr/>
-          <p:nvPr/>
-        </p:nvSpPr>
-        <p:spPr>
-          <a:xfrm>
-            <a:off x="4663440" y="2514600"/>
-            <a:ext cx="4206240" cy="914400"/>
-          </a:xfrm>
-          <a:prstGeom prst="rect">
-            <a:avLst/>
-          </a:prstGeom>
-          <a:solidFill>
-            <a:schemeClr val="accent1">
-              <a:lumMod val="75000"/>
-            </a:schemeClr>
-          </a:solidFill>
-          <a:ln w="12700">
-            <a:noFill/>
-            <a:prstDash val="solid"/>
-          </a:ln>
-          <a:effectLst>
-            <a:outerShdw blurRad="50800" dist="12700" dir="8100000" algn="bl" rotWithShape="0">
-              <a:srgbClr val="000000">
-                <a:alpha val="8000"/>
-              </a:srgbClr>
-            </a:outerShdw>
-          </a:effectLst>
-        </p:spPr>
-        <p:txBody>
-          <a:bodyPr/>
-          <a:lstStyle/>
-          <a:p>
-            <a:endParaRPr lang="en-GB"/>
-          </a:p>
-        </p:txBody>
-      </p:sp>
-      <p:sp>
-        <p:nvSpPr>
-          <p:cNvPr id="16" name="Text 14"/>
-          <p:cNvSpPr/>
-          <p:nvPr/>
-        </p:nvSpPr>
-        <p:spPr>
-          <a:xfrm>
-            <a:off x="4800600" y="2578608"/>
-            <a:ext cx="3931920" cy="320040"/>
-          </a:xfrm>
-          <a:prstGeom prst="rect">
-            <a:avLst/>
-          </a:prstGeom>
-          <a:solidFill>
-            <a:schemeClr val="accent1">
-              <a:lumMod val="75000"/>
-            </a:schemeClr>
-          </a:solidFill>
-          <a:ln>
-            <a:noFill/>
-          </a:ln>
-        </p:spPr>
-        <p:txBody>
-          <a:bodyPr wrap="square" lIns="0" tIns="0" rIns="0" bIns="0" rtlCol="0" anchor="ctr"/>
-          <a:lstStyle/>
-          <a:p>
-            <a:pPr marL="0" indent="0" algn="l">
-              <a:buNone/>
-            </a:pPr>
-            <a:r>
-              <a:rPr lang="en-US" sz="1300" b="1" dirty="0">
-                <a:solidFill>
-                  <a:srgbClr val="FFC000"/>
-                </a:solidFill>
-              </a:rPr>
-              <a:t>No Structured Evaluation</a:t>
-            </a:r>
-          </a:p>
-        </p:txBody>
-      </p:sp>
-      <p:sp>
-        <p:nvSpPr>
-          <p:cNvPr id="17" name="Text 15"/>
-          <p:cNvSpPr/>
-          <p:nvPr/>
-        </p:nvSpPr>
-        <p:spPr>
-          <a:xfrm>
-            <a:off x="4800600" y="2898648"/>
-            <a:ext cx="3931920" cy="411480"/>
-          </a:xfrm>
-          <a:prstGeom prst="rect">
-            <a:avLst/>
-          </a:prstGeom>
-          <a:solidFill>
-            <a:schemeClr val="accent1">
-              <a:lumMod val="75000"/>
-            </a:schemeClr>
-          </a:solidFill>
-          <a:ln>
-            <a:noFill/>
-          </a:ln>
-        </p:spPr>
-        <p:txBody>
-          <a:bodyPr wrap="square" lIns="0" tIns="0" rIns="0" bIns="0" rtlCol="0" anchor="ctr"/>
-          <a:lstStyle/>
-          <a:p>
-            <a:pPr marL="0" indent="0" algn="l">
-              <a:buNone/>
-            </a:pPr>
-            <a:r>
-              <a:rPr lang="en-US" sz="1100" dirty="0">
-                <a:solidFill>
-                  <a:schemeClr val="bg1"/>
-                </a:solidFill>
-              </a:rPr>
-              <a:t>IT access, Slack, tasks, coordinated manually every single time</a:t>
-            </a:r>
-          </a:p>
-        </p:txBody>
-      </p:sp>
-      <p:sp>
-        <p:nvSpPr>
-          <p:cNvPr id="18" name="Shape 16"/>
-          <p:cNvSpPr/>
-          <p:nvPr/>
-        </p:nvSpPr>
-        <p:spPr>
-          <a:xfrm>
-            <a:off x="228600" y="3611880"/>
-            <a:ext cx="4206240" cy="914400"/>
-          </a:xfrm>
-          <a:prstGeom prst="rect">
-            <a:avLst/>
-          </a:prstGeom>
-          <a:solidFill>
-            <a:schemeClr val="accent1">
-              <a:lumMod val="75000"/>
-            </a:schemeClr>
-          </a:solidFill>
-          <a:ln w="12700">
-            <a:noFill/>
-            <a:prstDash val="solid"/>
-          </a:ln>
-          <a:effectLst>
-            <a:outerShdw blurRad="50800" dist="12700" dir="8100000" algn="bl" rotWithShape="0">
-              <a:srgbClr val="000000">
-                <a:alpha val="8000"/>
-              </a:srgbClr>
-            </a:outerShdw>
-          </a:effectLst>
-        </p:spPr>
-        <p:txBody>
-          <a:bodyPr/>
-          <a:lstStyle/>
-          <a:p>
-            <a:endParaRPr lang="en-GB"/>
-          </a:p>
-        </p:txBody>
-      </p:sp>
-      <p:sp>
-        <p:nvSpPr>
-          <p:cNvPr id="19" name="Text 17"/>
-          <p:cNvSpPr/>
-          <p:nvPr/>
-        </p:nvSpPr>
-        <p:spPr>
-          <a:xfrm>
-            <a:off x="365760" y="3675888"/>
-            <a:ext cx="3931920" cy="320040"/>
-          </a:xfrm>
-          <a:prstGeom prst="rect">
-            <a:avLst/>
-          </a:prstGeom>
-          <a:solidFill>
-            <a:schemeClr val="accent1">
-              <a:lumMod val="75000"/>
-            </a:schemeClr>
-          </a:solidFill>
-          <a:ln>
-            <a:noFill/>
-          </a:ln>
-        </p:spPr>
-        <p:txBody>
-          <a:bodyPr wrap="square" lIns="0" tIns="0" rIns="0" bIns="0" rtlCol="0" anchor="ctr"/>
-          <a:lstStyle/>
-          <a:p>
-            <a:pPr marL="0" indent="0" algn="l">
-              <a:buNone/>
-            </a:pPr>
-            <a:r>
-              <a:rPr lang="en-US" sz="1300" b="1" dirty="0">
-                <a:solidFill>
-                  <a:srgbClr val="FFC000"/>
-                </a:solidFill>
-              </a:rPr>
-              <a:t>Manual Contract Creation</a:t>
-            </a:r>
-          </a:p>
-        </p:txBody>
-      </p:sp>
-      <p:sp>
-        <p:nvSpPr>
-          <p:cNvPr id="20" name="Text 18"/>
-          <p:cNvSpPr/>
-          <p:nvPr/>
-        </p:nvSpPr>
-        <p:spPr>
-          <a:xfrm>
-            <a:off x="365760" y="3995928"/>
-            <a:ext cx="3931920" cy="411480"/>
-          </a:xfrm>
-          <a:prstGeom prst="rect">
-            <a:avLst/>
-          </a:prstGeom>
-          <a:solidFill>
-            <a:schemeClr val="accent1">
-              <a:lumMod val="75000"/>
-            </a:schemeClr>
-          </a:solidFill>
-          <a:ln>
-            <a:noFill/>
-          </a:ln>
-        </p:spPr>
-        <p:txBody>
-          <a:bodyPr wrap="square" lIns="0" tIns="0" rIns="0" bIns="0" rtlCol="0" anchor="ctr"/>
-          <a:lstStyle/>
-          <a:p>
-            <a:pPr marL="0" indent="0" algn="l">
-              <a:buNone/>
-            </a:pPr>
-            <a:r>
-              <a:rPr lang="en-US" sz="1100" dirty="0">
-                <a:solidFill>
-                  <a:schemeClr val="bg1"/>
-                </a:solidFill>
-              </a:rPr>
-              <a:t>Two recruiters, two outcomes.  Bias creeps in at every stage</a:t>
-            </a:r>
-          </a:p>
-        </p:txBody>
-      </p:sp>
-      <p:sp>
-        <p:nvSpPr>
-          <p:cNvPr id="21" name="Shape 19"/>
-          <p:cNvSpPr/>
-          <p:nvPr/>
-        </p:nvSpPr>
-        <p:spPr>
-          <a:xfrm>
-            <a:off x="4663440" y="3630168"/>
-            <a:ext cx="4206240" cy="914400"/>
-          </a:xfrm>
-          <a:prstGeom prst="rect">
-            <a:avLst/>
-          </a:prstGeom>
-          <a:solidFill>
-            <a:schemeClr val="accent1">
-              <a:lumMod val="75000"/>
-            </a:schemeClr>
-          </a:solidFill>
-          <a:ln w="12700">
-            <a:noFill/>
-            <a:prstDash val="solid"/>
-          </a:ln>
-          <a:effectLst>
-            <a:outerShdw blurRad="50800" dist="12700" dir="8100000" algn="bl" rotWithShape="0">
-              <a:srgbClr val="000000">
-                <a:alpha val="8000"/>
-              </a:srgbClr>
-            </a:outerShdw>
-          </a:effectLst>
-        </p:spPr>
-        <p:txBody>
-          <a:bodyPr/>
-          <a:lstStyle/>
-          <a:p>
-            <a:endParaRPr lang="en-GB"/>
-          </a:p>
-        </p:txBody>
-      </p:sp>
-      <p:sp>
-        <p:nvSpPr>
-          <p:cNvPr id="22" name="Text 20"/>
-          <p:cNvSpPr/>
-          <p:nvPr/>
-        </p:nvSpPr>
-        <p:spPr>
-          <a:xfrm>
-            <a:off x="4800600" y="3675888"/>
-            <a:ext cx="3931920" cy="320040"/>
-          </a:xfrm>
-          <a:prstGeom prst="rect">
-            <a:avLst/>
-          </a:prstGeom>
-          <a:solidFill>
-            <a:schemeClr val="accent1">
-              <a:lumMod val="75000"/>
-            </a:schemeClr>
-          </a:solidFill>
-          <a:ln>
-            <a:noFill/>
-          </a:ln>
-        </p:spPr>
-        <p:txBody>
-          <a:bodyPr wrap="square" lIns="0" tIns="0" rIns="0" bIns="0" rtlCol="0" anchor="ctr"/>
-          <a:lstStyle/>
-          <a:p>
-            <a:pPr marL="0" indent="0" algn="l">
-              <a:buNone/>
-            </a:pPr>
-            <a:r>
-              <a:rPr lang="en-US" sz="1300" b="1" dirty="0">
-                <a:solidFill>
-                  <a:srgbClr val="FFC000"/>
-                </a:solidFill>
-              </a:rPr>
-              <a:t>Unstructured Onboarding</a:t>
-            </a:r>
-          </a:p>
-        </p:txBody>
-      </p:sp>
-      <p:sp>
-        <p:nvSpPr>
-          <p:cNvPr id="23" name="Text 21"/>
-          <p:cNvSpPr/>
-          <p:nvPr/>
-        </p:nvSpPr>
-        <p:spPr>
-          <a:xfrm>
-            <a:off x="4800600" y="3995928"/>
-            <a:ext cx="3931920" cy="411480"/>
-          </a:xfrm>
-          <a:prstGeom prst="rect">
-            <a:avLst/>
-          </a:prstGeom>
-          <a:solidFill>
-            <a:schemeClr val="accent1">
-              <a:lumMod val="75000"/>
-            </a:schemeClr>
-          </a:solidFill>
-          <a:ln>
-            <a:noFill/>
-          </a:ln>
-        </p:spPr>
-        <p:txBody>
-          <a:bodyPr wrap="square" lIns="0" tIns="0" rIns="0" bIns="0" rtlCol="0" anchor="ctr"/>
-          <a:lstStyle/>
-          <a:p>
-            <a:pPr marL="0" indent="0" algn="l">
-              <a:buNone/>
-            </a:pPr>
-            <a:r>
-              <a:rPr lang="en-US" sz="1100" dirty="0">
-                <a:solidFill>
-                  <a:schemeClr val="bg1"/>
-                </a:solidFill>
-              </a:rPr>
-              <a:t>IT access, workspace &amp; introductions coordinated by hand. Steps are forgotten or delayed</a:t>
-            </a:r>
-          </a:p>
-        </p:txBody>
-      </p:sp>
-    </p:spTree>
-  </p:cSld>
-  <p:clrMapOvr>
-    <a:masterClrMapping/>
-  </p:clrMapOvr>
-</p:sld>
-</file>
-
-<file path=ppt/slides/slide4.xml><?xml version="1.0" encoding="utf-8"?>
-<p:sld xmlns:a="http://schemas.openxmlformats.org/drawingml/2006/main" xmlns:r="http://schemas.openxmlformats.org/officeDocument/2006/relationships" xmlns:p="http://schemas.openxmlformats.org/presentationml/2006/main">
-  <p:cSld>
-    <p:spTree>
-      <p:nvGrpSpPr>
-        <p:cNvPr id="1" name=""/>
-        <p:cNvGrpSpPr/>
-        <p:nvPr/>
-      </p:nvGrpSpPr>
-      <p:grpSpPr>
-        <a:xfrm>
-          <a:off x="0" y="0"/>
-          <a:ext cx="0" cy="0"/>
-          <a:chOff x="0" y="0"/>
-          <a:chExt cx="0" cy="0"/>
-        </a:xfrm>
-      </p:grpSpPr>
-      <p:pic>
-        <p:nvPicPr>
-          <p:cNvPr id="2" name="Image 0" descr="preencoded.png"/>
-          <p:cNvPicPr>
-            <a:picLocks noChangeAspect="1"/>
-          </p:cNvPicPr>
-          <p:nvPr/>
-        </p:nvPicPr>
-        <p:blipFill>
-          <a:blip r:embed="rId3">
-            <a:duotone>
-              <a:schemeClr val="accent4">
-                <a:shade val="45000"/>
-                <a:satMod val="135000"/>
-              </a:schemeClr>
-              <a:prstClr val="white"/>
-            </a:duotone>
-            <a:extLst>
-              <a:ext uri="{BEBA8EAE-BF5A-486C-A8C5-ECC9F3942E4B}">
-                <a14:imgProps xmlns:a14="http://schemas.microsoft.com/office/drawing/2010/main">
-                  <a14:imgLayer r:embed="rId4">
-                    <a14:imgEffect>
-                      <a14:brightnessContrast bright="-40000" contrast="40000"/>
-                    </a14:imgEffect>
-                  </a14:imgLayer>
-                </a14:imgProps>
-              </a:ext>
-            </a:extLst>
-          </a:blip>
-          <a:stretch>
-            <a:fillRect/>
-          </a:stretch>
-        </p:blipFill>
-        <p:spPr>
-          <a:xfrm>
-            <a:off x="4023360" y="640080"/>
-            <a:ext cx="1097280" cy="1097280"/>
-          </a:xfrm>
-          <a:prstGeom prst="rect">
-            <a:avLst/>
-          </a:prstGeom>
-        </p:spPr>
-      </p:pic>
-      <p:sp>
-        <p:nvSpPr>
-          <p:cNvPr id="3" name="Text 0"/>
-          <p:cNvSpPr/>
-          <p:nvPr/>
-        </p:nvSpPr>
-        <p:spPr>
-          <a:xfrm>
-            <a:off x="457200" y="1920240"/>
-            <a:ext cx="8229600" cy="822960"/>
-          </a:xfrm>
-          <a:prstGeom prst="rect">
-            <a:avLst/>
-          </a:prstGeom>
-          <a:noFill/>
-          <a:ln/>
-        </p:spPr>
-        <p:txBody>
-          <a:bodyPr wrap="square" lIns="0" tIns="0" rIns="0" bIns="0" rtlCol="0" anchor="ctr"/>
-          <a:lstStyle/>
-          <a:p>
-            <a:pPr marL="0" indent="0" algn="ctr">
-              <a:buNone/>
-            </a:pPr>
-            <a:r>
-              <a:rPr lang="en-US" sz="3800" b="1" dirty="0">
-                <a:solidFill>
-                  <a:srgbClr val="FFFFFF"/>
-                </a:solidFill>
-                <a:latin typeface="Calibri" pitchFamily="34" charset="0"/>
-                <a:ea typeface="Calibri" pitchFamily="34" charset="-122"/>
-                <a:cs typeface="Calibri" pitchFamily="34" charset="-120"/>
-              </a:rPr>
-              <a:t>Demo Recording</a:t>
-            </a:r>
-            <a:endParaRPr lang="en-US" sz="3800" dirty="0"/>
-          </a:p>
-        </p:txBody>
-      </p:sp>
-      <p:sp>
-        <p:nvSpPr>
-          <p:cNvPr id="4" name="Text 1"/>
-          <p:cNvSpPr/>
-          <p:nvPr/>
-        </p:nvSpPr>
-        <p:spPr>
-          <a:xfrm>
-            <a:off x="457200" y="2834640"/>
-            <a:ext cx="8229600" cy="502920"/>
-          </a:xfrm>
-          <a:prstGeom prst="rect">
-            <a:avLst/>
-          </a:prstGeom>
-          <a:noFill/>
-          <a:ln/>
-        </p:spPr>
-        <p:txBody>
-          <a:bodyPr wrap="square" lIns="0" tIns="0" rIns="0" bIns="0" rtlCol="0" anchor="ctr"/>
-          <a:lstStyle/>
-          <a:p>
-            <a:pPr marL="0" indent="0" algn="ctr">
-              <a:buNone/>
-            </a:pPr>
-            <a:r>
-              <a:rPr lang="en-US" sz="1800" dirty="0">
-                <a:solidFill>
-                  <a:srgbClr val="CBE0F0"/>
-                </a:solidFill>
-                <a:latin typeface="Calibri" pitchFamily="34" charset="0"/>
-                <a:ea typeface="Calibri" pitchFamily="34" charset="-122"/>
-                <a:cs typeface="Calibri" pitchFamily="34" charset="-120"/>
-              </a:rPr>
-              <a:t>Live walkthrough of the TO-BE process</a:t>
-            </a:r>
-            <a:endParaRPr lang="en-US" sz="1800" dirty="0"/>
-          </a:p>
-        </p:txBody>
-      </p:sp>
-      <p:sp>
-        <p:nvSpPr>
-          <p:cNvPr id="5" name="Shape 2"/>
-          <p:cNvSpPr/>
-          <p:nvPr/>
-        </p:nvSpPr>
-        <p:spPr>
-          <a:xfrm>
-            <a:off x="914400" y="3566160"/>
-            <a:ext cx="2286000" cy="457200"/>
-          </a:xfrm>
-          <a:prstGeom prst="rect">
-            <a:avLst/>
-          </a:prstGeom>
-          <a:solidFill>
-            <a:srgbClr val="243654"/>
-          </a:solidFill>
-          <a:ln w="12700">
-            <a:solidFill>
-              <a:srgbClr val="FFCC00"/>
-            </a:solidFill>
-            <a:prstDash val="solid"/>
-          </a:ln>
-        </p:spPr>
-        <p:txBody>
-          <a:bodyPr/>
-          <a:lstStyle/>
-          <a:p>
-            <a:endParaRPr lang="en-GB">
-              <a:solidFill>
-                <a:srgbClr val="FFC000"/>
-              </a:solidFill>
-            </a:endParaRPr>
-          </a:p>
-        </p:txBody>
-      </p:sp>
-      <p:sp>
-        <p:nvSpPr>
-          <p:cNvPr id="6" name="Text 3"/>
-          <p:cNvSpPr/>
-          <p:nvPr/>
-        </p:nvSpPr>
-        <p:spPr>
-          <a:xfrm>
-            <a:off x="914400" y="3566160"/>
-            <a:ext cx="2286000" cy="457200"/>
-          </a:xfrm>
-          <a:prstGeom prst="rect">
-            <a:avLst/>
-          </a:prstGeom>
-          <a:noFill/>
-          <a:ln>
-            <a:solidFill>
-              <a:srgbClr val="FFCC00"/>
-            </a:solidFill>
-          </a:ln>
-        </p:spPr>
-        <p:txBody>
-          <a:bodyPr wrap="square" rtlCol="0" anchor="ctr"/>
-          <a:lstStyle/>
-          <a:p>
-            <a:pPr marL="0" indent="0" algn="ctr">
-              <a:buNone/>
-            </a:pPr>
-            <a:r>
-              <a:rPr lang="en-US" sz="1100" b="1" dirty="0">
-                <a:solidFill>
-                  <a:srgbClr val="FFC000"/>
-                </a:solidFill>
-                <a:latin typeface="Calibri" pitchFamily="34" charset="0"/>
-                <a:ea typeface="Calibri" pitchFamily="34" charset="-122"/>
-                <a:cs typeface="Calibri" pitchFamily="34" charset="-120"/>
-              </a:rPr>
-              <a:t>Job Posting</a:t>
-            </a:r>
-            <a:endParaRPr lang="en-US" sz="1100" dirty="0">
-              <a:solidFill>
-                <a:srgbClr val="FFC000"/>
-              </a:solidFill>
-            </a:endParaRPr>
-          </a:p>
-        </p:txBody>
-      </p:sp>
-      <p:sp>
-        <p:nvSpPr>
-          <p:cNvPr id="7" name="Shape 4"/>
-          <p:cNvSpPr/>
-          <p:nvPr/>
-        </p:nvSpPr>
-        <p:spPr>
-          <a:xfrm>
-            <a:off x="3474720" y="3566160"/>
-            <a:ext cx="2286000" cy="457200"/>
-          </a:xfrm>
-          <a:prstGeom prst="rect">
-            <a:avLst/>
-          </a:prstGeom>
-          <a:solidFill>
-            <a:srgbClr val="243654"/>
-          </a:solidFill>
-          <a:ln w="12700">
-            <a:solidFill>
-              <a:srgbClr val="FFCC00"/>
-            </a:solidFill>
-            <a:prstDash val="solid"/>
-          </a:ln>
-        </p:spPr>
-        <p:txBody>
-          <a:bodyPr/>
-          <a:lstStyle/>
-          <a:p>
-            <a:endParaRPr lang="en-GB">
-              <a:solidFill>
-                <a:srgbClr val="FFC000"/>
-              </a:solidFill>
-            </a:endParaRPr>
-          </a:p>
-        </p:txBody>
-      </p:sp>
-      <p:sp>
-        <p:nvSpPr>
-          <p:cNvPr id="8" name="Text 5"/>
-          <p:cNvSpPr/>
-          <p:nvPr/>
-        </p:nvSpPr>
-        <p:spPr>
-          <a:xfrm>
-            <a:off x="3474720" y="3566160"/>
-            <a:ext cx="2286000" cy="457200"/>
-          </a:xfrm>
-          <a:prstGeom prst="rect">
-            <a:avLst/>
-          </a:prstGeom>
-          <a:noFill/>
-          <a:ln>
-            <a:solidFill>
-              <a:srgbClr val="FFCC00"/>
-            </a:solidFill>
-          </a:ln>
-        </p:spPr>
-        <p:txBody>
-          <a:bodyPr wrap="square" rtlCol="0" anchor="ctr"/>
-          <a:lstStyle/>
-          <a:p>
-            <a:pPr marL="0" indent="0" algn="ctr">
-              <a:buNone/>
-            </a:pPr>
-            <a:r>
-              <a:rPr lang="en-US" sz="1100" b="1" dirty="0">
-                <a:solidFill>
-                  <a:srgbClr val="FFC000"/>
-                </a:solidFill>
-                <a:latin typeface="Calibri" pitchFamily="34" charset="0"/>
-                <a:ea typeface="Calibri" pitchFamily="34" charset="-122"/>
-                <a:cs typeface="Calibri" pitchFamily="34" charset="-120"/>
-              </a:rPr>
-              <a:t>CV Scoring via Claude API</a:t>
-            </a:r>
-            <a:endParaRPr lang="en-US" sz="1100" dirty="0">
-              <a:solidFill>
-                <a:srgbClr val="FFC000"/>
-              </a:solidFill>
-            </a:endParaRPr>
-          </a:p>
-        </p:txBody>
-      </p:sp>
-      <p:sp>
-        <p:nvSpPr>
-          <p:cNvPr id="9" name="Shape 6"/>
-          <p:cNvSpPr/>
-          <p:nvPr/>
-        </p:nvSpPr>
-        <p:spPr>
-          <a:xfrm>
-            <a:off x="6035040" y="3566160"/>
-            <a:ext cx="2286000" cy="457200"/>
-          </a:xfrm>
-          <a:prstGeom prst="rect">
-            <a:avLst/>
-          </a:prstGeom>
-          <a:solidFill>
-            <a:srgbClr val="243654"/>
-          </a:solidFill>
-          <a:ln w="12700">
-            <a:solidFill>
-              <a:srgbClr val="FFCC00"/>
-            </a:solidFill>
-            <a:prstDash val="solid"/>
-          </a:ln>
-        </p:spPr>
-        <p:txBody>
-          <a:bodyPr/>
-          <a:lstStyle/>
-          <a:p>
-            <a:endParaRPr lang="en-GB">
-              <a:solidFill>
-                <a:srgbClr val="FFC000"/>
-              </a:solidFill>
-            </a:endParaRPr>
-          </a:p>
-        </p:txBody>
-      </p:sp>
-      <p:sp>
-        <p:nvSpPr>
-          <p:cNvPr id="10" name="Text 7"/>
-          <p:cNvSpPr/>
-          <p:nvPr/>
-        </p:nvSpPr>
-        <p:spPr>
-          <a:xfrm>
-            <a:off x="6035040" y="3566160"/>
-            <a:ext cx="2286000" cy="457200"/>
-          </a:xfrm>
-          <a:prstGeom prst="rect">
-            <a:avLst/>
-          </a:prstGeom>
-          <a:noFill/>
-          <a:ln>
-            <a:solidFill>
-              <a:srgbClr val="FFCC00"/>
-            </a:solidFill>
-          </a:ln>
-        </p:spPr>
-        <p:txBody>
-          <a:bodyPr wrap="square" rtlCol="0" anchor="ctr"/>
-          <a:lstStyle/>
-          <a:p>
-            <a:pPr marL="0" indent="0" algn="ctr">
-              <a:buNone/>
-            </a:pPr>
-            <a:r>
-              <a:rPr lang="en-US" sz="1100" b="1" dirty="0">
-                <a:solidFill>
-                  <a:srgbClr val="FFC000"/>
-                </a:solidFill>
-                <a:latin typeface="Calibri" pitchFamily="34" charset="0"/>
-                <a:ea typeface="Calibri" pitchFamily="34" charset="-122"/>
-                <a:cs typeface="Calibri" pitchFamily="34" charset="-120"/>
-              </a:rPr>
-              <a:t>Contract &amp; Onboarding</a:t>
-            </a:r>
-            <a:endParaRPr lang="en-US" sz="1100" dirty="0">
-              <a:solidFill>
-                <a:srgbClr val="FFC000"/>
-              </a:solidFill>
-            </a:endParaRPr>
-          </a:p>
-        </p:txBody>
-      </p:sp>
-    </p:spTree>
-  </p:cSld>
-  <p:clrMapOvr>
-    <a:masterClrMapping/>
-  </p:clrMapOvr>
-</p:sld>
-</file>
-
-<file path=ppt/slides/slide5.xml><?xml version="1.0" encoding="utf-8"?>
-<p:sld xmlns:a="http://schemas.openxmlformats.org/drawingml/2006/main" xmlns:r="http://schemas.openxmlformats.org/officeDocument/2006/relationships" xmlns:p="http://schemas.openxmlformats.org/presentationml/2006/main">
-  <p:cSld>
-    <p:spTree>
-      <p:nvGrpSpPr>
-        <p:cNvPr id="1" name=""/>
-        <p:cNvGrpSpPr/>
-        <p:nvPr/>
-      </p:nvGrpSpPr>
-      <p:grpSpPr>
-        <a:xfrm>
-          <a:off x="0" y="0"/>
-          <a:ext cx="0" cy="0"/>
-          <a:chOff x="0" y="0"/>
-          <a:chExt cx="0" cy="0"/>
-        </a:xfrm>
-      </p:grpSpPr>
-      <p:sp>
-        <p:nvSpPr>
-          <p:cNvPr id="3" name="Text 1"/>
-          <p:cNvSpPr/>
-          <p:nvPr/>
-        </p:nvSpPr>
-        <p:spPr>
-          <a:xfrm>
-            <a:off x="365760" y="0"/>
-            <a:ext cx="8412480" cy="914400"/>
-          </a:xfrm>
-          <a:prstGeom prst="rect">
-            <a:avLst/>
-          </a:prstGeom>
-          <a:noFill/>
-          <a:ln/>
-        </p:spPr>
-        <p:txBody>
-          <a:bodyPr wrap="square" lIns="0" tIns="0" rIns="0" bIns="0" rtlCol="0" anchor="ctr"/>
-          <a:lstStyle/>
-          <a:p>
-            <a:pPr marL="0" indent="0" algn="l">
-              <a:buNone/>
-            </a:pPr>
-            <a:r>
               <a:rPr lang="en-US" sz="2600" b="1" dirty="0">
                 <a:solidFill>
-                  <a:srgbClr val="FFC000"/>
+                  <a:srgbClr val="C0994B"/>
                 </a:solidFill>
-                <a:latin typeface="Calibri" pitchFamily="34" charset="0"/>
+                <a:latin typeface="BODONI 72 BOOK" pitchFamily="2" charset="0"/>
                 <a:ea typeface="Calibri" pitchFamily="34" charset="-122"/>
                 <a:cs typeface="Calibri" pitchFamily="34" charset="-120"/>
               </a:rPr>
@@ -4326,8 +4263,9 @@
             </a:r>
             <a:endParaRPr lang="en-US" sz="2600" dirty="0">
               <a:solidFill>
-                <a:srgbClr val="FFC000"/>
+                <a:srgbClr val="C0994B"/>
               </a:solidFill>
+              <a:latin typeface="Bodoni 72 Book" pitchFamily="2" charset="0"/>
             </a:endParaRPr>
           </a:p>
         </p:txBody>
@@ -4347,9 +4285,7 @@
             <a:avLst/>
           </a:prstGeom>
           <a:solidFill>
-            <a:schemeClr val="accent1">
-              <a:lumMod val="75000"/>
-            </a:schemeClr>
+            <a:srgbClr val="F4F1EC"/>
           </a:solidFill>
           <a:ln w="12700">
             <a:noFill/>
@@ -4390,9 +4326,7 @@
             <a:avLst/>
           </a:prstGeom>
           <a:solidFill>
-            <a:schemeClr val="accent1">
-              <a:lumMod val="75000"/>
-            </a:schemeClr>
+            <a:srgbClr val="F4F1EC"/>
           </a:solidFill>
           <a:ln w="12700">
             <a:noFill/>
@@ -4423,10 +4357,10 @@
           <a:blip r:embed="rId3">
             <a:duotone>
               <a:prstClr val="black"/>
-              <a:schemeClr val="accent2">
+              <a:srgbClr val="1A2A42">
                 <a:tint val="45000"/>
                 <a:satMod val="400000"/>
-              </a:schemeClr>
+              </a:srgbClr>
             </a:duotone>
             <a:extLst>
               <a:ext uri="{BEBA8EAE-BF5A-486C-A8C5-ECC9F3942E4B}">
@@ -4453,9 +4387,7 @@
             <a:avLst/>
           </a:prstGeom>
           <a:solidFill>
-            <a:schemeClr val="accent1">
-              <a:lumMod val="75000"/>
-            </a:schemeClr>
+            <a:srgbClr val="F4F1EC"/>
           </a:solidFill>
           <a:ln>
             <a:noFill/>
@@ -4477,9 +4409,7 @@
             <a:avLst/>
           </a:prstGeom>
           <a:solidFill>
-            <a:schemeClr val="accent1">
-              <a:lumMod val="75000"/>
-            </a:schemeClr>
+            <a:srgbClr val="F4F1EC"/>
           </a:solidFill>
           <a:ln>
             <a:noFill/>
@@ -4495,9 +4425,9 @@
             <a:r>
               <a:rPr lang="en-US" sz="1250" b="1" dirty="0">
                 <a:solidFill>
-                  <a:srgbClr val="FFC000"/>
+                  <a:srgbClr val="C0994B"/>
                 </a:solidFill>
-                <a:latin typeface="Calibri" pitchFamily="34" charset="0"/>
+                <a:latin typeface="BODONI 72 BOOK" pitchFamily="2" charset="0"/>
                 <a:ea typeface="Calibri" pitchFamily="34" charset="-122"/>
                 <a:cs typeface="Calibri" pitchFamily="34" charset="-120"/>
               </a:rPr>
@@ -4505,8 +4435,9 @@
             </a:r>
             <a:endParaRPr lang="en-US" sz="1250" dirty="0">
               <a:solidFill>
-                <a:srgbClr val="FFC000"/>
+                <a:srgbClr val="C0994B"/>
               </a:solidFill>
+              <a:latin typeface="Bodoni 72 Book" pitchFamily="2" charset="0"/>
             </a:endParaRPr>
           </a:p>
         </p:txBody>
@@ -4526,9 +4457,7 @@
             <a:avLst/>
           </a:prstGeom>
           <a:solidFill>
-            <a:schemeClr val="accent1">
-              <a:lumMod val="75000"/>
-            </a:schemeClr>
+            <a:srgbClr val="F4F1EC"/>
           </a:solidFill>
           <a:ln>
             <a:noFill/>
@@ -4544,9 +4473,9 @@
             <a:r>
               <a:rPr lang="en-US" sz="950" dirty="0">
                 <a:solidFill>
-                  <a:schemeClr val="bg1"/>
+                  <a:srgbClr val="1A2A42"/>
                 </a:solidFill>
-                <a:latin typeface="Calibri" pitchFamily="34" charset="0"/>
+                <a:latin typeface="Aptos" panose="020B0004020202020204" pitchFamily="34" charset="0"/>
                 <a:ea typeface="Calibri" pitchFamily="34" charset="-122"/>
                 <a:cs typeface="Calibri" pitchFamily="34" charset="-120"/>
               </a:rPr>
@@ -4554,8 +4483,9 @@
             </a:r>
             <a:endParaRPr lang="en-US" sz="950" dirty="0">
               <a:solidFill>
-                <a:schemeClr val="bg1"/>
+                <a:srgbClr val="1A2A42"/>
               </a:solidFill>
+              <a:latin typeface="Aptos" panose="020B0004020202020204" pitchFamily="34" charset="0"/>
             </a:endParaRPr>
           </a:p>
         </p:txBody>
@@ -4575,9 +4505,7 @@
             <a:avLst/>
           </a:prstGeom>
           <a:solidFill>
-            <a:schemeClr val="accent1">
-              <a:lumMod val="75000"/>
-            </a:schemeClr>
+            <a:srgbClr val="F4F1EC"/>
           </a:solidFill>
           <a:ln w="12700">
             <a:noFill/>
@@ -4618,9 +4546,7 @@
             <a:avLst/>
           </a:prstGeom>
           <a:solidFill>
-            <a:schemeClr val="accent1">
-              <a:lumMod val="75000"/>
-            </a:schemeClr>
+            <a:srgbClr val="F4F1EC"/>
           </a:solidFill>
           <a:ln w="12700">
             <a:noFill/>
@@ -4651,10 +4577,10 @@
           <a:blip r:embed="rId5">
             <a:duotone>
               <a:prstClr val="black"/>
-              <a:schemeClr val="accent2">
+              <a:srgbClr val="1A2A42">
                 <a:tint val="45000"/>
                 <a:satMod val="400000"/>
-              </a:schemeClr>
+              </a:srgbClr>
             </a:duotone>
           </a:blip>
           <a:stretch>
@@ -4670,9 +4596,7 @@
             <a:avLst/>
           </a:prstGeom>
           <a:solidFill>
-            <a:schemeClr val="accent1">
-              <a:lumMod val="75000"/>
-            </a:schemeClr>
+            <a:srgbClr val="F4F1EC"/>
           </a:solidFill>
           <a:ln>
             <a:noFill/>
@@ -4694,9 +4618,7 @@
             <a:avLst/>
           </a:prstGeom>
           <a:solidFill>
-            <a:schemeClr val="accent1">
-              <a:lumMod val="75000"/>
-            </a:schemeClr>
+            <a:srgbClr val="F4F1EC"/>
           </a:solidFill>
           <a:ln>
             <a:noFill/>
@@ -4712,9 +4634,9 @@
             <a:r>
               <a:rPr lang="en-US" sz="1250" b="1" dirty="0">
                 <a:solidFill>
-                  <a:srgbClr val="FFC000"/>
+                  <a:srgbClr val="C0994B"/>
                 </a:solidFill>
-                <a:latin typeface="Calibri" pitchFamily="34" charset="0"/>
+                <a:latin typeface="BODONI 72 BOOK" pitchFamily="2" charset="0"/>
                 <a:ea typeface="Calibri" pitchFamily="34" charset="-122"/>
                 <a:cs typeface="Calibri" pitchFamily="34" charset="-120"/>
               </a:rPr>
@@ -4722,8 +4644,9 @@
             </a:r>
             <a:endParaRPr lang="en-US" sz="1250" dirty="0">
               <a:solidFill>
-                <a:srgbClr val="FFC000"/>
+                <a:srgbClr val="C0994B"/>
               </a:solidFill>
+              <a:latin typeface="Bodoni 72 Book" pitchFamily="2" charset="0"/>
             </a:endParaRPr>
           </a:p>
         </p:txBody>
@@ -4743,9 +4666,7 @@
             <a:avLst/>
           </a:prstGeom>
           <a:solidFill>
-            <a:schemeClr val="accent1">
-              <a:lumMod val="75000"/>
-            </a:schemeClr>
+            <a:srgbClr val="F4F1EC"/>
           </a:solidFill>
           <a:ln>
             <a:noFill/>
@@ -4761,9 +4682,9 @@
             <a:r>
               <a:rPr lang="en-US" sz="950" dirty="0">
                 <a:solidFill>
-                  <a:schemeClr val="bg1"/>
+                  <a:srgbClr val="1A2A42"/>
                 </a:solidFill>
-                <a:latin typeface="Calibri" pitchFamily="34" charset="0"/>
+                <a:latin typeface="Aptos" panose="020B0004020202020204" pitchFamily="34" charset="0"/>
                 <a:ea typeface="Calibri" pitchFamily="34" charset="-122"/>
                 <a:cs typeface="Calibri" pitchFamily="34" charset="-120"/>
               </a:rPr>
@@ -4771,8 +4692,9 @@
             </a:r>
             <a:endParaRPr lang="en-US" sz="950" dirty="0">
               <a:solidFill>
-                <a:schemeClr val="bg1"/>
+                <a:srgbClr val="1A2A42"/>
               </a:solidFill>
+              <a:latin typeface="Aptos" panose="020B0004020202020204" pitchFamily="34" charset="0"/>
             </a:endParaRPr>
           </a:p>
         </p:txBody>
@@ -4792,9 +4714,7 @@
             <a:avLst/>
           </a:prstGeom>
           <a:solidFill>
-            <a:schemeClr val="accent1">
-              <a:lumMod val="75000"/>
-            </a:schemeClr>
+            <a:srgbClr val="F4F1EC"/>
           </a:solidFill>
           <a:ln w="12700">
             <a:noFill/>
@@ -4812,7 +4732,7 @@
           <a:bodyPr/>
           <a:lstStyle/>
           <a:p>
-            <a:endParaRPr lang="en-GB">
+            <a:endParaRPr lang="en-GB" dirty="0">
               <a:solidFill>
                 <a:schemeClr val="bg1"/>
               </a:solidFill>
@@ -4835,9 +4755,7 @@
             <a:avLst/>
           </a:prstGeom>
           <a:solidFill>
-            <a:schemeClr val="accent1">
-              <a:lumMod val="75000"/>
-            </a:schemeClr>
+            <a:srgbClr val="F4F1EC"/>
           </a:solidFill>
           <a:ln w="12700">
             <a:noFill/>
@@ -4868,10 +4786,10 @@
           <a:blip r:embed="rId6">
             <a:duotone>
               <a:prstClr val="black"/>
-              <a:schemeClr val="accent2">
+              <a:srgbClr val="1A2A42">
                 <a:tint val="45000"/>
                 <a:satMod val="400000"/>
-              </a:schemeClr>
+              </a:srgbClr>
             </a:duotone>
           </a:blip>
           <a:stretch>
@@ -4887,9 +4805,7 @@
             <a:avLst/>
           </a:prstGeom>
           <a:solidFill>
-            <a:schemeClr val="accent1">
-              <a:lumMod val="75000"/>
-            </a:schemeClr>
+            <a:srgbClr val="F4F1EC"/>
           </a:solidFill>
           <a:ln>
             <a:noFill/>
@@ -4911,9 +4827,7 @@
             <a:avLst/>
           </a:prstGeom>
           <a:solidFill>
-            <a:schemeClr val="accent1">
-              <a:lumMod val="75000"/>
-            </a:schemeClr>
+            <a:srgbClr val="F4F1EC"/>
           </a:solidFill>
           <a:ln>
             <a:noFill/>
@@ -4929,9 +4843,9 @@
             <a:r>
               <a:rPr lang="en-US" sz="1250" b="1" dirty="0">
                 <a:solidFill>
-                  <a:srgbClr val="FFC000"/>
+                  <a:srgbClr val="C0994B"/>
                 </a:solidFill>
-                <a:latin typeface="Calibri" pitchFamily="34" charset="0"/>
+                <a:latin typeface="BODONI 72 BOOK" pitchFamily="2" charset="0"/>
                 <a:ea typeface="Calibri" pitchFamily="34" charset="-122"/>
                 <a:cs typeface="Calibri" pitchFamily="34" charset="-120"/>
               </a:rPr>
@@ -4939,8 +4853,9 @@
             </a:r>
             <a:endParaRPr lang="en-US" sz="1250" dirty="0">
               <a:solidFill>
-                <a:srgbClr val="FFC000"/>
+                <a:srgbClr val="C0994B"/>
               </a:solidFill>
+              <a:latin typeface="Bodoni 72 Book" pitchFamily="2" charset="0"/>
             </a:endParaRPr>
           </a:p>
         </p:txBody>
@@ -4960,9 +4875,7 @@
             <a:avLst/>
           </a:prstGeom>
           <a:solidFill>
-            <a:schemeClr val="accent1">
-              <a:lumMod val="75000"/>
-            </a:schemeClr>
+            <a:srgbClr val="F4F1EC"/>
           </a:solidFill>
           <a:ln>
             <a:noFill/>
@@ -4978,9 +4891,9 @@
             <a:r>
               <a:rPr lang="en-US" sz="950" dirty="0">
                 <a:solidFill>
-                  <a:schemeClr val="bg1"/>
+                  <a:srgbClr val="1A2A42"/>
                 </a:solidFill>
-                <a:latin typeface="Calibri" pitchFamily="34" charset="0"/>
+                <a:latin typeface="Aptos" panose="020B0004020202020204" pitchFamily="34" charset="0"/>
                 <a:ea typeface="Calibri" pitchFamily="34" charset="-122"/>
                 <a:cs typeface="Calibri" pitchFamily="34" charset="-120"/>
               </a:rPr>
@@ -4988,8 +4901,9 @@
             </a:r>
             <a:endParaRPr lang="en-US" sz="950" dirty="0">
               <a:solidFill>
-                <a:schemeClr val="bg1"/>
+                <a:srgbClr val="1A2A42"/>
               </a:solidFill>
+              <a:latin typeface="Aptos" panose="020B0004020202020204" pitchFamily="34" charset="0"/>
             </a:endParaRPr>
           </a:p>
         </p:txBody>
@@ -5009,9 +4923,7 @@
             <a:avLst/>
           </a:prstGeom>
           <a:solidFill>
-            <a:schemeClr val="accent1">
-              <a:lumMod val="75000"/>
-            </a:schemeClr>
+            <a:srgbClr val="F4F1EC"/>
           </a:solidFill>
           <a:ln w="12700">
             <a:noFill/>
@@ -5052,9 +4964,7 @@
             <a:avLst/>
           </a:prstGeom>
           <a:solidFill>
-            <a:schemeClr val="accent1">
-              <a:lumMod val="75000"/>
-            </a:schemeClr>
+            <a:srgbClr val="F4F1EC"/>
           </a:solidFill>
           <a:ln w="12700">
             <a:noFill/>
@@ -5085,10 +4995,10 @@
           <a:blip r:embed="rId7">
             <a:duotone>
               <a:prstClr val="black"/>
-              <a:schemeClr val="accent2">
+              <a:srgbClr val="1A2A42">
                 <a:tint val="45000"/>
                 <a:satMod val="400000"/>
-              </a:schemeClr>
+              </a:srgbClr>
             </a:duotone>
           </a:blip>
           <a:stretch>
@@ -5104,9 +5014,7 @@
             <a:avLst/>
           </a:prstGeom>
           <a:solidFill>
-            <a:schemeClr val="accent1">
-              <a:lumMod val="75000"/>
-            </a:schemeClr>
+            <a:srgbClr val="F4F1EC"/>
           </a:solidFill>
           <a:ln>
             <a:noFill/>
@@ -5128,9 +5036,7 @@
             <a:avLst/>
           </a:prstGeom>
           <a:solidFill>
-            <a:schemeClr val="accent1">
-              <a:lumMod val="75000"/>
-            </a:schemeClr>
+            <a:srgbClr val="F4F1EC"/>
           </a:solidFill>
           <a:ln>
             <a:noFill/>
@@ -5146,9 +5052,9 @@
             <a:r>
               <a:rPr lang="en-US" sz="1250" b="1" dirty="0">
                 <a:solidFill>
-                  <a:srgbClr val="FFC000"/>
+                  <a:srgbClr val="C0994B"/>
                 </a:solidFill>
-                <a:latin typeface="Calibri" pitchFamily="34" charset="0"/>
+                <a:latin typeface="BODONI 72 BOOK" pitchFamily="2" charset="0"/>
                 <a:ea typeface="Calibri" pitchFamily="34" charset="-122"/>
                 <a:cs typeface="Calibri" pitchFamily="34" charset="-120"/>
               </a:rPr>
@@ -5156,8 +5062,9 @@
             </a:r>
             <a:endParaRPr lang="en-US" sz="1250" dirty="0">
               <a:solidFill>
-                <a:srgbClr val="FFC000"/>
+                <a:srgbClr val="C0994B"/>
               </a:solidFill>
+              <a:latin typeface="Bodoni 72 Book" pitchFamily="2" charset="0"/>
             </a:endParaRPr>
           </a:p>
         </p:txBody>
@@ -5177,9 +5084,7 @@
             <a:avLst/>
           </a:prstGeom>
           <a:solidFill>
-            <a:schemeClr val="accent1">
-              <a:lumMod val="75000"/>
-            </a:schemeClr>
+            <a:srgbClr val="F4F1EC"/>
           </a:solidFill>
           <a:ln>
             <a:noFill/>
@@ -5195,9 +5100,9 @@
             <a:r>
               <a:rPr lang="en-US" sz="950" dirty="0">
                 <a:solidFill>
-                  <a:schemeClr val="bg1"/>
+                  <a:srgbClr val="1A2A42"/>
                 </a:solidFill>
-                <a:latin typeface="Calibri" pitchFamily="34" charset="0"/>
+                <a:latin typeface="Aptos" panose="020B0004020202020204" pitchFamily="34" charset="0"/>
                 <a:ea typeface="Calibri" pitchFamily="34" charset="-122"/>
                 <a:cs typeface="Calibri" pitchFamily="34" charset="-120"/>
               </a:rPr>
@@ -5205,8 +5110,9 @@
             </a:r>
             <a:endParaRPr lang="en-US" sz="950" dirty="0">
               <a:solidFill>
-                <a:schemeClr val="bg1"/>
+                <a:srgbClr val="1A2A42"/>
               </a:solidFill>
+              <a:latin typeface="Aptos" panose="020B0004020202020204" pitchFamily="34" charset="0"/>
             </a:endParaRPr>
           </a:p>
         </p:txBody>
@@ -5226,9 +5132,7 @@
             <a:avLst/>
           </a:prstGeom>
           <a:solidFill>
-            <a:schemeClr val="accent1">
-              <a:lumMod val="75000"/>
-            </a:schemeClr>
+            <a:srgbClr val="F4F1EC"/>
           </a:solidFill>
           <a:ln w="12700">
             <a:noFill/>
@@ -5269,9 +5173,7 @@
             <a:avLst/>
           </a:prstGeom>
           <a:solidFill>
-            <a:schemeClr val="accent1">
-              <a:lumMod val="75000"/>
-            </a:schemeClr>
+            <a:srgbClr val="F4F1EC"/>
           </a:solidFill>
           <a:ln w="12700">
             <a:noFill/>
@@ -5302,10 +5204,10 @@
           <a:blip r:embed="rId8">
             <a:duotone>
               <a:prstClr val="black"/>
-              <a:schemeClr val="accent2">
+              <a:srgbClr val="1A2A42">
                 <a:tint val="45000"/>
                 <a:satMod val="400000"/>
-              </a:schemeClr>
+              </a:srgbClr>
             </a:duotone>
             <a:extLst>
               <a:ext uri="{BEBA8EAE-BF5A-486C-A8C5-ECC9F3942E4B}">
@@ -5332,9 +5234,7 @@
             <a:avLst/>
           </a:prstGeom>
           <a:solidFill>
-            <a:schemeClr val="accent1">
-              <a:lumMod val="75000"/>
-            </a:schemeClr>
+            <a:srgbClr val="F4F1EC"/>
           </a:solidFill>
           <a:ln>
             <a:noFill/>
@@ -5356,9 +5256,7 @@
             <a:avLst/>
           </a:prstGeom>
           <a:solidFill>
-            <a:schemeClr val="accent1">
-              <a:lumMod val="75000"/>
-            </a:schemeClr>
+            <a:srgbClr val="F4F1EC"/>
           </a:solidFill>
           <a:ln>
             <a:noFill/>
@@ -5374,9 +5272,9 @@
             <a:r>
               <a:rPr lang="en-US" sz="1250" b="1" dirty="0">
                 <a:solidFill>
-                  <a:srgbClr val="FFC000"/>
+                  <a:srgbClr val="C0994B"/>
                 </a:solidFill>
-                <a:latin typeface="Calibri" pitchFamily="34" charset="0"/>
+                <a:latin typeface="BODONI 72 BOOK" pitchFamily="2" charset="0"/>
                 <a:ea typeface="Calibri" pitchFamily="34" charset="-122"/>
                 <a:cs typeface="Calibri" pitchFamily="34" charset="-120"/>
               </a:rPr>
@@ -5384,8 +5282,9 @@
             </a:r>
             <a:endParaRPr lang="en-US" sz="1250" dirty="0">
               <a:solidFill>
-                <a:srgbClr val="FFC000"/>
+                <a:srgbClr val="C0994B"/>
               </a:solidFill>
+              <a:latin typeface="Bodoni 72 Book" pitchFamily="2" charset="0"/>
             </a:endParaRPr>
           </a:p>
         </p:txBody>
@@ -5405,9 +5304,7 @@
             <a:avLst/>
           </a:prstGeom>
           <a:solidFill>
-            <a:schemeClr val="accent1">
-              <a:lumMod val="75000"/>
-            </a:schemeClr>
+            <a:srgbClr val="F4F1EC"/>
           </a:solidFill>
           <a:ln>
             <a:noFill/>
@@ -5423,9 +5320,9 @@
             <a:r>
               <a:rPr lang="en-US" sz="950" dirty="0">
                 <a:solidFill>
-                  <a:schemeClr val="bg1"/>
+                  <a:srgbClr val="1A2A42"/>
                 </a:solidFill>
-                <a:latin typeface="Calibri" pitchFamily="34" charset="0"/>
+                <a:latin typeface="Aptos" panose="020B0004020202020204" pitchFamily="34" charset="0"/>
                 <a:ea typeface="Calibri" pitchFamily="34" charset="-122"/>
                 <a:cs typeface="Calibri" pitchFamily="34" charset="-120"/>
               </a:rPr>
@@ -5433,8 +5330,9 @@
             </a:r>
             <a:endParaRPr lang="en-US" sz="950" dirty="0">
               <a:solidFill>
-                <a:schemeClr val="bg1"/>
+                <a:srgbClr val="1A2A42"/>
               </a:solidFill>
+              <a:latin typeface="Aptos" panose="020B0004020202020204" pitchFamily="34" charset="0"/>
             </a:endParaRPr>
           </a:p>
         </p:txBody>
@@ -5454,9 +5352,7 @@
             <a:avLst/>
           </a:prstGeom>
           <a:solidFill>
-            <a:schemeClr val="accent1">
-              <a:lumMod val="75000"/>
-            </a:schemeClr>
+            <a:srgbClr val="F4F1EC"/>
           </a:solidFill>
           <a:ln w="12700">
             <a:noFill/>
@@ -5497,9 +5393,7 @@
             <a:avLst/>
           </a:prstGeom>
           <a:solidFill>
-            <a:schemeClr val="accent1">
-              <a:lumMod val="75000"/>
-            </a:schemeClr>
+            <a:srgbClr val="F4F1EC"/>
           </a:solidFill>
           <a:ln w="12700">
             <a:noFill/>
@@ -5530,10 +5424,10 @@
           <a:blip r:embed="rId10">
             <a:duotone>
               <a:prstClr val="black"/>
-              <a:schemeClr val="accent2">
+              <a:srgbClr val="1A2A42">
                 <a:tint val="45000"/>
                 <a:satMod val="400000"/>
-              </a:schemeClr>
+              </a:srgbClr>
             </a:duotone>
           </a:blip>
           <a:stretch>
@@ -5549,9 +5443,7 @@
             <a:avLst/>
           </a:prstGeom>
           <a:solidFill>
-            <a:schemeClr val="accent1">
-              <a:lumMod val="75000"/>
-            </a:schemeClr>
+            <a:srgbClr val="F4F1EC"/>
           </a:solidFill>
           <a:ln>
             <a:noFill/>
@@ -5573,9 +5465,7 @@
             <a:avLst/>
           </a:prstGeom>
           <a:solidFill>
-            <a:schemeClr val="accent1">
-              <a:lumMod val="75000"/>
-            </a:schemeClr>
+            <a:srgbClr val="F4F1EC"/>
           </a:solidFill>
           <a:ln>
             <a:noFill/>
@@ -5591,9 +5481,9 @@
             <a:r>
               <a:rPr lang="en-US" sz="1250" b="1" dirty="0">
                 <a:solidFill>
-                  <a:srgbClr val="FFC000"/>
+                  <a:srgbClr val="C0994B"/>
                 </a:solidFill>
-                <a:latin typeface="Calibri" pitchFamily="34" charset="0"/>
+                <a:latin typeface="BODONI 72 BOOK" pitchFamily="2" charset="0"/>
                 <a:ea typeface="Calibri" pitchFamily="34" charset="-122"/>
                 <a:cs typeface="Calibri" pitchFamily="34" charset="-120"/>
               </a:rPr>
@@ -5601,8 +5491,9 @@
             </a:r>
             <a:endParaRPr lang="en-US" sz="1250" dirty="0">
               <a:solidFill>
-                <a:srgbClr val="FFC000"/>
+                <a:srgbClr val="C0994B"/>
               </a:solidFill>
+              <a:latin typeface="Bodoni 72 Book" pitchFamily="2" charset="0"/>
             </a:endParaRPr>
           </a:p>
         </p:txBody>
@@ -5622,9 +5513,7 @@
             <a:avLst/>
           </a:prstGeom>
           <a:solidFill>
-            <a:schemeClr val="accent1">
-              <a:lumMod val="75000"/>
-            </a:schemeClr>
+            <a:srgbClr val="F4F1EC"/>
           </a:solidFill>
           <a:ln>
             <a:noFill/>
@@ -5640,9 +5529,9 @@
             <a:r>
               <a:rPr lang="en-US" sz="950" dirty="0">
                 <a:solidFill>
-                  <a:schemeClr val="bg1"/>
+                  <a:srgbClr val="1A2A42"/>
                 </a:solidFill>
-                <a:latin typeface="Calibri" pitchFamily="34" charset="0"/>
+                <a:latin typeface="Aptos" panose="020B0004020202020204" pitchFamily="34" charset="0"/>
                 <a:ea typeface="Calibri" pitchFamily="34" charset="-122"/>
                 <a:cs typeface="Calibri" pitchFamily="34" charset="-120"/>
               </a:rPr>
@@ -5650,8 +5539,9 @@
             </a:r>
             <a:endParaRPr lang="en-US" sz="950" dirty="0">
               <a:solidFill>
-                <a:schemeClr val="bg1"/>
+                <a:srgbClr val="1A2A42"/>
               </a:solidFill>
+              <a:latin typeface="Aptos" panose="020B0004020202020204" pitchFamily="34" charset="0"/>
             </a:endParaRPr>
           </a:p>
         </p:txBody>
@@ -5667,6 +5557,14 @@
 <file path=ppt/slides/slide6.xml><?xml version="1.0" encoding="utf-8"?>
 <p:sld xmlns:a="http://schemas.openxmlformats.org/drawingml/2006/main" xmlns:r="http://schemas.openxmlformats.org/officeDocument/2006/relationships" xmlns:p="http://schemas.openxmlformats.org/presentationml/2006/main">
   <p:cSld>
+    <p:bg>
+      <p:bgPr>
+        <a:solidFill>
+          <a:srgbClr val="1A2A42"/>
+        </a:solidFill>
+        <a:effectLst/>
+      </p:bgPr>
+    </p:bg>
     <p:spTree>
       <p:nvGrpSpPr>
         <p:cNvPr id="1" name=""/>
@@ -5708,9 +5606,9 @@
             <a:r>
               <a:rPr lang="en-US" sz="2600" b="1" dirty="0">
                 <a:solidFill>
-                  <a:srgbClr val="FFC000"/>
+                  <a:srgbClr val="C0994B"/>
                 </a:solidFill>
-                <a:latin typeface="Calibri" pitchFamily="34" charset="0"/>
+                <a:latin typeface="BODONI 72 BOOK" pitchFamily="2" charset="0"/>
                 <a:ea typeface="Calibri" pitchFamily="34" charset="-122"/>
                 <a:cs typeface="Calibri" pitchFamily="34" charset="-120"/>
               </a:rPr>
@@ -5718,8 +5616,9 @@
             </a:r>
             <a:endParaRPr lang="en-US" sz="2600" dirty="0">
               <a:solidFill>
-                <a:srgbClr val="FFC000"/>
+                <a:srgbClr val="C0994B"/>
               </a:solidFill>
+              <a:latin typeface="Bodoni 72 Book" pitchFamily="2" charset="0"/>
             </a:endParaRPr>
           </a:p>
         </p:txBody>
@@ -5739,9 +5638,7 @@
             <a:avLst/>
           </a:prstGeom>
           <a:solidFill>
-            <a:schemeClr val="accent1">
-              <a:lumMod val="75000"/>
-            </a:schemeClr>
+            <a:srgbClr val="F4F1EC"/>
           </a:solidFill>
           <a:ln w="12700">
             <a:noFill/>
@@ -5761,7 +5658,7 @@
           <a:p>
             <a:endParaRPr lang="en-GB">
               <a:solidFill>
-                <a:srgbClr val="FFC000"/>
+                <a:srgbClr val="1A2A42"/>
               </a:solidFill>
             </a:endParaRPr>
           </a:p>
@@ -5795,7 +5692,9 @@
           <a:bodyPr/>
           <a:lstStyle/>
           <a:p>
-            <a:endParaRPr lang="en-GB"/>
+            <a:endParaRPr lang="en-GB">
+              <a:latin typeface="Bodoni 72 Book" pitchFamily="2" charset="0"/>
+            </a:endParaRPr>
           </a:p>
         </p:txBody>
       </p:sp>
@@ -5826,7 +5725,7 @@
             <a:r>
               <a:rPr lang="en-US" sz="1600" b="1" dirty="0">
                 <a:solidFill>
-                  <a:srgbClr val="FFC000"/>
+                  <a:srgbClr val="C0994B"/>
                 </a:solidFill>
                 <a:latin typeface="Calibri" pitchFamily="34" charset="0"/>
                 <a:ea typeface="Calibri" pitchFamily="34" charset="-122"/>
@@ -5836,7 +5735,7 @@
             </a:r>
             <a:endParaRPr lang="en-US" sz="1600" dirty="0">
               <a:solidFill>
-                <a:srgbClr val="FFC000"/>
+                <a:srgbClr val="C0994B"/>
               </a:solidFill>
             </a:endParaRPr>
           </a:p>
@@ -5853,12 +5752,13 @@
         <p:blipFill>
           <a:blip r:embed="rId3">
             <a:duotone>
-              <a:schemeClr val="accent4">
-                <a:shade val="45000"/>
-                <a:satMod val="135000"/>
-              </a:schemeClr>
-              <a:prstClr val="white"/>
+              <a:prstClr val="black"/>
+              <a:srgbClr val="1A2A42">
+                <a:tint val="45000"/>
+                <a:satMod val="400000"/>
+              </a:srgbClr>
             </a:duotone>
+            <a:alphaModFix amt="20000"/>
             <a:extLst>
               <a:ext uri="{BEBA8EAE-BF5A-486C-A8C5-ECC9F3942E4B}">
                 <a14:imgProps xmlns:a14="http://schemas.microsoft.com/office/drawing/2010/main">
@@ -5883,6 +5783,7 @@
           <a:prstGeom prst="rect">
             <a:avLst/>
           </a:prstGeom>
+          <a:noFill/>
         </p:spPr>
       </p:pic>
       <p:sp>
@@ -5912,9 +5813,9 @@
             <a:r>
               <a:rPr lang="en-US" sz="1300" b="1" dirty="0">
                 <a:solidFill>
-                  <a:srgbClr val="FFC000"/>
+                  <a:srgbClr val="C0994B"/>
                 </a:solidFill>
-                <a:latin typeface="Calibri" pitchFamily="34" charset="0"/>
+                <a:latin typeface="BODONI 72 BOOK" pitchFamily="2" charset="0"/>
                 <a:ea typeface="Calibri" pitchFamily="34" charset="-122"/>
                 <a:cs typeface="Calibri" pitchFamily="34" charset="-120"/>
               </a:rPr>
@@ -5922,8 +5823,9 @@
             </a:r>
             <a:endParaRPr lang="en-US" sz="1300" dirty="0">
               <a:solidFill>
-                <a:srgbClr val="FFC000"/>
+                <a:srgbClr val="C0994B"/>
               </a:solidFill>
+              <a:latin typeface="Bodoni 72 Book" pitchFamily="2" charset="0"/>
             </a:endParaRPr>
           </a:p>
         </p:txBody>
@@ -5955,9 +5857,9 @@
             <a:r>
               <a:rPr lang="en-US" sz="1050" dirty="0">
                 <a:solidFill>
-                  <a:schemeClr val="bg1"/>
+                  <a:srgbClr val="1A2A42"/>
                 </a:solidFill>
-                <a:latin typeface="Calibri" pitchFamily="34" charset="0"/>
+                <a:latin typeface="Aptos" panose="020B0004020202020204" pitchFamily="34" charset="0"/>
                 <a:ea typeface="Calibri" pitchFamily="34" charset="-122"/>
                 <a:cs typeface="Calibri" pitchFamily="34" charset="-120"/>
               </a:rPr>
@@ -5965,8 +5867,9 @@
             </a:r>
             <a:endParaRPr lang="en-US" sz="1050" dirty="0">
               <a:solidFill>
-                <a:schemeClr val="bg1"/>
+                <a:srgbClr val="1A2A42"/>
               </a:solidFill>
+              <a:latin typeface="Aptos" panose="020B0004020202020204" pitchFamily="34" charset="0"/>
             </a:endParaRPr>
           </a:p>
         </p:txBody>
@@ -5986,9 +5889,7 @@
             <a:avLst/>
           </a:prstGeom>
           <a:solidFill>
-            <a:schemeClr val="accent1">
-              <a:lumMod val="75000"/>
-            </a:schemeClr>
+            <a:srgbClr val="F4F1EC"/>
           </a:solidFill>
           <a:ln w="12700">
             <a:noFill/>
@@ -6006,7 +5907,11 @@
           <a:bodyPr/>
           <a:lstStyle/>
           <a:p>
-            <a:endParaRPr lang="en-GB"/>
+            <a:endParaRPr lang="en-GB">
+              <a:solidFill>
+                <a:srgbClr val="1A2A42"/>
+              </a:solidFill>
+            </a:endParaRPr>
           </a:p>
         </p:txBody>
       </p:sp>
@@ -6036,7 +5941,7 @@
           <a:bodyPr/>
           <a:lstStyle/>
           <a:p>
-            <a:endParaRPr lang="en-GB"/>
+            <a:endParaRPr lang="en-GB" dirty="0"/>
           </a:p>
         </p:txBody>
       </p:sp>
@@ -6067,9 +5972,9 @@
             <a:r>
               <a:rPr lang="en-US" sz="1600" b="1" dirty="0">
                 <a:solidFill>
-                  <a:srgbClr val="FFC000"/>
+                  <a:srgbClr val="C0994B"/>
                 </a:solidFill>
-                <a:latin typeface="Calibri" pitchFamily="34" charset="0"/>
+                <a:latin typeface="BODONI 72 BOOK" pitchFamily="2" charset="0"/>
                 <a:ea typeface="Calibri" pitchFamily="34" charset="-122"/>
                 <a:cs typeface="Calibri" pitchFamily="34" charset="-120"/>
               </a:rPr>
@@ -6077,8 +5982,9 @@
             </a:r>
             <a:endParaRPr lang="en-US" sz="1600" dirty="0">
               <a:solidFill>
-                <a:srgbClr val="FFC000"/>
+                <a:srgbClr val="C0994B"/>
               </a:solidFill>
+              <a:latin typeface="Bodoni 72 Book" pitchFamily="2" charset="0"/>
             </a:endParaRPr>
           </a:p>
         </p:txBody>
@@ -6094,12 +6000,13 @@
         <p:blipFill>
           <a:blip r:embed="rId5">
             <a:duotone>
-              <a:schemeClr val="accent4">
-                <a:shade val="45000"/>
-                <a:satMod val="135000"/>
-              </a:schemeClr>
-              <a:prstClr val="white"/>
+              <a:prstClr val="black"/>
+              <a:srgbClr val="1A2A42">
+                <a:tint val="45000"/>
+                <a:satMod val="400000"/>
+              </a:srgbClr>
             </a:duotone>
+            <a:alphaModFix amt="20000"/>
             <a:extLst>
               <a:ext uri="{BEBA8EAE-BF5A-486C-A8C5-ECC9F3942E4B}">
                 <a14:imgProps xmlns:a14="http://schemas.microsoft.com/office/drawing/2010/main">
@@ -6153,9 +6060,9 @@
             <a:r>
               <a:rPr lang="en-US" sz="1300" b="1" dirty="0">
                 <a:solidFill>
-                  <a:srgbClr val="FFC000"/>
+                  <a:srgbClr val="C0994B"/>
                 </a:solidFill>
-                <a:latin typeface="Calibri" pitchFamily="34" charset="0"/>
+                <a:latin typeface="BODONI 72 BOOK" pitchFamily="2" charset="0"/>
                 <a:ea typeface="Calibri" pitchFamily="34" charset="-122"/>
                 <a:cs typeface="Calibri" pitchFamily="34" charset="-120"/>
               </a:rPr>
@@ -6163,8 +6070,9 @@
             </a:r>
             <a:endParaRPr lang="en-US" sz="1300" dirty="0">
               <a:solidFill>
-                <a:srgbClr val="FFC000"/>
+                <a:srgbClr val="C0994B"/>
               </a:solidFill>
+              <a:latin typeface="Bodoni 72 Book" pitchFamily="2" charset="0"/>
             </a:endParaRPr>
           </a:p>
         </p:txBody>
@@ -6196,9 +6104,9 @@
             <a:r>
               <a:rPr lang="en-US" sz="1050" dirty="0">
                 <a:solidFill>
-                  <a:schemeClr val="bg1"/>
+                  <a:srgbClr val="1A2A42"/>
                 </a:solidFill>
-                <a:latin typeface="Calibri" pitchFamily="34" charset="0"/>
+                <a:latin typeface="Aptos" panose="020B0004020202020204" pitchFamily="34" charset="0"/>
                 <a:ea typeface="Calibri" pitchFamily="34" charset="-122"/>
                 <a:cs typeface="Calibri" pitchFamily="34" charset="-120"/>
               </a:rPr>
@@ -6206,8 +6114,9 @@
             </a:r>
             <a:endParaRPr lang="en-US" sz="1050" dirty="0">
               <a:solidFill>
-                <a:schemeClr val="bg1"/>
+                <a:srgbClr val="1A2A42"/>
               </a:solidFill>
+              <a:latin typeface="Aptos" panose="020B0004020202020204" pitchFamily="34" charset="0"/>
             </a:endParaRPr>
           </a:p>
         </p:txBody>
@@ -6227,9 +6136,7 @@
             <a:avLst/>
           </a:prstGeom>
           <a:solidFill>
-            <a:schemeClr val="accent1">
-              <a:lumMod val="75000"/>
-            </a:schemeClr>
+            <a:srgbClr val="F4F1EC"/>
           </a:solidFill>
           <a:ln w="12700">
             <a:noFill/>
@@ -6247,7 +6154,11 @@
           <a:bodyPr/>
           <a:lstStyle/>
           <a:p>
-            <a:endParaRPr lang="en-GB"/>
+            <a:endParaRPr lang="en-GB" dirty="0">
+              <a:solidFill>
+                <a:srgbClr val="1A2A42"/>
+              </a:solidFill>
+            </a:endParaRPr>
           </a:p>
         </p:txBody>
       </p:sp>
@@ -6279,7 +6190,9 @@
           <a:bodyPr/>
           <a:lstStyle/>
           <a:p>
-            <a:endParaRPr lang="en-GB"/>
+            <a:endParaRPr lang="en-GB">
+              <a:latin typeface="Bodoni 72 Book" pitchFamily="2" charset="0"/>
+            </a:endParaRPr>
           </a:p>
         </p:txBody>
       </p:sp>
@@ -6310,7 +6223,7 @@
             <a:r>
               <a:rPr lang="en-US" sz="1600" b="1" dirty="0">
                 <a:solidFill>
-                  <a:srgbClr val="FFC000"/>
+                  <a:srgbClr val="C0994B"/>
                 </a:solidFill>
                 <a:latin typeface="Calibri" pitchFamily="34" charset="0"/>
                 <a:ea typeface="Calibri" pitchFamily="34" charset="-122"/>
@@ -6320,7 +6233,7 @@
             </a:r>
             <a:endParaRPr lang="en-US" sz="1600" dirty="0">
               <a:solidFill>
-                <a:srgbClr val="FFC000"/>
+                <a:srgbClr val="C0994B"/>
               </a:solidFill>
             </a:endParaRPr>
           </a:p>
@@ -6337,12 +6250,13 @@
         <p:blipFill>
           <a:blip r:embed="rId7">
             <a:duotone>
-              <a:schemeClr val="accent4">
-                <a:shade val="45000"/>
-                <a:satMod val="135000"/>
-              </a:schemeClr>
-              <a:prstClr val="white"/>
+              <a:prstClr val="black"/>
+              <a:srgbClr val="1A2A42">
+                <a:tint val="45000"/>
+                <a:satMod val="400000"/>
+              </a:srgbClr>
             </a:duotone>
+            <a:alphaModFix amt="20000"/>
             <a:extLst>
               <a:ext uri="{BEBA8EAE-BF5A-486C-A8C5-ECC9F3942E4B}">
                 <a14:imgProps xmlns:a14="http://schemas.microsoft.com/office/drawing/2010/main">
@@ -6396,9 +6310,9 @@
             <a:r>
               <a:rPr lang="en-US" sz="1300" b="1" dirty="0">
                 <a:solidFill>
-                  <a:srgbClr val="FFC000"/>
+                  <a:srgbClr val="C0994B"/>
                 </a:solidFill>
-                <a:latin typeface="Calibri" pitchFamily="34" charset="0"/>
+                <a:latin typeface="BODONI 72 BOOK" pitchFamily="2" charset="0"/>
                 <a:ea typeface="Calibri" pitchFamily="34" charset="-122"/>
                 <a:cs typeface="Calibri" pitchFamily="34" charset="-120"/>
               </a:rPr>
@@ -6406,8 +6320,9 @@
             </a:r>
             <a:endParaRPr lang="en-US" sz="1300" dirty="0">
               <a:solidFill>
-                <a:srgbClr val="FFC000"/>
+                <a:srgbClr val="C0994B"/>
               </a:solidFill>
+              <a:latin typeface="Bodoni 72 Book" pitchFamily="2" charset="0"/>
             </a:endParaRPr>
           </a:p>
         </p:txBody>
@@ -6439,9 +6354,9 @@
             <a:r>
               <a:rPr lang="en-US" sz="1050" dirty="0">
                 <a:solidFill>
-                  <a:schemeClr val="bg1"/>
+                  <a:srgbClr val="1A2A42"/>
                 </a:solidFill>
-                <a:latin typeface="Calibri" pitchFamily="34" charset="0"/>
+                <a:latin typeface="Aptos" panose="020B0004020202020204" pitchFamily="34" charset="0"/>
                 <a:ea typeface="Calibri" pitchFamily="34" charset="-122"/>
                 <a:cs typeface="Calibri" pitchFamily="34" charset="-120"/>
               </a:rPr>
@@ -6449,8 +6364,9 @@
             </a:r>
             <a:endParaRPr lang="en-US" sz="1050" dirty="0">
               <a:solidFill>
-                <a:schemeClr val="bg1"/>
+                <a:srgbClr val="1A2A42"/>
               </a:solidFill>
+              <a:latin typeface="Aptos" panose="020B0004020202020204" pitchFamily="34" charset="0"/>
             </a:endParaRPr>
           </a:p>
         </p:txBody>
@@ -6470,9 +6386,7 @@
             <a:avLst/>
           </a:prstGeom>
           <a:solidFill>
-            <a:schemeClr val="accent1">
-              <a:lumMod val="75000"/>
-            </a:schemeClr>
+            <a:srgbClr val="F4F1EC"/>
           </a:solidFill>
           <a:ln w="12700">
             <a:noFill/>
@@ -6490,7 +6404,11 @@
           <a:bodyPr/>
           <a:lstStyle/>
           <a:p>
-            <a:endParaRPr lang="en-GB"/>
+            <a:endParaRPr lang="en-GB">
+              <a:solidFill>
+                <a:srgbClr val="1A2A42"/>
+              </a:solidFill>
+            </a:endParaRPr>
           </a:p>
         </p:txBody>
       </p:sp>
@@ -6522,7 +6440,9 @@
           <a:bodyPr/>
           <a:lstStyle/>
           <a:p>
-            <a:endParaRPr lang="en-GB"/>
+            <a:endParaRPr lang="en-GB">
+              <a:latin typeface="Bodoni 72 Book" pitchFamily="2" charset="0"/>
+            </a:endParaRPr>
           </a:p>
         </p:txBody>
       </p:sp>
@@ -6553,7 +6473,7 @@
             <a:r>
               <a:rPr lang="en-US" sz="1600" b="1" dirty="0">
                 <a:solidFill>
-                  <a:srgbClr val="FFC000"/>
+                  <a:srgbClr val="C0994B"/>
                 </a:solidFill>
                 <a:latin typeface="Calibri" pitchFamily="34" charset="0"/>
                 <a:ea typeface="Calibri" pitchFamily="34" charset="-122"/>
@@ -6563,7 +6483,7 @@
             </a:r>
             <a:endParaRPr lang="en-US" sz="1600" dirty="0">
               <a:solidFill>
-                <a:srgbClr val="FFC000"/>
+                <a:srgbClr val="C0994B"/>
               </a:solidFill>
             </a:endParaRPr>
           </a:p>
@@ -6580,12 +6500,13 @@
         <p:blipFill>
           <a:blip r:embed="rId9">
             <a:duotone>
-              <a:schemeClr val="accent4">
-                <a:shade val="45000"/>
-                <a:satMod val="135000"/>
-              </a:schemeClr>
-              <a:prstClr val="white"/>
+              <a:prstClr val="black"/>
+              <a:srgbClr val="1A2A42">
+                <a:tint val="45000"/>
+                <a:satMod val="400000"/>
+              </a:srgbClr>
             </a:duotone>
+            <a:alphaModFix amt="20000"/>
             <a:extLst>
               <a:ext uri="{BEBA8EAE-BF5A-486C-A8C5-ECC9F3942E4B}">
                 <a14:imgProps xmlns:a14="http://schemas.microsoft.com/office/drawing/2010/main">
@@ -6639,9 +6560,9 @@
             <a:r>
               <a:rPr lang="en-US" sz="1300" b="1" dirty="0">
                 <a:solidFill>
-                  <a:srgbClr val="FFC000"/>
+                  <a:srgbClr val="C0994B"/>
                 </a:solidFill>
-                <a:latin typeface="Calibri" pitchFamily="34" charset="0"/>
+                <a:latin typeface="BODONI 72 BOOK" pitchFamily="2" charset="0"/>
                 <a:ea typeface="Calibri" pitchFamily="34" charset="-122"/>
                 <a:cs typeface="Calibri" pitchFamily="34" charset="-120"/>
               </a:rPr>
@@ -6649,8 +6570,9 @@
             </a:r>
             <a:endParaRPr lang="en-US" sz="1300" dirty="0">
               <a:solidFill>
-                <a:srgbClr val="FFC000"/>
+                <a:srgbClr val="C0994B"/>
               </a:solidFill>
+              <a:latin typeface="Bodoni 72 Book" pitchFamily="2" charset="0"/>
             </a:endParaRPr>
           </a:p>
         </p:txBody>
@@ -6682,9 +6604,9 @@
             <a:r>
               <a:rPr lang="en-US" sz="1050" dirty="0">
                 <a:solidFill>
-                  <a:schemeClr val="bg1"/>
+                  <a:srgbClr val="1A2A42"/>
                 </a:solidFill>
-                <a:latin typeface="Calibri" pitchFamily="34" charset="0"/>
+                <a:latin typeface="Aptos" panose="020B0004020202020204" pitchFamily="34" charset="0"/>
                 <a:ea typeface="Calibri" pitchFamily="34" charset="-122"/>
                 <a:cs typeface="Calibri" pitchFamily="34" charset="-120"/>
               </a:rPr>
@@ -6692,8 +6614,9 @@
             </a:r>
             <a:endParaRPr lang="en-US" sz="1050" dirty="0">
               <a:solidFill>
-                <a:schemeClr val="bg1"/>
+                <a:srgbClr val="1A2A42"/>
               </a:solidFill>
+              <a:latin typeface="Aptos" panose="020B0004020202020204" pitchFamily="34" charset="0"/>
             </a:endParaRPr>
           </a:p>
         </p:txBody>
@@ -6709,6 +6632,14 @@
 <file path=ppt/slides/slide7.xml><?xml version="1.0" encoding="utf-8"?>
 <p:sld xmlns:a="http://schemas.openxmlformats.org/drawingml/2006/main" xmlns:r="http://schemas.openxmlformats.org/officeDocument/2006/relationships" xmlns:p="http://schemas.openxmlformats.org/presentationml/2006/main">
   <p:cSld>
+    <p:bg>
+      <p:bgPr>
+        <a:solidFill>
+          <a:srgbClr val="1A2A42"/>
+        </a:solidFill>
+        <a:effectLst/>
+      </p:bgPr>
+    </p:bg>
     <p:spTree>
       <p:nvGrpSpPr>
         <p:cNvPr id="1" name=""/>
@@ -6750,9 +6681,9 @@
             <a:r>
               <a:rPr lang="en-US" sz="2200" b="1" dirty="0">
                 <a:solidFill>
-                  <a:srgbClr val="FFC000"/>
+                  <a:srgbClr val="C0994B"/>
                 </a:solidFill>
-                <a:latin typeface="Calibri" pitchFamily="34" charset="0"/>
+                <a:latin typeface="BODONI 72 BOOK" pitchFamily="2" charset="0"/>
                 <a:ea typeface="Calibri" pitchFamily="34" charset="-122"/>
                 <a:cs typeface="Calibri" pitchFamily="34" charset="-120"/>
               </a:rPr>
@@ -6760,8 +6691,9 @@
             </a:r>
             <a:endParaRPr lang="en-US" sz="2200" dirty="0">
               <a:solidFill>
-                <a:srgbClr val="FFC000"/>
+                <a:srgbClr val="C0994B"/>
               </a:solidFill>
+              <a:latin typeface="Bodoni 72 Book" pitchFamily="2" charset="0"/>
             </a:endParaRPr>
           </a:p>
         </p:txBody>
@@ -6781,7 +6713,7 @@
             <a:avLst/>
           </a:prstGeom>
           <a:solidFill>
-            <a:srgbClr val="FFC000"/>
+            <a:srgbClr val="C0994B"/>
           </a:solidFill>
           <a:ln w="12700">
             <a:noFill/>
@@ -6792,7 +6724,11 @@
           <a:bodyPr/>
           <a:lstStyle/>
           <a:p>
-            <a:endParaRPr lang="en-GB"/>
+            <a:endParaRPr lang="en-GB">
+              <a:solidFill>
+                <a:srgbClr val="C0994B"/>
+              </a:solidFill>
+            </a:endParaRPr>
           </a:p>
         </p:txBody>
       </p:sp>
@@ -6825,7 +6761,7 @@
                 <a:solidFill>
                   <a:srgbClr val="FFFFFF"/>
                 </a:solidFill>
-                <a:latin typeface="Calibri" pitchFamily="34" charset="0"/>
+                <a:latin typeface="BODONI 72 BOOK" pitchFamily="2" charset="0"/>
                 <a:ea typeface="Calibri" pitchFamily="34" charset="-122"/>
                 <a:cs typeface="Calibri" pitchFamily="34" charset="-120"/>
               </a:rPr>
@@ -6836,7 +6772,7 @@
                 <a:solidFill>
                   <a:schemeClr val="bg1"/>
                 </a:solidFill>
-                <a:latin typeface="Calibri" pitchFamily="34" charset="0"/>
+                <a:latin typeface="BODONI 72 BOOK" pitchFamily="2" charset="0"/>
                 <a:ea typeface="Calibri" pitchFamily="34" charset="-122"/>
                 <a:cs typeface="Calibri" pitchFamily="34" charset="-120"/>
               </a:rPr>
@@ -6846,6 +6782,7 @@
               <a:solidFill>
                 <a:schemeClr val="bg1"/>
               </a:solidFill>
+              <a:latin typeface="Bodoni 72 Book" pitchFamily="2" charset="0"/>
             </a:endParaRPr>
           </a:p>
         </p:txBody>
@@ -6865,9 +6802,7 @@
             <a:avLst/>
           </a:prstGeom>
           <a:solidFill>
-            <a:schemeClr val="accent1">
-              <a:lumMod val="75000"/>
-            </a:schemeClr>
+            <a:srgbClr val="F4F1EC"/>
           </a:solidFill>
           <a:ln w="12700">
             <a:noFill/>
@@ -6904,12 +6839,13 @@
         <p:blipFill>
           <a:blip r:embed="rId3">
             <a:duotone>
-              <a:schemeClr val="accent4">
-                <a:shade val="45000"/>
-                <a:satMod val="135000"/>
-              </a:schemeClr>
-              <a:prstClr val="white"/>
+              <a:prstClr val="black"/>
+              <a:srgbClr val="1A2A42">
+                <a:tint val="45000"/>
+                <a:satMod val="400000"/>
+              </a:srgbClr>
             </a:duotone>
+            <a:alphaModFix amt="20000"/>
             <a:extLst>
               <a:ext uri="{BEBA8EAE-BF5A-486C-A8C5-ECC9F3942E4B}">
                 <a14:imgProps xmlns:a14="http://schemas.microsoft.com/office/drawing/2010/main">
@@ -6935,9 +6871,7 @@
             <a:avLst/>
           </a:prstGeom>
           <a:solidFill>
-            <a:schemeClr val="accent1">
-              <a:lumMod val="75000"/>
-            </a:schemeClr>
+            <a:srgbClr val="F4F1EC"/>
           </a:solidFill>
           <a:ln>
             <a:noFill/>
@@ -6959,9 +6893,7 @@
             <a:avLst/>
           </a:prstGeom>
           <a:solidFill>
-            <a:schemeClr val="accent1">
-              <a:lumMod val="75000"/>
-            </a:schemeClr>
+            <a:srgbClr val="F4F1EC"/>
           </a:solidFill>
           <a:ln>
             <a:noFill/>
@@ -6977,18 +6909,20 @@
             <a:r>
               <a:rPr lang="en-US" sz="1100" dirty="0">
                 <a:solidFill>
-                  <a:schemeClr val="bg1"/>
+                  <a:srgbClr val="1A2A42"/>
                 </a:solidFill>
-                <a:latin typeface="Calibri" pitchFamily="34" charset="0"/>
+                <a:latin typeface="Aptos" panose="020B0004020202020204" pitchFamily="34" charset="0"/>
                 <a:ea typeface="Calibri" pitchFamily="34" charset="-122"/>
-                <a:cs typeface="Calibri" pitchFamily="34" charset="-120"/>
+                <a:cs typeface="Aparajita" panose="02020603050405020304" pitchFamily="18" charset="0"/>
               </a:rPr>
               <a:t>Human review step before CV scores are finalised</a:t>
             </a:r>
             <a:endParaRPr lang="en-US" sz="1100" dirty="0">
               <a:solidFill>
-                <a:schemeClr val="bg1"/>
+                <a:srgbClr val="1A2A42"/>
               </a:solidFill>
+              <a:latin typeface="Aptos" panose="020B0004020202020204" pitchFamily="34" charset="0"/>
+              <a:cs typeface="Aparajita" panose="02020603050405020304" pitchFamily="18" charset="0"/>
             </a:endParaRPr>
           </a:p>
         </p:txBody>
@@ -7008,9 +6942,7 @@
             <a:avLst/>
           </a:prstGeom>
           <a:solidFill>
-            <a:schemeClr val="accent1">
-              <a:lumMod val="75000"/>
-            </a:schemeClr>
+            <a:srgbClr val="F4F1EC"/>
           </a:solidFill>
           <a:ln w="12700">
             <a:noFill/>
@@ -7047,12 +6979,13 @@
         <p:blipFill>
           <a:blip r:embed="rId3">
             <a:duotone>
-              <a:schemeClr val="accent4">
-                <a:shade val="45000"/>
-                <a:satMod val="135000"/>
-              </a:schemeClr>
-              <a:prstClr val="white"/>
+              <a:prstClr val="black"/>
+              <a:srgbClr val="1A2A42">
+                <a:tint val="45000"/>
+                <a:satMod val="400000"/>
+              </a:srgbClr>
             </a:duotone>
+            <a:alphaModFix amt="20000"/>
             <a:extLst>
               <a:ext uri="{BEBA8EAE-BF5A-486C-A8C5-ECC9F3942E4B}">
                 <a14:imgProps xmlns:a14="http://schemas.microsoft.com/office/drawing/2010/main">
@@ -7078,9 +7011,7 @@
             <a:avLst/>
           </a:prstGeom>
           <a:solidFill>
-            <a:schemeClr val="accent1">
-              <a:lumMod val="75000"/>
-            </a:schemeClr>
+            <a:srgbClr val="F4F1EC"/>
           </a:solidFill>
           <a:ln>
             <a:noFill/>
@@ -7102,9 +7033,7 @@
             <a:avLst/>
           </a:prstGeom>
           <a:solidFill>
-            <a:schemeClr val="accent1">
-              <a:lumMod val="75000"/>
-            </a:schemeClr>
+            <a:srgbClr val="F4F1EC"/>
           </a:solidFill>
           <a:ln>
             <a:noFill/>
@@ -7120,18 +7049,20 @@
             <a:r>
               <a:rPr lang="en-US" sz="1100" dirty="0">
                 <a:solidFill>
-                  <a:schemeClr val="bg1"/>
+                  <a:srgbClr val="1A2A42"/>
                 </a:solidFill>
-                <a:latin typeface="Calibri" pitchFamily="34" charset="0"/>
+                <a:latin typeface="Aptos" panose="020B0004020202020204" pitchFamily="34" charset="0"/>
                 <a:ea typeface="Calibri" pitchFamily="34" charset="-122"/>
-                <a:cs typeface="Calibri" pitchFamily="34" charset="-120"/>
+                <a:cs typeface="Aparajita" panose="02020603050405020304" pitchFamily="18" charset="0"/>
               </a:rPr>
               <a:t>Multi-language CV support beyond German &amp; English</a:t>
             </a:r>
             <a:endParaRPr lang="en-US" sz="1100" dirty="0">
               <a:solidFill>
-                <a:schemeClr val="bg1"/>
+                <a:srgbClr val="1A2A42"/>
               </a:solidFill>
+              <a:latin typeface="Aptos" panose="020B0004020202020204" pitchFamily="34" charset="0"/>
+              <a:cs typeface="Aparajita" panose="02020603050405020304" pitchFamily="18" charset="0"/>
             </a:endParaRPr>
           </a:p>
         </p:txBody>
@@ -7151,9 +7082,7 @@
             <a:avLst/>
           </a:prstGeom>
           <a:solidFill>
-            <a:schemeClr val="accent1">
-              <a:lumMod val="75000"/>
-            </a:schemeClr>
+            <a:srgbClr val="F4F1EC"/>
           </a:solidFill>
           <a:ln w="12700">
             <a:noFill/>
@@ -7190,12 +7119,13 @@
         <p:blipFill>
           <a:blip r:embed="rId3">
             <a:duotone>
-              <a:schemeClr val="accent4">
-                <a:shade val="45000"/>
-                <a:satMod val="135000"/>
-              </a:schemeClr>
-              <a:prstClr val="white"/>
+              <a:prstClr val="black"/>
+              <a:srgbClr val="1A2A42">
+                <a:tint val="45000"/>
+                <a:satMod val="400000"/>
+              </a:srgbClr>
             </a:duotone>
+            <a:alphaModFix amt="20000"/>
             <a:extLst>
               <a:ext uri="{BEBA8EAE-BF5A-486C-A8C5-ECC9F3942E4B}">
                 <a14:imgProps xmlns:a14="http://schemas.microsoft.com/office/drawing/2010/main">
@@ -7221,9 +7151,7 @@
             <a:avLst/>
           </a:prstGeom>
           <a:solidFill>
-            <a:schemeClr val="accent1">
-              <a:lumMod val="75000"/>
-            </a:schemeClr>
+            <a:srgbClr val="F4F1EC"/>
           </a:solidFill>
           <a:ln>
             <a:noFill/>
@@ -7245,9 +7173,7 @@
             <a:avLst/>
           </a:prstGeom>
           <a:solidFill>
-            <a:schemeClr val="accent1">
-              <a:lumMod val="75000"/>
-            </a:schemeClr>
+            <a:srgbClr val="F4F1EC"/>
           </a:solidFill>
           <a:ln>
             <a:noFill/>
@@ -7263,18 +7189,20 @@
             <a:r>
               <a:rPr lang="en-US" sz="1100" dirty="0">
                 <a:solidFill>
-                  <a:schemeClr val="bg1"/>
+                  <a:srgbClr val="1A2A42"/>
                 </a:solidFill>
-                <a:latin typeface="Calibri" pitchFamily="34" charset="0"/>
+                <a:latin typeface="Aptos" panose="020B0004020202020204" pitchFamily="34" charset="0"/>
                 <a:ea typeface="Calibri" pitchFamily="34" charset="-122"/>
-                <a:cs typeface="Calibri" pitchFamily="34" charset="-120"/>
+                <a:cs typeface="Aparajita" panose="02020603050405020304" pitchFamily="18" charset="0"/>
               </a:rPr>
               <a:t>Structured onboarding sub-process in Camunda</a:t>
             </a:r>
             <a:endParaRPr lang="en-US" sz="1100" dirty="0">
               <a:solidFill>
-                <a:schemeClr val="bg1"/>
+                <a:srgbClr val="1A2A42"/>
               </a:solidFill>
+              <a:latin typeface="Aptos" panose="020B0004020202020204" pitchFamily="34" charset="0"/>
+              <a:cs typeface="Aparajita" panose="02020603050405020304" pitchFamily="18" charset="0"/>
             </a:endParaRPr>
           </a:p>
         </p:txBody>
@@ -7294,9 +7222,7 @@
             <a:avLst/>
           </a:prstGeom>
           <a:solidFill>
-            <a:schemeClr val="accent1">
-              <a:lumMod val="75000"/>
-            </a:schemeClr>
+            <a:srgbClr val="F4F1EC"/>
           </a:solidFill>
           <a:ln w="12700">
             <a:noFill/>
@@ -7333,12 +7259,13 @@
         <p:blipFill>
           <a:blip r:embed="rId3">
             <a:duotone>
-              <a:schemeClr val="accent4">
-                <a:shade val="45000"/>
-                <a:satMod val="135000"/>
-              </a:schemeClr>
-              <a:prstClr val="white"/>
+              <a:prstClr val="black"/>
+              <a:srgbClr val="1A2A42">
+                <a:tint val="45000"/>
+                <a:satMod val="400000"/>
+              </a:srgbClr>
             </a:duotone>
+            <a:alphaModFix amt="20000"/>
             <a:extLst>
               <a:ext uri="{BEBA8EAE-BF5A-486C-A8C5-ECC9F3942E4B}">
                 <a14:imgProps xmlns:a14="http://schemas.microsoft.com/office/drawing/2010/main">
@@ -7364,9 +7291,7 @@
             <a:avLst/>
           </a:prstGeom>
           <a:solidFill>
-            <a:schemeClr val="accent1">
-              <a:lumMod val="75000"/>
-            </a:schemeClr>
+            <a:srgbClr val="F4F1EC"/>
           </a:solidFill>
           <a:ln>
             <a:noFill/>
@@ -7388,9 +7313,7 @@
             <a:avLst/>
           </a:prstGeom>
           <a:solidFill>
-            <a:schemeClr val="accent1">
-              <a:lumMod val="75000"/>
-            </a:schemeClr>
+            <a:srgbClr val="F4F1EC"/>
           </a:solidFill>
           <a:ln>
             <a:noFill/>
@@ -7406,18 +7329,20 @@
             <a:r>
               <a:rPr lang="en-US" sz="1100" dirty="0">
                 <a:solidFill>
-                  <a:schemeClr val="bg1"/>
+                  <a:srgbClr val="1A2A42"/>
                 </a:solidFill>
-                <a:latin typeface="Calibri" pitchFamily="34" charset="0"/>
+                <a:latin typeface="Aptos" panose="020B0004020202020204" pitchFamily="34" charset="0"/>
                 <a:ea typeface="Calibri" pitchFamily="34" charset="-122"/>
-                <a:cs typeface="Calibri" pitchFamily="34" charset="-120"/>
+                <a:cs typeface="Aparajita" panose="02020603050405020304" pitchFamily="18" charset="0"/>
               </a:rPr>
               <a:t>Candidate self-service portal for status tracking</a:t>
             </a:r>
             <a:endParaRPr lang="en-US" sz="1100" dirty="0">
               <a:solidFill>
-                <a:schemeClr val="bg1"/>
+                <a:srgbClr val="1A2A42"/>
               </a:solidFill>
+              <a:latin typeface="Aptos" panose="020B0004020202020204" pitchFamily="34" charset="0"/>
+              <a:cs typeface="Aparajita" panose="02020603050405020304" pitchFamily="18" charset="0"/>
             </a:endParaRPr>
           </a:p>
         </p:txBody>
@@ -7437,9 +7362,7 @@
             <a:avLst/>
           </a:prstGeom>
           <a:solidFill>
-            <a:schemeClr val="accent1">
-              <a:lumMod val="75000"/>
-            </a:schemeClr>
+            <a:srgbClr val="F4F1EC"/>
           </a:solidFill>
           <a:ln w="12700">
             <a:noFill/>
@@ -7476,12 +7399,13 @@
         <p:blipFill>
           <a:blip r:embed="rId3">
             <a:duotone>
-              <a:schemeClr val="accent4">
-                <a:shade val="45000"/>
-                <a:satMod val="135000"/>
-              </a:schemeClr>
-              <a:prstClr val="white"/>
+              <a:prstClr val="black"/>
+              <a:srgbClr val="1A2A42">
+                <a:tint val="45000"/>
+                <a:satMod val="400000"/>
+              </a:srgbClr>
             </a:duotone>
+            <a:alphaModFix amt="20000"/>
             <a:extLst>
               <a:ext uri="{BEBA8EAE-BF5A-486C-A8C5-ECC9F3942E4B}">
                 <a14:imgProps xmlns:a14="http://schemas.microsoft.com/office/drawing/2010/main">
@@ -7507,9 +7431,7 @@
             <a:avLst/>
           </a:prstGeom>
           <a:solidFill>
-            <a:schemeClr val="accent1">
-              <a:lumMod val="75000"/>
-            </a:schemeClr>
+            <a:srgbClr val="F4F1EC"/>
           </a:solidFill>
           <a:ln>
             <a:noFill/>
@@ -7531,9 +7453,7 @@
             <a:avLst/>
           </a:prstGeom>
           <a:solidFill>
-            <a:schemeClr val="accent1">
-              <a:lumMod val="75000"/>
-            </a:schemeClr>
+            <a:srgbClr val="F4F1EC"/>
           </a:solidFill>
           <a:ln>
             <a:noFill/>
@@ -7549,18 +7469,20 @@
             <a:r>
               <a:rPr lang="en-US" sz="1100" dirty="0">
                 <a:solidFill>
-                  <a:schemeClr val="bg1"/>
+                  <a:srgbClr val="1A2A42"/>
                 </a:solidFill>
-                <a:latin typeface="Calibri" pitchFamily="34" charset="0"/>
+                <a:latin typeface="Aptos" panose="020B0004020202020204" pitchFamily="34" charset="0"/>
                 <a:ea typeface="Calibri" pitchFamily="34" charset="-122"/>
-                <a:cs typeface="Calibri" pitchFamily="34" charset="-120"/>
+                <a:cs typeface="Aparajita" panose="02020603050405020304" pitchFamily="18" charset="0"/>
               </a:rPr>
               <a:t>Analytics dashboard for recruitment KPIs</a:t>
             </a:r>
             <a:endParaRPr lang="en-US" sz="1100" dirty="0">
               <a:solidFill>
-                <a:schemeClr val="bg1"/>
+                <a:srgbClr val="1A2A42"/>
               </a:solidFill>
+              <a:latin typeface="Aptos" panose="020B0004020202020204" pitchFamily="34" charset="0"/>
+              <a:cs typeface="Aparajita" panose="02020603050405020304" pitchFamily="18" charset="0"/>
             </a:endParaRPr>
           </a:p>
         </p:txBody>
@@ -7580,11 +7502,11 @@
             <a:avLst/>
           </a:prstGeom>
           <a:solidFill>
-            <a:srgbClr val="7C3AED"/>
+            <a:srgbClr val="C0994B"/>
           </a:solidFill>
           <a:ln w="12700">
             <a:solidFill>
-              <a:srgbClr val="7C3AED"/>
+              <a:srgbClr val="C0994B"/>
             </a:solidFill>
             <a:prstDash val="solid"/>
           </a:ln>
@@ -7593,7 +7515,7 @@
           <a:bodyPr/>
           <a:lstStyle/>
           <a:p>
-            <a:endParaRPr lang="en-GB"/>
+            <a:endParaRPr lang="en-GB" dirty="0"/>
           </a:p>
         </p:txBody>
       </p:sp>
@@ -7626,13 +7548,15 @@
                 <a:solidFill>
                   <a:srgbClr val="FFFFFF"/>
                 </a:solidFill>
-                <a:latin typeface="Calibri" pitchFamily="34" charset="0"/>
+                <a:latin typeface="BODONI 72 BOOK" pitchFamily="2" charset="0"/>
                 <a:ea typeface="Calibri" pitchFamily="34" charset="-122"/>
                 <a:cs typeface="Calibri" pitchFamily="34" charset="-120"/>
               </a:rPr>
               <a:t>Ethical &amp; Legal Considerations</a:t>
             </a:r>
-            <a:endParaRPr lang="en-US" sz="1300" dirty="0"/>
+            <a:endParaRPr lang="en-US" sz="1300" dirty="0">
+              <a:latin typeface="Bodoni 72 Book" pitchFamily="2" charset="0"/>
+            </a:endParaRPr>
           </a:p>
         </p:txBody>
       </p:sp>
@@ -7651,9 +7575,7 @@
             <a:avLst/>
           </a:prstGeom>
           <a:solidFill>
-            <a:schemeClr val="accent1">
-              <a:lumMod val="50000"/>
-            </a:schemeClr>
+            <a:srgbClr val="1A2A4A"/>
           </a:solidFill>
           <a:ln w="12700">
             <a:noFill/>
@@ -7764,9 +7686,9 @@
                 <a:solidFill>
                   <a:schemeClr val="bg1"/>
                 </a:solidFill>
-                <a:latin typeface="Calibri" pitchFamily="34" charset="0"/>
+                <a:latin typeface="Aptos" panose="020B0004020202020204" pitchFamily="34" charset="0"/>
                 <a:ea typeface="Calibri" pitchFamily="34" charset="-122"/>
-                <a:cs typeface="Calibri" pitchFamily="34" charset="-120"/>
+                <a:cs typeface="Aparajita" panose="02020603050405020304" pitchFamily="18" charset="0"/>
               </a:rPr>
               <a:t>EU AI Act (Annex III): automated hiring = high-risk AI</a:t>
             </a:r>
@@ -7774,6 +7696,8 @@
               <a:solidFill>
                 <a:schemeClr val="bg1"/>
               </a:solidFill>
+              <a:latin typeface="Aptos" panose="020B0004020202020204" pitchFamily="34" charset="0"/>
+              <a:cs typeface="Aparajita" panose="02020603050405020304" pitchFamily="18" charset="0"/>
             </a:endParaRPr>
           </a:p>
         </p:txBody>
@@ -7793,9 +7717,7 @@
             <a:avLst/>
           </a:prstGeom>
           <a:solidFill>
-            <a:schemeClr val="accent1">
-              <a:lumMod val="50000"/>
-            </a:schemeClr>
+            <a:srgbClr val="1A2A4A"/>
           </a:solidFill>
           <a:ln w="12700">
             <a:noFill/>
@@ -7906,9 +7828,9 @@
                 <a:solidFill>
                   <a:schemeClr val="bg1"/>
                 </a:solidFill>
-                <a:latin typeface="Calibri" pitchFamily="34" charset="0"/>
+                <a:latin typeface="Aptos" panose="020B0004020202020204" pitchFamily="34" charset="0"/>
                 <a:ea typeface="Calibri" pitchFamily="34" charset="-122"/>
-                <a:cs typeface="Calibri" pitchFamily="34" charset="-120"/>
+                <a:cs typeface="Aparajita" panose="02020603050405020304" pitchFamily="18" charset="0"/>
               </a:rPr>
               <a:t>Swiss DSG/nDSG: legal basis for processing candidate data required</a:t>
             </a:r>
@@ -7916,6 +7838,8 @@
               <a:solidFill>
                 <a:schemeClr val="bg1"/>
               </a:solidFill>
+              <a:latin typeface="Aptos" panose="020B0004020202020204" pitchFamily="34" charset="0"/>
+              <a:cs typeface="Aparajita" panose="02020603050405020304" pitchFamily="18" charset="0"/>
             </a:endParaRPr>
           </a:p>
         </p:txBody>
@@ -7935,9 +7859,7 @@
             <a:avLst/>
           </a:prstGeom>
           <a:solidFill>
-            <a:schemeClr val="accent1">
-              <a:lumMod val="50000"/>
-            </a:schemeClr>
+            <a:srgbClr val="1A2A4A"/>
           </a:solidFill>
           <a:ln w="12700">
             <a:noFill/>
@@ -8048,9 +7970,9 @@
                 <a:solidFill>
                   <a:schemeClr val="bg1"/>
                 </a:solidFill>
-                <a:latin typeface="Calibri" pitchFamily="34" charset="0"/>
+                <a:latin typeface="Aptos" panose="020B0004020202020204" pitchFamily="34" charset="0"/>
                 <a:ea typeface="Calibri" pitchFamily="34" charset="-122"/>
-                <a:cs typeface="Calibri" pitchFamily="34" charset="-120"/>
+                <a:cs typeface="Aparajita" panose="02020603050405020304" pitchFamily="18" charset="0"/>
               </a:rPr>
               <a:t>Right to explanation for rejected candidates must be guaranteed</a:t>
             </a:r>
@@ -8058,6 +7980,8 @@
               <a:solidFill>
                 <a:schemeClr val="bg1"/>
               </a:solidFill>
+              <a:latin typeface="Aptos" panose="020B0004020202020204" pitchFamily="34" charset="0"/>
+              <a:cs typeface="Aparajita" panose="02020603050405020304" pitchFamily="18" charset="0"/>
             </a:endParaRPr>
           </a:p>
         </p:txBody>
@@ -8077,9 +8001,7 @@
             <a:avLst/>
           </a:prstGeom>
           <a:solidFill>
-            <a:schemeClr val="accent1">
-              <a:lumMod val="50000"/>
-            </a:schemeClr>
+            <a:srgbClr val="1A2A4A"/>
           </a:solidFill>
           <a:ln w="12700">
             <a:noFill/>
@@ -8190,9 +8112,9 @@
                 <a:solidFill>
                   <a:schemeClr val="bg1"/>
                 </a:solidFill>
-                <a:latin typeface="Calibri" pitchFamily="34" charset="0"/>
+                <a:latin typeface="Aptos" panose="020B0004020202020204" pitchFamily="34" charset="0"/>
                 <a:ea typeface="Calibri" pitchFamily="34" charset="-122"/>
-                <a:cs typeface="Calibri" pitchFamily="34" charset="-120"/>
+                <a:cs typeface="Aparajita" panose="02020603050405020304" pitchFamily="18" charset="0"/>
               </a:rPr>
               <a:t>LLM output variability: human review of CV fields recommended in production</a:t>
             </a:r>
@@ -8200,6 +8122,8 @@
               <a:solidFill>
                 <a:schemeClr val="bg1"/>
               </a:solidFill>
+              <a:latin typeface="Aptos" panose="020B0004020202020204" pitchFamily="34" charset="0"/>
+              <a:cs typeface="Aparajita" panose="02020603050405020304" pitchFamily="18" charset="0"/>
             </a:endParaRPr>
           </a:p>
         </p:txBody>
@@ -8219,9 +8143,7 @@
             <a:avLst/>
           </a:prstGeom>
           <a:solidFill>
-            <a:schemeClr val="accent1">
-              <a:lumMod val="50000"/>
-            </a:schemeClr>
+            <a:srgbClr val="1A2A4A"/>
           </a:solidFill>
           <a:ln w="12700">
             <a:noFill/>
@@ -8332,9 +8254,9 @@
                 <a:solidFill>
                   <a:schemeClr val="bg1"/>
                 </a:solidFill>
-                <a:latin typeface="Calibri" pitchFamily="34" charset="0"/>
+                <a:latin typeface="Aptos" panose="020B0004020202020204" pitchFamily="34" charset="0"/>
                 <a:ea typeface="Calibri" pitchFamily="34" charset="-122"/>
-                <a:cs typeface="Calibri" pitchFamily="34" charset="-120"/>
+                <a:cs typeface="Aparajita" panose="02020603050405020304" pitchFamily="18" charset="0"/>
               </a:rPr>
               <a:t>DMN weights &amp; thresholds require validation by HR domain experts</a:t>
             </a:r>
@@ -8342,6 +8264,8 @@
               <a:solidFill>
                 <a:schemeClr val="bg1"/>
               </a:solidFill>
+              <a:latin typeface="Aptos" panose="020B0004020202020204" pitchFamily="34" charset="0"/>
+              <a:cs typeface="Aparajita" panose="02020603050405020304" pitchFamily="18" charset="0"/>
             </a:endParaRPr>
           </a:p>
         </p:txBody>
@@ -8357,6 +8281,14 @@
 <file path=ppt/slides/slide8.xml><?xml version="1.0" encoding="utf-8"?>
 <p:sld xmlns:a="http://schemas.openxmlformats.org/drawingml/2006/main" xmlns:r="http://schemas.openxmlformats.org/officeDocument/2006/relationships" xmlns:p="http://schemas.openxmlformats.org/presentationml/2006/main">
   <p:cSld name="Slide 10">
+    <p:bg>
+      <p:bgPr>
+        <a:solidFill>
+          <a:srgbClr val="1A2A42"/>
+        </a:solidFill>
+        <a:effectLst/>
+      </p:bgPr>
+    </p:bg>
     <p:spTree>
       <p:nvGrpSpPr>
         <p:cNvPr id="1" name=""/>
@@ -8386,7 +8318,7 @@
             <a:avLst/>
           </a:prstGeom>
           <a:solidFill>
-            <a:srgbClr val="FFC000"/>
+            <a:srgbClr val="F4F1EC"/>
           </a:solidFill>
           <a:ln w="12700">
             <a:noFill/>
@@ -8397,7 +8329,7 @@
           <a:bodyPr/>
           <a:lstStyle/>
           <a:p>
-            <a:endParaRPr lang="en-GB"/>
+            <a:endParaRPr lang="en-GB" dirty="0"/>
           </a:p>
         </p:txBody>
       </p:sp>
@@ -8433,10 +8365,13 @@
                 <a:solidFill>
                   <a:srgbClr val="FFFFFF"/>
                 </a:solidFill>
+                <a:latin typeface="BODONI 72 BOOK" pitchFamily="2" charset="0"/>
               </a:rPr>
               <a:t>The future of</a:t>
             </a:r>
-            <a:endParaRPr lang="en-US" sz="3600" dirty="0"/>
+            <a:endParaRPr lang="en-US" sz="3600" dirty="0">
+              <a:latin typeface="Bodoni 72 Book" pitchFamily="2" charset="0"/>
+            </a:endParaRPr>
           </a:p>
           <a:p>
             <a:pPr marL="0" indent="0" algn="l">
@@ -8450,10 +8385,13 @@
                 <a:solidFill>
                   <a:srgbClr val="FFFFFF"/>
                 </a:solidFill>
+                <a:latin typeface="BODONI 72 BOOK" pitchFamily="2" charset="0"/>
               </a:rPr>
               <a:t>hiring is</a:t>
             </a:r>
-            <a:endParaRPr lang="en-US" sz="3600" dirty="0"/>
+            <a:endParaRPr lang="en-US" sz="3600" dirty="0">
+              <a:latin typeface="Bodoni 72 Book" pitchFamily="2" charset="0"/>
+            </a:endParaRPr>
           </a:p>
           <a:p>
             <a:pPr marL="0" indent="0" algn="l">
@@ -8467,10 +8405,13 @@
                 <a:solidFill>
                   <a:srgbClr val="FFFFFF"/>
                 </a:solidFill>
+                <a:latin typeface="BODONI 72 BOOK" pitchFamily="2" charset="0"/>
               </a:rPr>
               <a:t>automated.</a:t>
             </a:r>
-            <a:endParaRPr lang="en-US" sz="3600" dirty="0"/>
+            <a:endParaRPr lang="en-US" sz="3600" dirty="0">
+              <a:latin typeface="Bodoni 72 Book" pitchFamily="2" charset="0"/>
+            </a:endParaRPr>
           </a:p>
         </p:txBody>
       </p:sp>
@@ -8501,12 +8442,18 @@
             <a:r>
               <a:rPr lang="en-US" sz="3200" b="1" dirty="0">
                 <a:solidFill>
-                  <a:srgbClr val="FFFFFF"/>
+                  <a:srgbClr val="C0994B"/>
                 </a:solidFill>
+                <a:latin typeface="Aptos" panose="020B0004020202020204" pitchFamily="34" charset="0"/>
               </a:rPr>
               <a:t>Thank you</a:t>
             </a:r>
-            <a:endParaRPr lang="en-US" sz="3200" dirty="0"/>
+            <a:endParaRPr lang="en-US" sz="3200" dirty="0">
+              <a:solidFill>
+                <a:srgbClr val="C0994B"/>
+              </a:solidFill>
+              <a:latin typeface="Aptos" panose="020B0004020202020204" pitchFamily="34" charset="0"/>
+            </a:endParaRPr>
           </a:p>
         </p:txBody>
       </p:sp>
@@ -8537,12 +8484,12 @@
             <a:r>
               <a:rPr lang="en-US" sz="1300" dirty="0">
                 <a:solidFill>
-                  <a:srgbClr val="FFFFFF"/>
+                  <a:srgbClr val="1A2A42"/>
                 </a:solidFill>
+                <a:latin typeface="Bodoni 72 Book" pitchFamily="2" charset="0"/>
               </a:rPr>
               <a:t>Ece Kaya</a:t>
             </a:r>
-            <a:endParaRPr lang="en-US" sz="1300" dirty="0"/>
           </a:p>
         </p:txBody>
       </p:sp>
@@ -8573,12 +8520,12 @@
             <a:r>
               <a:rPr lang="en-US" sz="1300" dirty="0">
                 <a:solidFill>
-                  <a:srgbClr val="FFFFFF"/>
+                  <a:srgbClr val="C0994B"/>
                 </a:solidFill>
+                <a:latin typeface="Bodoni 72 Book" pitchFamily="2" charset="0"/>
               </a:rPr>
               <a:t>Furkan Aydin</a:t>
             </a:r>
-            <a:endParaRPr lang="en-US" sz="1300" dirty="0"/>
           </a:p>
         </p:txBody>
       </p:sp>
@@ -8609,12 +8556,12 @@
             <a:r>
               <a:rPr lang="en-US" sz="1300" dirty="0">
                 <a:solidFill>
-                  <a:srgbClr val="FFFFFF"/>
+                  <a:srgbClr val="1A2A42"/>
                 </a:solidFill>
+                <a:latin typeface="Bodoni 72 Book" pitchFamily="2" charset="0"/>
               </a:rPr>
               <a:t>Dominic Däster</a:t>
             </a:r>
-            <a:endParaRPr lang="en-US" sz="1300" dirty="0"/>
           </a:p>
         </p:txBody>
       </p:sp>
@@ -8645,12 +8592,12 @@
             <a:r>
               <a:rPr lang="en-US" sz="1300" dirty="0">
                 <a:solidFill>
-                  <a:srgbClr val="FFFFFF"/>
+                  <a:srgbClr val="C0994B"/>
                 </a:solidFill>
+                <a:latin typeface="Bodoni 72 Book" pitchFamily="2" charset="0"/>
               </a:rPr>
               <a:t>Keethan Nathan</a:t>
             </a:r>
-            <a:endParaRPr lang="en-US" sz="1300" dirty="0"/>
           </a:p>
         </p:txBody>
       </p:sp>

--- a/Tierpark_Goldau_Presentation.pptx
+++ b/Tierpark_Goldau_Presentation.pptx
@@ -3288,9 +3288,165 @@
           <a:bodyPr wrap="square" lIns="0" tIns="0" rIns="0" bIns="0" rtlCol="0" anchor="ctr"/>
           <a:lstStyle/>
           <a:p>
+            <a:endParaRPr lang="en-US" sz="1100" dirty="0">
+              <a:solidFill>
+                <a:srgbClr val="1A2A42"/>
+              </a:solidFill>
+              <a:latin typeface="Aptos" panose="020B0004020202020204" pitchFamily="34" charset="0"/>
+              <a:cs typeface="Aparajita" panose="02020603050405020304" pitchFamily="18" charset="0"/>
+            </a:endParaRPr>
+          </a:p>
+          <a:p>
+            <a:r>
+              <a:rPr lang="en-US" sz="1100" dirty="0">
+                <a:solidFill>
+                  <a:srgbClr val="1A2A42"/>
+                </a:solidFill>
+                <a:latin typeface="Aptos" panose="020B0004020202020204" pitchFamily="34" charset="0"/>
+                <a:cs typeface="Aparajita" panose="02020603050405020304" pitchFamily="18" charset="0"/>
+              </a:rPr>
+              <a:t>Interviews and assessments lack </a:t>
+            </a:r>
+            <a:r>
+              <a:rPr lang="en-US" sz="1100" dirty="0" err="1">
+                <a:solidFill>
+                  <a:srgbClr val="1A2A42"/>
+                </a:solidFill>
+                <a:latin typeface="Aptos" panose="020B0004020202020204" pitchFamily="34" charset="0"/>
+                <a:cs typeface="Aparajita" panose="02020603050405020304" pitchFamily="18" charset="0"/>
+              </a:rPr>
+              <a:t>standardised</a:t>
+            </a:r>
+            <a:r>
+              <a:rPr lang="en-US" sz="1100" dirty="0">
+                <a:solidFill>
+                  <a:srgbClr val="1A2A42"/>
+                </a:solidFill>
+                <a:latin typeface="Aptos" panose="020B0004020202020204" pitchFamily="34" charset="0"/>
+                <a:cs typeface="Aparajita" panose="02020603050405020304" pitchFamily="18" charset="0"/>
+              </a:rPr>
+              <a:t> evaluation criteria</a:t>
+            </a:r>
+          </a:p>
+          <a:p>
             <a:pPr marL="0" indent="0" algn="l">
               <a:buNone/>
             </a:pPr>
+            <a:endParaRPr lang="en-US" sz="1100" dirty="0">
+              <a:solidFill>
+                <a:srgbClr val="1A2A42"/>
+              </a:solidFill>
+              <a:latin typeface="Aptos" panose="020B0004020202020204" pitchFamily="34" charset="0"/>
+              <a:cs typeface="Aparajita" panose="02020603050405020304" pitchFamily="18" charset="0"/>
+            </a:endParaRPr>
+          </a:p>
+        </p:txBody>
+      </p:sp>
+      <p:sp>
+        <p:nvSpPr>
+          <p:cNvPr id="12" name="Shape 10"/>
+          <p:cNvSpPr/>
+          <p:nvPr/>
+        </p:nvSpPr>
+        <p:spPr>
+          <a:xfrm>
+            <a:off x="228600" y="2514600"/>
+            <a:ext cx="4206240" cy="914400"/>
+          </a:xfrm>
+          <a:prstGeom prst="rect">
+            <a:avLst/>
+          </a:prstGeom>
+          <a:solidFill>
+            <a:srgbClr val="F4F1EC"/>
+          </a:solidFill>
+          <a:ln w="12700">
+            <a:noFill/>
+            <a:prstDash val="solid"/>
+          </a:ln>
+          <a:effectLst>
+            <a:outerShdw blurRad="50800" dist="12700" dir="8100000" algn="bl" rotWithShape="0">
+              <a:srgbClr val="000000">
+                <a:alpha val="8000"/>
+              </a:srgbClr>
+            </a:outerShdw>
+          </a:effectLst>
+        </p:spPr>
+        <p:txBody>
+          <a:bodyPr/>
+          <a:lstStyle/>
+          <a:p>
+            <a:endParaRPr lang="en-GB">
+              <a:latin typeface="Aptos" panose="020B0004020202020204" pitchFamily="34" charset="0"/>
+              <a:cs typeface="Aparajita" panose="02020603050405020304" pitchFamily="18" charset="0"/>
+            </a:endParaRPr>
+          </a:p>
+        </p:txBody>
+      </p:sp>
+      <p:sp>
+        <p:nvSpPr>
+          <p:cNvPr id="13" name="Text 11"/>
+          <p:cNvSpPr/>
+          <p:nvPr/>
+        </p:nvSpPr>
+        <p:spPr>
+          <a:xfrm>
+            <a:off x="365760" y="2578608"/>
+            <a:ext cx="3931920" cy="320040"/>
+          </a:xfrm>
+          <a:prstGeom prst="rect">
+            <a:avLst/>
+          </a:prstGeom>
+          <a:solidFill>
+            <a:srgbClr val="F4F1EC"/>
+          </a:solidFill>
+          <a:ln>
+            <a:noFill/>
+          </a:ln>
+        </p:spPr>
+        <p:txBody>
+          <a:bodyPr wrap="square" lIns="0" tIns="0" rIns="0" bIns="0" rtlCol="0" anchor="ctr"/>
+          <a:lstStyle/>
+          <a:p>
+            <a:pPr marL="0" indent="0" algn="l">
+              <a:buNone/>
+            </a:pPr>
+            <a:r>
+              <a:rPr lang="en-US" sz="1300" b="1" dirty="0">
+                <a:solidFill>
+                  <a:srgbClr val="C0994B"/>
+                </a:solidFill>
+                <a:latin typeface="BODONI 72 BOOK" pitchFamily="2" charset="0"/>
+              </a:rPr>
+              <a:t>Manual Scheduling &amp; Communication</a:t>
+            </a:r>
+          </a:p>
+        </p:txBody>
+      </p:sp>
+      <p:sp>
+        <p:nvSpPr>
+          <p:cNvPr id="14" name="Text 12"/>
+          <p:cNvSpPr/>
+          <p:nvPr/>
+        </p:nvSpPr>
+        <p:spPr>
+          <a:xfrm>
+            <a:off x="365760" y="2898648"/>
+            <a:ext cx="3931920" cy="411480"/>
+          </a:xfrm>
+          <a:prstGeom prst="rect">
+            <a:avLst/>
+          </a:prstGeom>
+          <a:solidFill>
+            <a:srgbClr val="F4F1EC"/>
+          </a:solidFill>
+          <a:ln>
+            <a:noFill/>
+          </a:ln>
+        </p:spPr>
+        <p:txBody>
+          <a:bodyPr wrap="square" lIns="0" tIns="0" rIns="0" bIns="0" rtlCol="0" anchor="ctr"/>
+          <a:lstStyle/>
+          <a:p>
             <a:r>
               <a:rPr lang="en-US" sz="1100" dirty="0">
                 <a:solidFill>
@@ -3306,13 +3462,13 @@
       </p:sp>
       <p:sp>
         <p:nvSpPr>
-          <p:cNvPr id="12" name="Shape 10"/>
-          <p:cNvSpPr/>
-          <p:nvPr/>
-        </p:nvSpPr>
-        <p:spPr>
-          <a:xfrm>
-            <a:off x="228600" y="2514600"/>
+          <p:cNvPr id="15" name="Shape 13"/>
+          <p:cNvSpPr/>
+          <p:nvPr/>
+        </p:nvSpPr>
+        <p:spPr>
+          <a:xfrm>
+            <a:off x="4663440" y="2514600"/>
             <a:ext cx="4206240" cy="914400"/>
           </a:xfrm>
           <a:prstGeom prst="rect">
@@ -3337,22 +3493,19 @@
           <a:bodyPr/>
           <a:lstStyle/>
           <a:p>
-            <a:endParaRPr lang="en-GB">
-              <a:latin typeface="Aptos" panose="020B0004020202020204" pitchFamily="34" charset="0"/>
-              <a:cs typeface="Aparajita" panose="02020603050405020304" pitchFamily="18" charset="0"/>
-            </a:endParaRPr>
-          </a:p>
-        </p:txBody>
-      </p:sp>
-      <p:sp>
-        <p:nvSpPr>
-          <p:cNvPr id="13" name="Text 11"/>
-          <p:cNvSpPr/>
-          <p:nvPr/>
-        </p:nvSpPr>
-        <p:spPr>
-          <a:xfrm>
-            <a:off x="365760" y="2578608"/>
+            <a:endParaRPr lang="en-GB"/>
+          </a:p>
+        </p:txBody>
+      </p:sp>
+      <p:sp>
+        <p:nvSpPr>
+          <p:cNvPr id="16" name="Text 14"/>
+          <p:cNvSpPr/>
+          <p:nvPr/>
+        </p:nvSpPr>
+        <p:spPr>
+          <a:xfrm>
+            <a:off x="4800600" y="2578608"/>
             <a:ext cx="3931920" cy="320040"/>
           </a:xfrm>
           <a:prstGeom prst="rect">
@@ -3379,20 +3532,20 @@
                 </a:solidFill>
                 <a:latin typeface="BODONI 72 BOOK" pitchFamily="2" charset="0"/>
               </a:rPr>
-              <a:t>Manual Scheduling &amp; Communication</a:t>
-            </a:r>
-          </a:p>
-        </p:txBody>
-      </p:sp>
-      <p:sp>
-        <p:nvSpPr>
-          <p:cNvPr id="14" name="Text 12"/>
-          <p:cNvSpPr/>
-          <p:nvPr/>
-        </p:nvSpPr>
-        <p:spPr>
-          <a:xfrm>
-            <a:off x="365760" y="2898648"/>
+              <a:t>No Structured Evaluation</a:t>
+            </a:r>
+          </a:p>
+        </p:txBody>
+      </p:sp>
+      <p:sp>
+        <p:nvSpPr>
+          <p:cNvPr id="17" name="Text 15"/>
+          <p:cNvSpPr/>
+          <p:nvPr/>
+        </p:nvSpPr>
+        <p:spPr>
+          <a:xfrm>
+            <a:off x="4800600" y="2898648"/>
             <a:ext cx="3931920" cy="411480"/>
           </a:xfrm>
           <a:prstGeom prst="rect">
@@ -3420,20 +3573,20 @@
                 <a:latin typeface="Aptos" panose="020B0004020202020204" pitchFamily="34" charset="0"/>
                 <a:cs typeface="Aparajita" panose="02020603050405020304" pitchFamily="18" charset="0"/>
               </a:rPr>
-              <a:t>Interviews and assessments lack standardised evaluation criteria</a:t>
-            </a:r>
-          </a:p>
-        </p:txBody>
-      </p:sp>
-      <p:sp>
-        <p:nvSpPr>
-          <p:cNvPr id="15" name="Shape 13"/>
-          <p:cNvSpPr/>
-          <p:nvPr/>
-        </p:nvSpPr>
-        <p:spPr>
-          <a:xfrm>
-            <a:off x="4663440" y="2514600"/>
+              <a:t>Interviews and candidate evaluations are conducted without a standardized format</a:t>
+            </a:r>
+          </a:p>
+        </p:txBody>
+      </p:sp>
+      <p:sp>
+        <p:nvSpPr>
+          <p:cNvPr id="18" name="Shape 16"/>
+          <p:cNvSpPr/>
+          <p:nvPr/>
+        </p:nvSpPr>
+        <p:spPr>
+          <a:xfrm>
+            <a:off x="228600" y="3611880"/>
             <a:ext cx="4206240" cy="914400"/>
           </a:xfrm>
           <a:prstGeom prst="rect">
@@ -3464,124 +3617,6 @@
       </p:sp>
       <p:sp>
         <p:nvSpPr>
-          <p:cNvPr id="16" name="Text 14"/>
-          <p:cNvSpPr/>
-          <p:nvPr/>
-        </p:nvSpPr>
-        <p:spPr>
-          <a:xfrm>
-            <a:off x="4800600" y="2578608"/>
-            <a:ext cx="3931920" cy="320040"/>
-          </a:xfrm>
-          <a:prstGeom prst="rect">
-            <a:avLst/>
-          </a:prstGeom>
-          <a:solidFill>
-            <a:srgbClr val="F4F1EC"/>
-          </a:solidFill>
-          <a:ln>
-            <a:noFill/>
-          </a:ln>
-        </p:spPr>
-        <p:txBody>
-          <a:bodyPr wrap="square" lIns="0" tIns="0" rIns="0" bIns="0" rtlCol="0" anchor="ctr"/>
-          <a:lstStyle/>
-          <a:p>
-            <a:pPr marL="0" indent="0" algn="l">
-              <a:buNone/>
-            </a:pPr>
-            <a:r>
-              <a:rPr lang="en-US" sz="1300" b="1" dirty="0">
-                <a:solidFill>
-                  <a:srgbClr val="C0994B"/>
-                </a:solidFill>
-                <a:latin typeface="BODONI 72 BOOK" pitchFamily="2" charset="0"/>
-              </a:rPr>
-              <a:t>No Structured Evaluation</a:t>
-            </a:r>
-          </a:p>
-        </p:txBody>
-      </p:sp>
-      <p:sp>
-        <p:nvSpPr>
-          <p:cNvPr id="17" name="Text 15"/>
-          <p:cNvSpPr/>
-          <p:nvPr/>
-        </p:nvSpPr>
-        <p:spPr>
-          <a:xfrm>
-            <a:off x="4800600" y="2898648"/>
-            <a:ext cx="3931920" cy="411480"/>
-          </a:xfrm>
-          <a:prstGeom prst="rect">
-            <a:avLst/>
-          </a:prstGeom>
-          <a:solidFill>
-            <a:srgbClr val="F4F1EC"/>
-          </a:solidFill>
-          <a:ln>
-            <a:noFill/>
-          </a:ln>
-        </p:spPr>
-        <p:txBody>
-          <a:bodyPr wrap="square" lIns="0" tIns="0" rIns="0" bIns="0" rtlCol="0" anchor="ctr"/>
-          <a:lstStyle/>
-          <a:p>
-            <a:pPr marL="0" indent="0" algn="l">
-              <a:buNone/>
-            </a:pPr>
-            <a:r>
-              <a:rPr lang="en-US" sz="1100" dirty="0">
-                <a:solidFill>
-                  <a:srgbClr val="1A2A42"/>
-                </a:solidFill>
-                <a:latin typeface="Aptos" panose="020B0004020202020204" pitchFamily="34" charset="0"/>
-                <a:cs typeface="Aparajita" panose="02020603050405020304" pitchFamily="18" charset="0"/>
-              </a:rPr>
-              <a:t>IT access, Slack, tasks, coordinated manually every single time</a:t>
-            </a:r>
-          </a:p>
-        </p:txBody>
-      </p:sp>
-      <p:sp>
-        <p:nvSpPr>
-          <p:cNvPr id="18" name="Shape 16"/>
-          <p:cNvSpPr/>
-          <p:nvPr/>
-        </p:nvSpPr>
-        <p:spPr>
-          <a:xfrm>
-            <a:off x="228600" y="3611880"/>
-            <a:ext cx="4206240" cy="914400"/>
-          </a:xfrm>
-          <a:prstGeom prst="rect">
-            <a:avLst/>
-          </a:prstGeom>
-          <a:solidFill>
-            <a:srgbClr val="F4F1EC"/>
-          </a:solidFill>
-          <a:ln w="12700">
-            <a:noFill/>
-            <a:prstDash val="solid"/>
-          </a:ln>
-          <a:effectLst>
-            <a:outerShdw blurRad="50800" dist="12700" dir="8100000" algn="bl" rotWithShape="0">
-              <a:srgbClr val="000000">
-                <a:alpha val="8000"/>
-              </a:srgbClr>
-            </a:outerShdw>
-          </a:effectLst>
-        </p:spPr>
-        <p:txBody>
-          <a:bodyPr/>
-          <a:lstStyle/>
-          <a:p>
-            <a:endParaRPr lang="en-GB"/>
-          </a:p>
-        </p:txBody>
-      </p:sp>
-      <p:sp>
-        <p:nvSpPr>
           <p:cNvPr id="19" name="Text 17"/>
           <p:cNvSpPr/>
           <p:nvPr/>
@@ -3645,137 +3680,17 @@
           <a:bodyPr wrap="square" lIns="0" tIns="0" rIns="0" bIns="0" rtlCol="0" anchor="ctr"/>
           <a:lstStyle/>
           <a:p>
-            <a:pPr marL="0" indent="0" algn="l">
-              <a:buNone/>
-            </a:pPr>
-            <a:r>
-              <a:rPr lang="en-US" sz="1100" dirty="0">
-                <a:solidFill>
-                  <a:srgbClr val="1A2A42"/>
-                </a:solidFill>
-                <a:latin typeface="Aptos" panose="020B0004020202020204" pitchFamily="34" charset="0"/>
-                <a:cs typeface="Aparajita" panose="02020603050405020304" pitchFamily="18" charset="0"/>
-              </a:rPr>
-              <a:t>Two recruiters, two outcomes.  Bias creeps in at every stage</a:t>
-            </a:r>
-          </a:p>
-        </p:txBody>
-      </p:sp>
-      <p:sp>
-        <p:nvSpPr>
-          <p:cNvPr id="21" name="Shape 19"/>
-          <p:cNvSpPr/>
-          <p:nvPr/>
-        </p:nvSpPr>
-        <p:spPr>
-          <a:xfrm>
-            <a:off x="4663440" y="3630168"/>
-            <a:ext cx="4206240" cy="914400"/>
-          </a:xfrm>
-          <a:prstGeom prst="rect">
-            <a:avLst/>
-          </a:prstGeom>
-          <a:solidFill>
-            <a:srgbClr val="F4F1EC"/>
-          </a:solidFill>
-          <a:ln w="12700">
-            <a:noFill/>
-            <a:prstDash val="solid"/>
-          </a:ln>
-          <a:effectLst>
-            <a:outerShdw blurRad="50800" dist="12700" dir="8100000" algn="bl" rotWithShape="0">
-              <a:srgbClr val="000000">
-                <a:alpha val="8000"/>
-              </a:srgbClr>
-            </a:outerShdw>
-          </a:effectLst>
-        </p:spPr>
-        <p:txBody>
-          <a:bodyPr/>
-          <a:lstStyle/>
-          <a:p>
-            <a:endParaRPr lang="en-GB"/>
-          </a:p>
-        </p:txBody>
-      </p:sp>
-      <p:sp>
-        <p:nvSpPr>
-          <p:cNvPr id="22" name="Text 20"/>
-          <p:cNvSpPr/>
-          <p:nvPr/>
-        </p:nvSpPr>
-        <p:spPr>
-          <a:xfrm>
-            <a:off x="4800600" y="3675888"/>
-            <a:ext cx="3931920" cy="320040"/>
-          </a:xfrm>
-          <a:prstGeom prst="rect">
-            <a:avLst/>
-          </a:prstGeom>
-          <a:solidFill>
-            <a:srgbClr val="F4F1EC"/>
-          </a:solidFill>
-          <a:ln>
-            <a:noFill/>
-          </a:ln>
-        </p:spPr>
-        <p:txBody>
-          <a:bodyPr wrap="square" lIns="0" tIns="0" rIns="0" bIns="0" rtlCol="0" anchor="ctr"/>
-          <a:lstStyle/>
-          <a:p>
-            <a:pPr marL="0" indent="0" algn="l">
-              <a:buNone/>
-            </a:pPr>
-            <a:r>
-              <a:rPr lang="en-US" sz="1300" b="1" dirty="0">
-                <a:solidFill>
-                  <a:srgbClr val="C0994B"/>
-                </a:solidFill>
-                <a:latin typeface="BODONI 72 BOOK" pitchFamily="2" charset="0"/>
-              </a:rPr>
-              <a:t>Unstructured Onboarding</a:t>
-            </a:r>
-          </a:p>
-        </p:txBody>
-      </p:sp>
-      <p:sp>
-        <p:nvSpPr>
-          <p:cNvPr id="23" name="Text 21"/>
-          <p:cNvSpPr/>
-          <p:nvPr/>
-        </p:nvSpPr>
-        <p:spPr>
-          <a:xfrm>
-            <a:off x="4800600" y="3995928"/>
-            <a:ext cx="3931920" cy="411480"/>
-          </a:xfrm>
-          <a:prstGeom prst="rect">
-            <a:avLst/>
-          </a:prstGeom>
-          <a:solidFill>
-            <a:srgbClr val="F4F1EC"/>
-          </a:solidFill>
-          <a:ln>
-            <a:noFill/>
-          </a:ln>
-        </p:spPr>
-        <p:txBody>
-          <a:bodyPr wrap="square" lIns="0" tIns="0" rIns="0" bIns="0" rtlCol="0" anchor="ctr"/>
-          <a:lstStyle/>
-          <a:p>
-            <a:pPr marL="0" indent="0" algn="l">
-              <a:buNone/>
-            </a:pPr>
-            <a:r>
-              <a:rPr lang="en-US" sz="1100" dirty="0">
-                <a:solidFill>
-                  <a:srgbClr val="1A2A42"/>
-                </a:solidFill>
-                <a:latin typeface="Aptos" panose="020B0004020202020204" pitchFamily="34" charset="0"/>
-                <a:cs typeface="Aparajita" panose="02020603050405020304" pitchFamily="18" charset="0"/>
-              </a:rPr>
-              <a:t>IT access, workspace &amp; introductions coordinated by hand. Steps are forgotten or delayed</a:t>
-            </a:r>
+            <a:r>
+              <a:rPr lang="en-US" sz="1100" dirty="0"/>
+              <a:t>Process is slow and also susceptible to errors</a:t>
+            </a:r>
+            <a:endParaRPr lang="en-US" sz="1100" dirty="0">
+              <a:solidFill>
+                <a:srgbClr val="1A2A42"/>
+              </a:solidFill>
+              <a:latin typeface="Aptos" panose="020B0004020202020204" pitchFamily="34" charset="0"/>
+              <a:cs typeface="Aparajita" panose="02020603050405020304" pitchFamily="18" charset="0"/>
+            </a:endParaRPr>
           </a:p>
         </p:txBody>
       </p:sp>
@@ -6110,7 +6025,7 @@
                 <a:ea typeface="Calibri" pitchFamily="34" charset="-122"/>
                 <a:cs typeface="Calibri" pitchFamily="34" charset="-120"/>
               </a:rPr>
-              <a:t>Using the Claude API to extract CV fields from PDF removed the biggest manual bottleneck.  But output quality depends on CV formatting.</a:t>
+              <a:t>Using the Claude API to extract CV fields from PDF removed the biggest manual bottleneck.  </a:t>
             </a:r>
             <a:endParaRPr lang="en-US" sz="1050" dirty="0">
               <a:solidFill>
